--- a/Sunum.pptx
+++ b/Sunum.pptx
@@ -2,11 +2,21 @@
 <file path=ppt/presentation.xml><?xml version="1.0" encoding="utf-8"?>
 <p:presentation xmlns:a="http://schemas.openxmlformats.org/drawingml/2006/main" xmlns:r="http://schemas.openxmlformats.org/officeDocument/2006/relationships" xmlns:p="http://schemas.openxmlformats.org/presentationml/2006/main" saveSubsetFonts="1">
   <p:sldMasterIdLst>
-    <p:sldMasterId id="2147483678" r:id="rId1"/>
+    <p:sldMasterId id="2147483714" r:id="rId1"/>
   </p:sldMasterIdLst>
   <p:sldIdLst>
     <p:sldId id="256" r:id="rId2"/>
     <p:sldId id="257" r:id="rId3"/>
+    <p:sldId id="258" r:id="rId4"/>
+    <p:sldId id="259" r:id="rId5"/>
+    <p:sldId id="260" r:id="rId6"/>
+    <p:sldId id="261" r:id="rId7"/>
+    <p:sldId id="262" r:id="rId8"/>
+    <p:sldId id="263" r:id="rId9"/>
+    <p:sldId id="264" r:id="rId10"/>
+    <p:sldId id="265" r:id="rId11"/>
+    <p:sldId id="266" r:id="rId12"/>
+    <p:sldId id="267" r:id="rId13"/>
   </p:sldIdLst>
   <p:sldSz cx="12192000" cy="6858000"/>
   <p:notesSz cx="6858000" cy="9144000"/>
@@ -105,6 +115,11 @@
       </a:defRPr>
     </a:lvl9pPr>
   </p:defaultTextStyle>
+  <p:extLst>
+    <p:ext uri="{EFAFB233-063F-42B5-8137-9DF3F51BA10A}">
+      <p15:sldGuideLst xmlns:p15="http://schemas.microsoft.com/office/powerpoint/2012/main"/>
+    </p:ext>
+  </p:extLst>
 </p:presentation>
 </file>
 
@@ -137,17 +152,15 @@
         </p:nvSpPr>
         <p:spPr>
           <a:xfrm>
-            <a:off x="1370693" y="1769540"/>
-            <a:ext cx="9440034" cy="1828801"/>
+            <a:off x="1154955" y="1447800"/>
+            <a:ext cx="8825658" cy="3329581"/>
           </a:xfrm>
         </p:spPr>
         <p:txBody>
-          <a:bodyPr anchor="b">
-            <a:normAutofit/>
-          </a:bodyPr>
+          <a:bodyPr anchor="b"/>
           <a:lstStyle>
-            <a:lvl1pPr algn="ctr">
-              <a:defRPr sz="5400"/>
+            <a:lvl1pPr>
+              <a:defRPr sz="7200"/>
             </a:lvl1pPr>
           </a:lstStyle>
           <a:p>
@@ -171,18 +184,21 @@
         </p:nvSpPr>
         <p:spPr>
           <a:xfrm>
-            <a:off x="1370693" y="3598339"/>
-            <a:ext cx="9440034" cy="1049867"/>
+            <a:off x="1154955" y="4777380"/>
+            <a:ext cx="8825658" cy="861420"/>
           </a:xfrm>
         </p:spPr>
         <p:txBody>
           <a:bodyPr anchor="t"/>
           <a:lstStyle>
-            <a:lvl1pPr marL="0" indent="0" algn="ctr">
-              <a:buNone/>
-              <a:defRPr>
+            <a:lvl1pPr marL="0" indent="0" algn="l">
+              <a:buNone/>
+              <a:defRPr cap="all">
                 <a:solidFill>
-                  <a:schemeClr val="tx1"/>
+                  <a:schemeClr val="bg2">
+                    <a:lumMod val="40000"/>
+                    <a:lumOff val="60000"/>
+                  </a:schemeClr>
                 </a:solidFill>
               </a:defRPr>
             </a:lvl1pPr>
@@ -344,7 +360,7 @@
     </p:spTree>
     <p:extLst>
       <p:ext uri="{BB962C8B-B14F-4D97-AF65-F5344CB8AC3E}">
-        <p14:creationId xmlns:p14="http://schemas.microsoft.com/office/powerpoint/2010/main" val="3580348637"/>
+        <p14:creationId xmlns:p14="http://schemas.microsoft.com/office/powerpoint/2010/main" val="1372821763"/>
       </p:ext>
     </p:extLst>
   </p:cSld>
@@ -371,50 +387,20 @@
           <a:chExt cx="0" cy="0"/>
         </a:xfrm>
       </p:grpSpPr>
-      <p:pic>
-        <p:nvPicPr>
-          <p:cNvPr id="16" name="Picture 15" descr="Slate-V2-HD-panoPhotoInset.png"/>
-          <p:cNvPicPr>
-            <a:picLocks noChangeAspect="1"/>
-          </p:cNvPicPr>
-          <p:nvPr/>
-        </p:nvPicPr>
-        <p:blipFill>
-          <a:blip r:embed="rId2">
-            <a:extLst>
-              <a:ext uri="{28A0092B-C50C-407E-A947-70E740481C1C}">
-                <a14:useLocalDpi xmlns:a14="http://schemas.microsoft.com/office/drawing/2010/main" val="0"/>
-              </a:ext>
-            </a:extLst>
-          </a:blip>
-          <a:stretch>
-            <a:fillRect/>
-          </a:stretch>
-        </p:blipFill>
+      <p:sp>
+        <p:nvSpPr>
+          <p:cNvPr id="2" name="Title 1"/>
+          <p:cNvSpPr>
+            <a:spLocks noGrp="1"/>
+          </p:cNvSpPr>
+          <p:nvPr>
+            <p:ph type="title"/>
+          </p:nvPr>
+        </p:nvSpPr>
         <p:spPr>
           <a:xfrm>
-            <a:off x="1013883" y="547807"/>
-            <a:ext cx="10141799" cy="3816806"/>
-          </a:xfrm>
-          <a:prstGeom prst="rect">
-            <a:avLst/>
-          </a:prstGeom>
-        </p:spPr>
-      </p:pic>
-      <p:sp>
-        <p:nvSpPr>
-          <p:cNvPr id="2" name="Title 1"/>
-          <p:cNvSpPr>
-            <a:spLocks noGrp="1"/>
-          </p:cNvSpPr>
-          <p:nvPr>
-            <p:ph type="title"/>
-          </p:nvPr>
-        </p:nvSpPr>
-        <p:spPr>
-          <a:xfrm>
-            <a:off x="913806" y="4565255"/>
-            <a:ext cx="10355326" cy="543472"/>
+            <a:off x="1154956" y="4800587"/>
+            <a:ext cx="8825657" cy="566738"/>
           </a:xfrm>
         </p:spPr>
         <p:txBody>
@@ -422,8 +408,8 @@
             <a:normAutofit/>
           </a:bodyPr>
           <a:lstStyle>
-            <a:lvl1pPr algn="ctr">
-              <a:defRPr sz="2800"/>
+            <a:lvl1pPr algn="l">
+              <a:defRPr sz="2400" b="0"/>
             </a:lvl1pPr>
           </a:lstStyle>
           <a:p>
@@ -447,13 +433,18 @@
         </p:nvSpPr>
         <p:spPr>
           <a:xfrm>
-            <a:off x="1169349" y="695009"/>
-            <a:ext cx="9845346" cy="3525671"/>
+            <a:off x="1154955" y="685800"/>
+            <a:ext cx="8825658" cy="3640666"/>
           </a:xfrm>
+          <a:prstGeom prst="roundRect">
+            <a:avLst>
+              <a:gd name="adj" fmla="val 1858"/>
+            </a:avLst>
+          </a:prstGeom>
           <a:effectLst>
-            <a:outerShdw blurRad="38100" dist="25400" dir="4440000">
+            <a:outerShdw blurRad="50800" dist="50800" dir="5400000" algn="tl" rotWithShape="0">
               <a:srgbClr val="000000">
-                <a:alpha val="36000"/>
+                <a:alpha val="43000"/>
               </a:srgbClr>
             </a:outerShdw>
           </a:effectLst>
@@ -465,104 +456,106 @@
           <a:lstStyle>
             <a:lvl1pPr marL="0" indent="0" algn="ctr">
               <a:buNone/>
-              <a:defRPr sz="2000"/>
-            </a:lvl1pPr>
-            <a:lvl2pPr marL="457200" indent="0">
-              <a:buNone/>
-              <a:defRPr sz="2000"/>
-            </a:lvl2pPr>
-            <a:lvl3pPr marL="914400" indent="0">
-              <a:buNone/>
-              <a:defRPr sz="2000"/>
-            </a:lvl3pPr>
-            <a:lvl4pPr marL="1371600" indent="0">
-              <a:buNone/>
-              <a:defRPr sz="2000"/>
-            </a:lvl4pPr>
-            <a:lvl5pPr marL="1828800" indent="0">
-              <a:buNone/>
-              <a:defRPr sz="2000"/>
-            </a:lvl5pPr>
-            <a:lvl6pPr marL="2286000" indent="0">
-              <a:buNone/>
-              <a:defRPr sz="2000"/>
-            </a:lvl6pPr>
-            <a:lvl7pPr marL="2743200" indent="0">
-              <a:buNone/>
-              <a:defRPr sz="2000"/>
-            </a:lvl7pPr>
-            <a:lvl8pPr marL="3200400" indent="0">
-              <a:buNone/>
-              <a:defRPr sz="2000"/>
-            </a:lvl8pPr>
-            <a:lvl9pPr marL="3657600" indent="0">
-              <a:buNone/>
-              <a:defRPr sz="2000"/>
-            </a:lvl9pPr>
-          </a:lstStyle>
-          <a:p>
-            <a:r>
-              <a:rPr lang="tr-TR" smtClean="0"/>
-              <a:t>Resim eklemek için simgeyi tıklatın</a:t>
-            </a:r>
-            <a:endParaRPr lang="en-US" dirty="0"/>
-          </a:p>
-        </p:txBody>
-      </p:sp>
-      <p:sp>
-        <p:nvSpPr>
-          <p:cNvPr id="4" name="Text Placeholder 3"/>
-          <p:cNvSpPr>
-            <a:spLocks noGrp="1"/>
-          </p:cNvSpPr>
-          <p:nvPr>
-            <p:ph type="body" sz="half" idx="2"/>
-          </p:nvPr>
-        </p:nvSpPr>
-        <p:spPr>
-          <a:xfrm>
-            <a:off x="913795" y="5108728"/>
-            <a:ext cx="10353762" cy="682472"/>
-          </a:xfrm>
-        </p:spPr>
-        <p:txBody>
-          <a:bodyPr anchor="t"/>
-          <a:lstStyle>
-            <a:lvl1pPr marL="0" indent="0" algn="ctr">
-              <a:buNone/>
               <a:defRPr sz="1600"/>
             </a:lvl1pPr>
             <a:lvl2pPr marL="457200" indent="0">
               <a:buNone/>
-              <a:defRPr sz="1400"/>
+              <a:defRPr sz="1600"/>
             </a:lvl2pPr>
             <a:lvl3pPr marL="914400" indent="0">
               <a:buNone/>
-              <a:defRPr sz="1200"/>
+              <a:defRPr sz="1600"/>
             </a:lvl3pPr>
             <a:lvl4pPr marL="1371600" indent="0">
               <a:buNone/>
-              <a:defRPr sz="1000"/>
+              <a:defRPr sz="1600"/>
             </a:lvl4pPr>
             <a:lvl5pPr marL="1828800" indent="0">
               <a:buNone/>
-              <a:defRPr sz="1000"/>
+              <a:defRPr sz="1600"/>
             </a:lvl5pPr>
             <a:lvl6pPr marL="2286000" indent="0">
               <a:buNone/>
-              <a:defRPr sz="1000"/>
+              <a:defRPr sz="1600"/>
             </a:lvl6pPr>
             <a:lvl7pPr marL="2743200" indent="0">
               <a:buNone/>
-              <a:defRPr sz="1000"/>
+              <a:defRPr sz="1600"/>
             </a:lvl7pPr>
             <a:lvl8pPr marL="3200400" indent="0">
               <a:buNone/>
-              <a:defRPr sz="1000"/>
+              <a:defRPr sz="1600"/>
             </a:lvl8pPr>
             <a:lvl9pPr marL="3657600" indent="0">
               <a:buNone/>
+              <a:defRPr sz="1600"/>
+            </a:lvl9pPr>
+          </a:lstStyle>
+          <a:p>
+            <a:r>
+              <a:rPr lang="tr-TR" smtClean="0"/>
+              <a:t>Resim eklemek için simgeyi tıklatın</a:t>
+            </a:r>
+            <a:endParaRPr lang="en-US" dirty="0"/>
+          </a:p>
+        </p:txBody>
+      </p:sp>
+      <p:sp>
+        <p:nvSpPr>
+          <p:cNvPr id="4" name="Text Placeholder 3"/>
+          <p:cNvSpPr>
+            <a:spLocks noGrp="1"/>
+          </p:cNvSpPr>
+          <p:nvPr>
+            <p:ph type="body" sz="half" idx="2"/>
+          </p:nvPr>
+        </p:nvSpPr>
+        <p:spPr>
+          <a:xfrm>
+            <a:off x="1154956" y="5367325"/>
+            <a:ext cx="8825656" cy="493712"/>
+          </a:xfrm>
+        </p:spPr>
+        <p:txBody>
+          <a:bodyPr>
+            <a:normAutofit/>
+          </a:bodyPr>
+          <a:lstStyle>
+            <a:lvl1pPr marL="0" indent="0">
+              <a:buNone/>
+              <a:defRPr sz="1200"/>
+            </a:lvl1pPr>
+            <a:lvl2pPr marL="457200" indent="0">
+              <a:buNone/>
+              <a:defRPr sz="1200"/>
+            </a:lvl2pPr>
+            <a:lvl3pPr marL="914400" indent="0">
+              <a:buNone/>
               <a:defRPr sz="1000"/>
+            </a:lvl3pPr>
+            <a:lvl4pPr marL="1371600" indent="0">
+              <a:buNone/>
+              <a:defRPr sz="900"/>
+            </a:lvl4pPr>
+            <a:lvl5pPr marL="1828800" indent="0">
+              <a:buNone/>
+              <a:defRPr sz="900"/>
+            </a:lvl5pPr>
+            <a:lvl6pPr marL="2286000" indent="0">
+              <a:buNone/>
+              <a:defRPr sz="900"/>
+            </a:lvl6pPr>
+            <a:lvl7pPr marL="2743200" indent="0">
+              <a:buNone/>
+              <a:defRPr sz="900"/>
+            </a:lvl7pPr>
+            <a:lvl8pPr marL="3200400" indent="0">
+              <a:buNone/>
+              <a:defRPr sz="900"/>
+            </a:lvl8pPr>
+            <a:lvl9pPr marL="3657600" indent="0">
+              <a:buNone/>
+              <a:defRPr sz="900"/>
             </a:lvl9pPr>
           </a:lstStyle>
           <a:p>
@@ -642,7 +635,7 @@
     </p:spTree>
     <p:extLst>
       <p:ext uri="{BB962C8B-B14F-4D97-AF65-F5344CB8AC3E}">
-        <p14:creationId xmlns:p14="http://schemas.microsoft.com/office/powerpoint/2010/main" val="1517447864"/>
+        <p14:creationId xmlns:p14="http://schemas.microsoft.com/office/powerpoint/2010/main" val="3848111542"/>
       </p:ext>
     </p:extLst>
   </p:cSld>
@@ -681,15 +674,15 @@
         </p:nvSpPr>
         <p:spPr>
           <a:xfrm>
-            <a:off x="913795" y="608437"/>
-            <a:ext cx="10353762" cy="3534344"/>
+            <a:off x="1154954" y="1447800"/>
+            <a:ext cx="8825659" cy="1981200"/>
           </a:xfrm>
         </p:spPr>
         <p:txBody>
-          <a:bodyPr anchor="ctr"/>
+          <a:bodyPr/>
           <a:lstStyle>
             <a:lvl1pPr>
-              <a:defRPr sz="3200"/>
+              <a:defRPr sz="4800"/>
             </a:lvl1pPr>
           </a:lstStyle>
           <a:p>
@@ -703,7 +696,7 @@
       </p:sp>
       <p:sp>
         <p:nvSpPr>
-          <p:cNvPr id="4" name="Text Placeholder 3"/>
+          <p:cNvPr id="8" name="Text Placeholder 3"/>
           <p:cNvSpPr>
             <a:spLocks noGrp="1"/>
           </p:cNvSpPr>
@@ -713,48 +706,50 @@
         </p:nvSpPr>
         <p:spPr>
           <a:xfrm>
-            <a:off x="913794" y="4295180"/>
-            <a:ext cx="10353763" cy="1501826"/>
+            <a:off x="1154954" y="3657600"/>
+            <a:ext cx="8825659" cy="2362200"/>
           </a:xfrm>
         </p:spPr>
         <p:txBody>
-          <a:bodyPr anchor="ctr"/>
+          <a:bodyPr anchor="ctr">
+            <a:normAutofit/>
+          </a:bodyPr>
           <a:lstStyle>
-            <a:lvl1pPr marL="0" indent="0" algn="ctr">
-              <a:buNone/>
-              <a:defRPr sz="1600"/>
+            <a:lvl1pPr marL="0" indent="0">
+              <a:buNone/>
+              <a:defRPr sz="1800"/>
             </a:lvl1pPr>
             <a:lvl2pPr marL="457200" indent="0">
               <a:buNone/>
-              <a:defRPr sz="1400"/>
+              <a:defRPr sz="1200"/>
             </a:lvl2pPr>
             <a:lvl3pPr marL="914400" indent="0">
               <a:buNone/>
-              <a:defRPr sz="1200"/>
+              <a:defRPr sz="1000"/>
             </a:lvl3pPr>
             <a:lvl4pPr marL="1371600" indent="0">
               <a:buNone/>
-              <a:defRPr sz="1000"/>
+              <a:defRPr sz="900"/>
             </a:lvl4pPr>
             <a:lvl5pPr marL="1828800" indent="0">
               <a:buNone/>
-              <a:defRPr sz="1000"/>
+              <a:defRPr sz="900"/>
             </a:lvl5pPr>
             <a:lvl6pPr marL="2286000" indent="0">
               <a:buNone/>
-              <a:defRPr sz="1000"/>
+              <a:defRPr sz="900"/>
             </a:lvl6pPr>
             <a:lvl7pPr marL="2743200" indent="0">
               <a:buNone/>
-              <a:defRPr sz="1000"/>
+              <a:defRPr sz="900"/>
             </a:lvl7pPr>
             <a:lvl8pPr marL="3200400" indent="0">
               <a:buNone/>
-              <a:defRPr sz="1000"/>
+              <a:defRPr sz="900"/>
             </a:lvl8pPr>
             <a:lvl9pPr marL="3657600" indent="0">
               <a:buNone/>
-              <a:defRPr sz="1000"/>
+              <a:defRPr sz="900"/>
             </a:lvl9pPr>
           </a:lstStyle>
           <a:p>
@@ -768,7 +763,7 @@
       </p:sp>
       <p:sp>
         <p:nvSpPr>
-          <p:cNvPr id="5" name="Date Placeholder 4"/>
+          <p:cNvPr id="4" name="Date Placeholder 3"/>
           <p:cNvSpPr>
             <a:spLocks noGrp="1"/>
           </p:cNvSpPr>
@@ -791,7 +786,7 @@
       </p:sp>
       <p:sp>
         <p:nvSpPr>
-          <p:cNvPr id="6" name="Footer Placeholder 5"/>
+          <p:cNvPr id="5" name="Footer Placeholder 4"/>
           <p:cNvSpPr>
             <a:spLocks noGrp="1"/>
           </p:cNvSpPr>
@@ -810,7 +805,7 @@
       </p:sp>
       <p:sp>
         <p:nvSpPr>
-          <p:cNvPr id="7" name="Slide Number Placeholder 6"/>
+          <p:cNvPr id="6" name="Slide Number Placeholder 5"/>
           <p:cNvSpPr>
             <a:spLocks noGrp="1"/>
           </p:cNvSpPr>
@@ -834,7 +829,7 @@
     </p:spTree>
     <p:extLst>
       <p:ext uri="{BB962C8B-B14F-4D97-AF65-F5344CB8AC3E}">
-        <p14:creationId xmlns:p14="http://schemas.microsoft.com/office/powerpoint/2010/main" val="2441062183"/>
+        <p14:creationId xmlns:p14="http://schemas.microsoft.com/office/powerpoint/2010/main" val="4288397349"/>
       </p:ext>
     </p:extLst>
   </p:cSld>
@@ -873,15 +868,15 @@
         </p:nvSpPr>
         <p:spPr>
           <a:xfrm>
-            <a:off x="1446212" y="609600"/>
-            <a:ext cx="9302752" cy="2992904"/>
+            <a:off x="1574801" y="1447800"/>
+            <a:ext cx="7999315" cy="2323374"/>
           </a:xfrm>
         </p:spPr>
         <p:txBody>
-          <a:bodyPr anchor="ctr"/>
+          <a:bodyPr/>
           <a:lstStyle>
             <a:lvl1pPr>
-              <a:defRPr sz="3200"/>
+              <a:defRPr sz="4800"/>
             </a:lvl1pPr>
           </a:lstStyle>
           <a:p>
@@ -895,64 +890,76 @@
       </p:sp>
       <p:sp>
         <p:nvSpPr>
-          <p:cNvPr id="12" name="Text Placeholder 3"/>
-          <p:cNvSpPr>
-            <a:spLocks noGrp="1"/>
-          </p:cNvSpPr>
-          <p:nvPr>
-            <p:ph type="body" sz="half" idx="13"/>
+          <p:cNvPr id="11" name="Text Placeholder 3"/>
+          <p:cNvSpPr>
+            <a:spLocks noGrp="1"/>
+          </p:cNvSpPr>
+          <p:nvPr>
+            <p:ph type="body" sz="half" idx="14"/>
           </p:nvPr>
         </p:nvSpPr>
         <p:spPr>
           <a:xfrm>
-            <a:off x="1720644" y="3610032"/>
-            <a:ext cx="8752299" cy="532749"/>
+            <a:off x="1930400" y="3771174"/>
+            <a:ext cx="7279649" cy="342174"/>
           </a:xfrm>
         </p:spPr>
         <p:txBody>
-          <a:bodyPr anchor="t">
+          <a:bodyPr vert="horz" lIns="91440" tIns="45720" rIns="91440" bIns="45720" rtlCol="0" anchor="t">
             <a:normAutofit/>
           </a:bodyPr>
           <a:lstStyle>
-            <a:lvl1pPr marL="0" indent="0" algn="r">
-              <a:buNone/>
-              <a:defRPr sz="1400"/>
+            <a:lvl1pPr marL="0" indent="0">
+              <a:buNone/>
+              <a:defRPr lang="en-US" sz="1400" b="0" i="0" kern="1200" cap="small" dirty="0">
+                <a:solidFill>
+                  <a:schemeClr val="bg2">
+                    <a:lumMod val="40000"/>
+                    <a:lumOff val="60000"/>
+                  </a:schemeClr>
+                </a:solidFill>
+                <a:latin typeface="+mj-lt"/>
+                <a:ea typeface="+mj-ea"/>
+                <a:cs typeface="+mj-cs"/>
+              </a:defRPr>
             </a:lvl1pPr>
             <a:lvl2pPr marL="457200" indent="0">
               <a:buNone/>
-              <a:defRPr sz="1400"/>
+              <a:defRPr sz="1200"/>
             </a:lvl2pPr>
             <a:lvl3pPr marL="914400" indent="0">
               <a:buNone/>
-              <a:defRPr sz="1200"/>
+              <a:defRPr sz="1000"/>
             </a:lvl3pPr>
             <a:lvl4pPr marL="1371600" indent="0">
               <a:buNone/>
-              <a:defRPr sz="1000"/>
+              <a:defRPr sz="900"/>
             </a:lvl4pPr>
             <a:lvl5pPr marL="1828800" indent="0">
               <a:buNone/>
-              <a:defRPr sz="1000"/>
+              <a:defRPr sz="900"/>
             </a:lvl5pPr>
             <a:lvl6pPr marL="2286000" indent="0">
               <a:buNone/>
-              <a:defRPr sz="1000"/>
+              <a:defRPr sz="900"/>
             </a:lvl6pPr>
             <a:lvl7pPr marL="2743200" indent="0">
               <a:buNone/>
-              <a:defRPr sz="1000"/>
+              <a:defRPr sz="900"/>
             </a:lvl7pPr>
             <a:lvl8pPr marL="3200400" indent="0">
               <a:buNone/>
-              <a:defRPr sz="1000"/>
+              <a:defRPr sz="900"/>
             </a:lvl8pPr>
             <a:lvl9pPr marL="3657600" indent="0">
               <a:buNone/>
-              <a:defRPr sz="1000"/>
+              <a:defRPr sz="900"/>
             </a:lvl9pPr>
           </a:lstStyle>
           <a:p>
-            <a:pPr lvl="0"/>
+            <a:pPr marL="0" lvl="0" indent="0">
+              <a:buNone/>
+            </a:pPr>
             <a:r>
               <a:rPr lang="tr-TR" smtClean="0"/>
               <a:t>Asıl metin stillerini düzenlemek için tıklatın</a:t>
@@ -962,7 +969,7 @@
       </p:sp>
       <p:sp>
         <p:nvSpPr>
-          <p:cNvPr id="4" name="Text Placeholder 3"/>
+          <p:cNvPr id="10" name="Text Placeholder 3"/>
           <p:cNvSpPr>
             <a:spLocks noGrp="1"/>
           </p:cNvSpPr>
@@ -972,8 +979,8 @@
         </p:nvSpPr>
         <p:spPr>
           <a:xfrm>
-            <a:off x="913794" y="4304353"/>
-            <a:ext cx="10353763" cy="1489496"/>
+            <a:off x="1154954" y="4350657"/>
+            <a:ext cx="8825659" cy="1676400"/>
           </a:xfrm>
         </p:spPr>
         <p:txBody>
@@ -981,41 +988,41 @@
             <a:normAutofit/>
           </a:bodyPr>
           <a:lstStyle>
-            <a:lvl1pPr marL="0" indent="0" algn="ctr">
-              <a:buNone/>
-              <a:defRPr sz="1600"/>
+            <a:lvl1pPr marL="0" indent="0">
+              <a:buNone/>
+              <a:defRPr sz="1800"/>
             </a:lvl1pPr>
             <a:lvl2pPr marL="457200" indent="0">
               <a:buNone/>
-              <a:defRPr sz="1400"/>
+              <a:defRPr sz="1200"/>
             </a:lvl2pPr>
             <a:lvl3pPr marL="914400" indent="0">
               <a:buNone/>
-              <a:defRPr sz="1200"/>
+              <a:defRPr sz="1000"/>
             </a:lvl3pPr>
             <a:lvl4pPr marL="1371600" indent="0">
               <a:buNone/>
-              <a:defRPr sz="1000"/>
+              <a:defRPr sz="900"/>
             </a:lvl4pPr>
             <a:lvl5pPr marL="1828800" indent="0">
               <a:buNone/>
-              <a:defRPr sz="1000"/>
+              <a:defRPr sz="900"/>
             </a:lvl5pPr>
             <a:lvl6pPr marL="2286000" indent="0">
               <a:buNone/>
-              <a:defRPr sz="1000"/>
+              <a:defRPr sz="900"/>
             </a:lvl6pPr>
             <a:lvl7pPr marL="2743200" indent="0">
               <a:buNone/>
-              <a:defRPr sz="1000"/>
+              <a:defRPr sz="900"/>
             </a:lvl7pPr>
             <a:lvl8pPr marL="3200400" indent="0">
               <a:buNone/>
-              <a:defRPr sz="1000"/>
+              <a:defRPr sz="900"/>
             </a:lvl8pPr>
             <a:lvl9pPr marL="3657600" indent="0">
               <a:buNone/>
-              <a:defRPr sz="1000"/>
+              <a:defRPr sz="900"/>
             </a:lvl9pPr>
           </a:lstStyle>
           <a:p>
@@ -1029,7 +1036,7 @@
       </p:sp>
       <p:sp>
         <p:nvSpPr>
-          <p:cNvPr id="5" name="Date Placeholder 4"/>
+          <p:cNvPr id="4" name="Date Placeholder 3"/>
           <p:cNvSpPr>
             <a:spLocks noGrp="1"/>
           </p:cNvSpPr>
@@ -1052,7 +1059,7 @@
       </p:sp>
       <p:sp>
         <p:nvSpPr>
-          <p:cNvPr id="6" name="Footer Placeholder 5"/>
+          <p:cNvPr id="5" name="Footer Placeholder 4"/>
           <p:cNvSpPr>
             <a:spLocks noGrp="1"/>
           </p:cNvSpPr>
@@ -1071,7 +1078,7 @@
       </p:sp>
       <p:sp>
         <p:nvSpPr>
-          <p:cNvPr id="7" name="Slide Number Placeholder 6"/>
+          <p:cNvPr id="6" name="Slide Number Placeholder 5"/>
           <p:cNvSpPr>
             <a:spLocks noGrp="1"/>
           </p:cNvSpPr>
@@ -1094,115 +1101,46 @@
       </p:sp>
       <p:sp>
         <p:nvSpPr>
-          <p:cNvPr id="11" name="TextBox 10"/>
+          <p:cNvPr id="12" name="TextBox 11"/>
           <p:cNvSpPr txBox="1"/>
           <p:nvPr/>
         </p:nvSpPr>
         <p:spPr>
           <a:xfrm>
-            <a:off x="990600" y="884796"/>
-            <a:ext cx="609600" cy="584776"/>
+            <a:off x="898295" y="971253"/>
+            <a:ext cx="801912" cy="1969770"/>
           </a:xfrm>
           <a:prstGeom prst="rect">
             <a:avLst/>
           </a:prstGeom>
+          <a:noFill/>
         </p:spPr>
         <p:txBody>
-          <a:bodyPr vert="horz" lIns="91440" tIns="45720" rIns="91440" bIns="45720" rtlCol="0" anchor="ctr">
-            <a:noAutofit/>
+          <a:bodyPr wrap="square" rtlCol="0">
+            <a:spAutoFit/>
           </a:bodyPr>
           <a:lstStyle>
-            <a:lvl1pPr>
-              <a:spcBef>
-                <a:spcPct val="0"/>
-              </a:spcBef>
-              <a:buNone/>
-              <a:defRPr sz="3200" b="0" cap="all">
-                <a:ln w="3175" cmpd="sng">
-                  <a:noFill/>
-                </a:ln>
-                <a:effectLst>
-                  <a:glow rad="38100">
-                    <a:schemeClr val="bg1">
-                      <a:lumMod val="65000"/>
-                      <a:lumOff val="35000"/>
-                      <a:alpha val="40000"/>
-                    </a:schemeClr>
-                  </a:glow>
-                  <a:outerShdw blurRad="28575" dist="38100" dir="14040000" algn="tl" rotWithShape="0">
-                    <a:srgbClr val="000000">
-                      <a:alpha val="25000"/>
-                    </a:srgbClr>
-                  </a:outerShdw>
-                </a:effectLst>
+            <a:defPPr>
+              <a:defRPr lang="en-US"/>
+            </a:defPPr>
+            <a:lvl1pPr algn="r">
+              <a:defRPr sz="12200" b="0" i="0">
+                <a:solidFill>
+                  <a:schemeClr val="bg2">
+                    <a:lumMod val="40000"/>
+                    <a:lumOff val="60000"/>
+                  </a:schemeClr>
+                </a:solidFill>
+                <a:latin typeface="Arial"/>
+                <a:ea typeface="+mj-ea"/>
+                <a:cs typeface="+mj-cs"/>
               </a:defRPr>
             </a:lvl1pPr>
-            <a:lvl2pPr>
-              <a:defRPr>
-                <a:solidFill>
-                  <a:schemeClr val="tx2"/>
-                </a:solidFill>
-              </a:defRPr>
-            </a:lvl2pPr>
-            <a:lvl3pPr>
-              <a:defRPr>
-                <a:solidFill>
-                  <a:schemeClr val="tx2"/>
-                </a:solidFill>
-              </a:defRPr>
-            </a:lvl3pPr>
-            <a:lvl4pPr>
-              <a:defRPr>
-                <a:solidFill>
-                  <a:schemeClr val="tx2"/>
-                </a:solidFill>
-              </a:defRPr>
-            </a:lvl4pPr>
-            <a:lvl5pPr>
-              <a:defRPr>
-                <a:solidFill>
-                  <a:schemeClr val="tx2"/>
-                </a:solidFill>
-              </a:defRPr>
-            </a:lvl5pPr>
-            <a:lvl6pPr>
-              <a:defRPr>
-                <a:solidFill>
-                  <a:schemeClr val="tx2"/>
-                </a:solidFill>
-              </a:defRPr>
-            </a:lvl6pPr>
-            <a:lvl7pPr>
-              <a:defRPr>
-                <a:solidFill>
-                  <a:schemeClr val="tx2"/>
-                </a:solidFill>
-              </a:defRPr>
-            </a:lvl7pPr>
-            <a:lvl8pPr>
-              <a:defRPr>
-                <a:solidFill>
-                  <a:schemeClr val="tx2"/>
-                </a:solidFill>
-              </a:defRPr>
-            </a:lvl8pPr>
-            <a:lvl9pPr>
-              <a:defRPr>
-                <a:solidFill>
-                  <a:schemeClr val="tx2"/>
-                </a:solidFill>
-              </a:defRPr>
-            </a:lvl9pPr>
           </a:lstStyle>
           <a:p>
             <a:pPr lvl="0"/>
             <a:r>
-              <a:rPr lang="en-US" sz="8000" dirty="0">
-                <a:solidFill>
-                  <a:schemeClr val="tx1"/>
-                </a:solidFill>
-                <a:effectLst/>
-              </a:rPr>
+              <a:rPr lang="en-US" dirty="0"/>
               <a:t>“</a:t>
             </a:r>
           </a:p>
@@ -1210,115 +1148,46 @@
       </p:sp>
       <p:sp>
         <p:nvSpPr>
-          <p:cNvPr id="13" name="TextBox 12"/>
+          <p:cNvPr id="15" name="TextBox 14"/>
           <p:cNvSpPr txBox="1"/>
           <p:nvPr/>
         </p:nvSpPr>
         <p:spPr>
           <a:xfrm>
-            <a:off x="10504716" y="2928258"/>
-            <a:ext cx="609600" cy="584776"/>
+            <a:off x="9330490" y="2613787"/>
+            <a:ext cx="801912" cy="1969770"/>
           </a:xfrm>
           <a:prstGeom prst="rect">
             <a:avLst/>
           </a:prstGeom>
+          <a:noFill/>
         </p:spPr>
         <p:txBody>
-          <a:bodyPr vert="horz" lIns="91440" tIns="45720" rIns="91440" bIns="45720" rtlCol="0" anchor="ctr">
-            <a:noAutofit/>
+          <a:bodyPr wrap="square" rtlCol="0">
+            <a:spAutoFit/>
           </a:bodyPr>
           <a:lstStyle>
-            <a:lvl1pPr>
-              <a:spcBef>
-                <a:spcPct val="0"/>
-              </a:spcBef>
-              <a:buNone/>
-              <a:defRPr sz="3200" b="0" cap="all">
-                <a:ln w="3175" cmpd="sng">
-                  <a:noFill/>
-                </a:ln>
-                <a:effectLst>
-                  <a:glow rad="38100">
-                    <a:schemeClr val="bg1">
-                      <a:lumMod val="65000"/>
-                      <a:lumOff val="35000"/>
-                      <a:alpha val="40000"/>
-                    </a:schemeClr>
-                  </a:glow>
-                  <a:outerShdw blurRad="28575" dist="38100" dir="14040000" algn="tl" rotWithShape="0">
-                    <a:srgbClr val="000000">
-                      <a:alpha val="25000"/>
-                    </a:srgbClr>
-                  </a:outerShdw>
-                </a:effectLst>
+            <a:defPPr>
+              <a:defRPr lang="en-US"/>
+            </a:defPPr>
+            <a:lvl1pPr algn="r">
+              <a:defRPr sz="12200" b="0" i="0">
+                <a:solidFill>
+                  <a:schemeClr val="bg2">
+                    <a:lumMod val="40000"/>
+                    <a:lumOff val="60000"/>
+                  </a:schemeClr>
+                </a:solidFill>
+                <a:latin typeface="Arial"/>
+                <a:ea typeface="+mj-ea"/>
+                <a:cs typeface="+mj-cs"/>
               </a:defRPr>
             </a:lvl1pPr>
-            <a:lvl2pPr>
-              <a:defRPr>
-                <a:solidFill>
-                  <a:schemeClr val="tx2"/>
-                </a:solidFill>
-              </a:defRPr>
-            </a:lvl2pPr>
-            <a:lvl3pPr>
-              <a:defRPr>
-                <a:solidFill>
-                  <a:schemeClr val="tx2"/>
-                </a:solidFill>
-              </a:defRPr>
-            </a:lvl3pPr>
-            <a:lvl4pPr>
-              <a:defRPr>
-                <a:solidFill>
-                  <a:schemeClr val="tx2"/>
-                </a:solidFill>
-              </a:defRPr>
-            </a:lvl4pPr>
-            <a:lvl5pPr>
-              <a:defRPr>
-                <a:solidFill>
-                  <a:schemeClr val="tx2"/>
-                </a:solidFill>
-              </a:defRPr>
-            </a:lvl5pPr>
-            <a:lvl6pPr>
-              <a:defRPr>
-                <a:solidFill>
-                  <a:schemeClr val="tx2"/>
-                </a:solidFill>
-              </a:defRPr>
-            </a:lvl6pPr>
-            <a:lvl7pPr>
-              <a:defRPr>
-                <a:solidFill>
-                  <a:schemeClr val="tx2"/>
-                </a:solidFill>
-              </a:defRPr>
-            </a:lvl7pPr>
-            <a:lvl8pPr>
-              <a:defRPr>
-                <a:solidFill>
-                  <a:schemeClr val="tx2"/>
-                </a:solidFill>
-              </a:defRPr>
-            </a:lvl8pPr>
-            <a:lvl9pPr>
-              <a:defRPr>
-                <a:solidFill>
-                  <a:schemeClr val="tx2"/>
-                </a:solidFill>
-              </a:defRPr>
-            </a:lvl9pPr>
           </a:lstStyle>
           <a:p>
-            <a:pPr lvl="0" algn="r"/>
-            <a:r>
-              <a:rPr lang="en-US" sz="8000" dirty="0">
-                <a:solidFill>
-                  <a:schemeClr val="tx1"/>
-                </a:solidFill>
-                <a:effectLst/>
-              </a:rPr>
+            <a:pPr lvl="0"/>
+            <a:r>
+              <a:rPr lang="en-US" dirty="0"/>
               <a:t>”</a:t>
             </a:r>
           </a:p>
@@ -1327,7 +1196,7 @@
     </p:spTree>
     <p:extLst>
       <p:ext uri="{BB962C8B-B14F-4D97-AF65-F5344CB8AC3E}">
-        <p14:creationId xmlns:p14="http://schemas.microsoft.com/office/powerpoint/2010/main" val="3614309437"/>
+        <p14:creationId xmlns:p14="http://schemas.microsoft.com/office/powerpoint/2010/main" val="3837556003"/>
       </p:ext>
     </p:extLst>
   </p:cSld>
@@ -1366,15 +1235,15 @@
         </p:nvSpPr>
         <p:spPr>
           <a:xfrm>
-            <a:off x="913794" y="2126942"/>
-            <a:ext cx="10353763" cy="2511835"/>
+            <a:off x="1154954" y="3124201"/>
+            <a:ext cx="8825660" cy="1653180"/>
           </a:xfrm>
         </p:spPr>
         <p:txBody>
           <a:bodyPr anchor="b"/>
           <a:lstStyle>
-            <a:lvl1pPr>
-              <a:defRPr sz="3200"/>
+            <a:lvl1pPr algn="l">
+              <a:defRPr sz="4000" b="0" cap="none"/>
             </a:lvl1pPr>
           </a:lstStyle>
           <a:p>
@@ -1388,58 +1257,113 @@
       </p:sp>
       <p:sp>
         <p:nvSpPr>
-          <p:cNvPr id="4" name="Text Placeholder 3"/>
-          <p:cNvSpPr>
-            <a:spLocks noGrp="1"/>
-          </p:cNvSpPr>
-          <p:nvPr>
-            <p:ph type="body" sz="half" idx="2"/>
+          <p:cNvPr id="3" name="Text Placeholder 2"/>
+          <p:cNvSpPr>
+            <a:spLocks noGrp="1"/>
+          </p:cNvSpPr>
+          <p:nvPr>
+            <p:ph type="body" idx="1"/>
           </p:nvPr>
         </p:nvSpPr>
         <p:spPr>
           <a:xfrm>
-            <a:off x="913784" y="4650556"/>
-            <a:ext cx="10352199" cy="1140644"/>
+            <a:off x="1154954" y="4777381"/>
+            <a:ext cx="8825659" cy="860400"/>
           </a:xfrm>
         </p:spPr>
         <p:txBody>
           <a:bodyPr anchor="t"/>
           <a:lstStyle>
-            <a:lvl1pPr marL="0" indent="0" algn="ctr">
-              <a:buNone/>
-              <a:defRPr sz="1600"/>
+            <a:lvl1pPr marL="0" indent="0" algn="l">
+              <a:buNone/>
+              <a:defRPr sz="2000" cap="none">
+                <a:solidFill>
+                  <a:schemeClr val="bg2">
+                    <a:lumMod val="40000"/>
+                    <a:lumOff val="60000"/>
+                  </a:schemeClr>
+                </a:solidFill>
+              </a:defRPr>
             </a:lvl1pPr>
             <a:lvl2pPr marL="457200" indent="0">
               <a:buNone/>
-              <a:defRPr sz="1400"/>
+              <a:defRPr sz="1800">
+                <a:solidFill>
+                  <a:schemeClr val="tx1">
+                    <a:tint val="75000"/>
+                  </a:schemeClr>
+                </a:solidFill>
+              </a:defRPr>
             </a:lvl2pPr>
             <a:lvl3pPr marL="914400" indent="0">
               <a:buNone/>
-              <a:defRPr sz="1200"/>
+              <a:defRPr sz="1600">
+                <a:solidFill>
+                  <a:schemeClr val="tx1">
+                    <a:tint val="75000"/>
+                  </a:schemeClr>
+                </a:solidFill>
+              </a:defRPr>
             </a:lvl3pPr>
             <a:lvl4pPr marL="1371600" indent="0">
               <a:buNone/>
-              <a:defRPr sz="1000"/>
+              <a:defRPr sz="1400">
+                <a:solidFill>
+                  <a:schemeClr val="tx1">
+                    <a:tint val="75000"/>
+                  </a:schemeClr>
+                </a:solidFill>
+              </a:defRPr>
             </a:lvl4pPr>
             <a:lvl5pPr marL="1828800" indent="0">
               <a:buNone/>
-              <a:defRPr sz="1000"/>
+              <a:defRPr sz="1400">
+                <a:solidFill>
+                  <a:schemeClr val="tx1">
+                    <a:tint val="75000"/>
+                  </a:schemeClr>
+                </a:solidFill>
+              </a:defRPr>
             </a:lvl5pPr>
             <a:lvl6pPr marL="2286000" indent="0">
               <a:buNone/>
-              <a:defRPr sz="1000"/>
+              <a:defRPr sz="1400">
+                <a:solidFill>
+                  <a:schemeClr val="tx1">
+                    <a:tint val="75000"/>
+                  </a:schemeClr>
+                </a:solidFill>
+              </a:defRPr>
             </a:lvl6pPr>
             <a:lvl7pPr marL="2743200" indent="0">
               <a:buNone/>
-              <a:defRPr sz="1000"/>
+              <a:defRPr sz="1400">
+                <a:solidFill>
+                  <a:schemeClr val="tx1">
+                    <a:tint val="75000"/>
+                  </a:schemeClr>
+                </a:solidFill>
+              </a:defRPr>
             </a:lvl7pPr>
             <a:lvl8pPr marL="3200400" indent="0">
               <a:buNone/>
-              <a:defRPr sz="1000"/>
+              <a:defRPr sz="1400">
+                <a:solidFill>
+                  <a:schemeClr val="tx1">
+                    <a:tint val="75000"/>
+                  </a:schemeClr>
+                </a:solidFill>
+              </a:defRPr>
             </a:lvl8pPr>
             <a:lvl9pPr marL="3657600" indent="0">
               <a:buNone/>
-              <a:defRPr sz="1000"/>
+              <a:defRPr sz="1400">
+                <a:solidFill>
+                  <a:schemeClr val="tx1">
+                    <a:tint val="75000"/>
+                  </a:schemeClr>
+                </a:solidFill>
+              </a:defRPr>
             </a:lvl9pPr>
           </a:lstStyle>
           <a:p>
@@ -1453,7 +1377,7 @@
       </p:sp>
       <p:sp>
         <p:nvSpPr>
-          <p:cNvPr id="5" name="Date Placeholder 4"/>
+          <p:cNvPr id="4" name="Date Placeholder 3"/>
           <p:cNvSpPr>
             <a:spLocks noGrp="1"/>
           </p:cNvSpPr>
@@ -1476,7 +1400,7 @@
       </p:sp>
       <p:sp>
         <p:nvSpPr>
-          <p:cNvPr id="6" name="Footer Placeholder 5"/>
+          <p:cNvPr id="5" name="Footer Placeholder 4"/>
           <p:cNvSpPr>
             <a:spLocks noGrp="1"/>
           </p:cNvSpPr>
@@ -1495,7 +1419,7 @@
       </p:sp>
       <p:sp>
         <p:nvSpPr>
-          <p:cNvPr id="7" name="Slide Number Placeholder 6"/>
+          <p:cNvPr id="6" name="Slide Number Placeholder 5"/>
           <p:cNvSpPr>
             <a:spLocks noGrp="1"/>
           </p:cNvSpPr>
@@ -1519,7 +1443,7 @@
     </p:spTree>
     <p:extLst>
       <p:ext uri="{BB962C8B-B14F-4D97-AF65-F5344CB8AC3E}">
-        <p14:creationId xmlns:p14="http://schemas.microsoft.com/office/powerpoint/2010/main" val="3951362260"/>
+        <p14:creationId xmlns:p14="http://schemas.microsoft.com/office/powerpoint/2010/main" val="240686598"/>
       </p:ext>
     </p:extLst>
   </p:cSld>
@@ -1548,46 +1472,45 @@
       </p:grpSpPr>
       <p:sp>
         <p:nvSpPr>
-          <p:cNvPr id="15" name="Title 1"/>
+          <p:cNvPr id="2" name="Title 1"/>
           <p:cNvSpPr>
             <a:spLocks noGrp="1"/>
           </p:cNvSpPr>
           <p:nvPr>
             <p:ph type="title"/>
+          </p:nvPr>
+        </p:nvSpPr>
+        <p:spPr/>
+        <p:txBody>
+          <a:bodyPr/>
+          <a:lstStyle>
+            <a:lvl1pPr>
+              <a:defRPr sz="4200"/>
+            </a:lvl1pPr>
+          </a:lstStyle>
+          <a:p>
+            <a:r>
+              <a:rPr lang="tr-TR" smtClean="0"/>
+              <a:t>Asıl başlık stili için tıklatın</a:t>
+            </a:r>
+            <a:endParaRPr lang="en-US" dirty="0"/>
+          </a:p>
+        </p:txBody>
+      </p:sp>
+      <p:sp>
+        <p:nvSpPr>
+          <p:cNvPr id="3" name="Text Placeholder 2"/>
+          <p:cNvSpPr>
+            <a:spLocks noGrp="1"/>
+          </p:cNvSpPr>
+          <p:nvPr>
+            <p:ph type="body" idx="1"/>
           </p:nvPr>
         </p:nvSpPr>
         <p:spPr>
           <a:xfrm>
-            <a:off x="913795" y="609600"/>
-            <a:ext cx="10353762" cy="970450"/>
-          </a:xfrm>
-        </p:spPr>
-        <p:txBody>
-          <a:bodyPr/>
-          <a:lstStyle/>
-          <a:p>
-            <a:r>
-              <a:rPr lang="tr-TR" smtClean="0"/>
-              <a:t>Asıl başlık stili için tıklatın</a:t>
-            </a:r>
-            <a:endParaRPr lang="en-US" dirty="0"/>
-          </a:p>
-        </p:txBody>
-      </p:sp>
-      <p:sp>
-        <p:nvSpPr>
-          <p:cNvPr id="7" name="Text Placeholder 2"/>
-          <p:cNvSpPr>
-            <a:spLocks noGrp="1"/>
-          </p:cNvSpPr>
-          <p:nvPr>
-            <p:ph type="body" idx="1"/>
-          </p:nvPr>
-        </p:nvSpPr>
-        <p:spPr>
-          <a:xfrm>
-            <a:off x="913795" y="1885950"/>
-            <a:ext cx="3300984" cy="576262"/>
+            <a:off x="632947" y="1981200"/>
+            <a:ext cx="2946866" cy="576262"/>
           </a:xfrm>
         </p:spPr>
         <p:txBody>
@@ -1595,11 +1518,14 @@
             <a:noAutofit/>
           </a:bodyPr>
           <a:lstStyle>
-            <a:lvl1pPr marL="0" indent="0" algn="ctr">
+            <a:lvl1pPr marL="0" indent="0">
               <a:buNone/>
               <a:defRPr sz="2400" b="0">
                 <a:solidFill>
-                  <a:schemeClr val="tx1"/>
+                  <a:schemeClr val="bg2">
+                    <a:lumMod val="40000"/>
+                    <a:lumOff val="60000"/>
+                  </a:schemeClr>
                 </a:solidFill>
               </a:defRPr>
             </a:lvl1pPr>
@@ -1647,7 +1573,7 @@
       </p:sp>
       <p:sp>
         <p:nvSpPr>
-          <p:cNvPr id="8" name="Text Placeholder 3"/>
+          <p:cNvPr id="16" name="Text Placeholder 3"/>
           <p:cNvSpPr>
             <a:spLocks noGrp="1"/>
           </p:cNvSpPr>
@@ -1657,8 +1583,8 @@
         </p:nvSpPr>
         <p:spPr>
           <a:xfrm>
-            <a:off x="913795" y="2571750"/>
-            <a:ext cx="3300984" cy="3219450"/>
+            <a:off x="652463" y="2667000"/>
+            <a:ext cx="2927350" cy="3589338"/>
           </a:xfrm>
         </p:spPr>
         <p:txBody>
@@ -1666,7 +1592,7 @@
             <a:normAutofit/>
           </a:bodyPr>
           <a:lstStyle>
-            <a:lvl1pPr marL="0" indent="0" algn="ctr">
+            <a:lvl1pPr marL="0" indent="0">
               <a:buNone/>
               <a:defRPr sz="1400"/>
             </a:lvl1pPr>
@@ -1714,7 +1640,7 @@
       </p:sp>
       <p:sp>
         <p:nvSpPr>
-          <p:cNvPr id="9" name="Text Placeholder 4"/>
+          <p:cNvPr id="5" name="Text Placeholder 4"/>
           <p:cNvSpPr>
             <a:spLocks noGrp="1"/>
           </p:cNvSpPr>
@@ -1724,8 +1650,8 @@
         </p:nvSpPr>
         <p:spPr>
           <a:xfrm>
-            <a:off x="4446711" y="1885950"/>
-            <a:ext cx="3300984" cy="576262"/>
+            <a:off x="3883659" y="1981200"/>
+            <a:ext cx="2936241" cy="576262"/>
           </a:xfrm>
         </p:spPr>
         <p:txBody>
@@ -1733,11 +1659,14 @@
             <a:noAutofit/>
           </a:bodyPr>
           <a:lstStyle>
-            <a:lvl1pPr marL="0" indent="0" algn="ctr">
+            <a:lvl1pPr marL="0" indent="0">
               <a:buNone/>
               <a:defRPr sz="2400" b="0">
                 <a:solidFill>
-                  <a:schemeClr val="tx1"/>
+                  <a:schemeClr val="bg2">
+                    <a:lumMod val="40000"/>
+                    <a:lumOff val="60000"/>
+                  </a:schemeClr>
                 </a:solidFill>
               </a:defRPr>
             </a:lvl1pPr>
@@ -1785,7 +1714,7 @@
       </p:sp>
       <p:sp>
         <p:nvSpPr>
-          <p:cNvPr id="10" name="Text Placeholder 3"/>
+          <p:cNvPr id="19" name="Text Placeholder 3"/>
           <p:cNvSpPr>
             <a:spLocks noGrp="1"/>
           </p:cNvSpPr>
@@ -1795,8 +1724,8 @@
         </p:nvSpPr>
         <p:spPr>
           <a:xfrm>
-            <a:off x="4441435" y="2571750"/>
-            <a:ext cx="3300984" cy="3219450"/>
+            <a:off x="3873106" y="2667000"/>
+            <a:ext cx="2946794" cy="3589338"/>
           </a:xfrm>
         </p:spPr>
         <p:txBody>
@@ -1804,7 +1733,7 @@
             <a:normAutofit/>
           </a:bodyPr>
           <a:lstStyle>
-            <a:lvl1pPr marL="0" indent="0" algn="ctr">
+            <a:lvl1pPr marL="0" indent="0">
               <a:buNone/>
               <a:defRPr sz="1400"/>
             </a:lvl1pPr>
@@ -1852,7 +1781,7 @@
       </p:sp>
       <p:sp>
         <p:nvSpPr>
-          <p:cNvPr id="11" name="Text Placeholder 4"/>
+          <p:cNvPr id="14" name="Text Placeholder 4"/>
           <p:cNvSpPr>
             <a:spLocks noGrp="1"/>
           </p:cNvSpPr>
@@ -1862,8 +1791,8 @@
         </p:nvSpPr>
         <p:spPr>
           <a:xfrm>
-            <a:off x="7966572" y="1885950"/>
-            <a:ext cx="3300984" cy="576262"/>
+            <a:off x="7124700" y="1981200"/>
+            <a:ext cx="2932113" cy="576262"/>
           </a:xfrm>
         </p:spPr>
         <p:txBody>
@@ -1871,11 +1800,14 @@
             <a:noAutofit/>
           </a:bodyPr>
           <a:lstStyle>
-            <a:lvl1pPr marL="0" indent="0" algn="ctr">
+            <a:lvl1pPr marL="0" indent="0">
               <a:buNone/>
               <a:defRPr sz="2400" b="0">
                 <a:solidFill>
-                  <a:schemeClr val="tx1"/>
+                  <a:schemeClr val="bg2">
+                    <a:lumMod val="40000"/>
+                    <a:lumOff val="60000"/>
+                  </a:schemeClr>
                 </a:solidFill>
               </a:defRPr>
             </a:lvl1pPr>
@@ -1923,7 +1855,7 @@
       </p:sp>
       <p:sp>
         <p:nvSpPr>
-          <p:cNvPr id="12" name="Text Placeholder 3"/>
+          <p:cNvPr id="20" name="Text Placeholder 3"/>
           <p:cNvSpPr>
             <a:spLocks noGrp="1"/>
           </p:cNvSpPr>
@@ -1933,8 +1865,8 @@
         </p:nvSpPr>
         <p:spPr>
           <a:xfrm>
-            <a:off x="7966572" y="2571750"/>
-            <a:ext cx="3300984" cy="3219450"/>
+            <a:off x="7124700" y="2667000"/>
+            <a:ext cx="2932113" cy="3589338"/>
           </a:xfrm>
         </p:spPr>
         <p:txBody>
@@ -1942,7 +1874,7 @@
             <a:normAutofit/>
           </a:bodyPr>
           <a:lstStyle>
-            <a:lvl1pPr marL="0" indent="0" algn="ctr">
+            <a:lvl1pPr marL="0" indent="0">
               <a:buNone/>
               <a:defRPr sz="1400"/>
             </a:lvl1pPr>
@@ -1988,9 +1920,87 @@
           </a:p>
         </p:txBody>
       </p:sp>
-      <p:sp>
-        <p:nvSpPr>
-          <p:cNvPr id="3" name="Date Placeholder 2"/>
+      <p:cxnSp>
+        <p:nvCxnSpPr>
+          <p:cNvPr id="17" name="Straight Connector 16"/>
+          <p:cNvCxnSpPr/>
+          <p:nvPr/>
+        </p:nvCxnSpPr>
+        <p:spPr>
+          <a:xfrm>
+            <a:off x="3726142" y="2133600"/>
+            <a:ext cx="0" cy="3962400"/>
+          </a:xfrm>
+          <a:prstGeom prst="line">
+            <a:avLst/>
+          </a:prstGeom>
+          <a:ln w="12700" cmpd="sng">
+            <a:solidFill>
+              <a:schemeClr val="bg2">
+                <a:lumMod val="40000"/>
+                <a:lumOff val="60000"/>
+                <a:alpha val="40000"/>
+              </a:schemeClr>
+            </a:solidFill>
+          </a:ln>
+        </p:spPr>
+        <p:style>
+          <a:lnRef idx="2">
+            <a:schemeClr val="accent1"/>
+          </a:lnRef>
+          <a:fillRef idx="0">
+            <a:schemeClr val="accent1"/>
+          </a:fillRef>
+          <a:effectRef idx="1">
+            <a:schemeClr val="accent1"/>
+          </a:effectRef>
+          <a:fontRef idx="minor">
+            <a:schemeClr val="tx1"/>
+          </a:fontRef>
+        </p:style>
+      </p:cxnSp>
+      <p:cxnSp>
+        <p:nvCxnSpPr>
+          <p:cNvPr id="18" name="Straight Connector 17"/>
+          <p:cNvCxnSpPr/>
+          <p:nvPr/>
+        </p:nvCxnSpPr>
+        <p:spPr>
+          <a:xfrm>
+            <a:off x="6962227" y="2133600"/>
+            <a:ext cx="0" cy="3966882"/>
+          </a:xfrm>
+          <a:prstGeom prst="line">
+            <a:avLst/>
+          </a:prstGeom>
+          <a:ln w="12700" cmpd="sng">
+            <a:solidFill>
+              <a:schemeClr val="bg2">
+                <a:lumMod val="40000"/>
+                <a:lumOff val="60000"/>
+                <a:alpha val="40000"/>
+              </a:schemeClr>
+            </a:solidFill>
+          </a:ln>
+        </p:spPr>
+        <p:style>
+          <a:lnRef idx="2">
+            <a:schemeClr val="accent1"/>
+          </a:lnRef>
+          <a:fillRef idx="0">
+            <a:schemeClr val="accent1"/>
+          </a:fillRef>
+          <a:effectRef idx="1">
+            <a:schemeClr val="accent1"/>
+          </a:effectRef>
+          <a:fontRef idx="minor">
+            <a:schemeClr val="tx1"/>
+          </a:fontRef>
+        </p:style>
+      </p:cxnSp>
+      <p:sp>
+        <p:nvSpPr>
+          <p:cNvPr id="7" name="Date Placeholder 3"/>
           <p:cNvSpPr>
             <a:spLocks noGrp="1"/>
           </p:cNvSpPr>
@@ -2013,7 +2023,7 @@
       </p:sp>
       <p:sp>
         <p:nvSpPr>
-          <p:cNvPr id="4" name="Footer Placeholder 3"/>
+          <p:cNvPr id="4" name="Footer Placeholder 4"/>
           <p:cNvSpPr>
             <a:spLocks noGrp="1"/>
           </p:cNvSpPr>
@@ -2032,7 +2042,7 @@
       </p:sp>
       <p:sp>
         <p:nvSpPr>
-          <p:cNvPr id="5" name="Slide Number Placeholder 4"/>
+          <p:cNvPr id="6" name="Slide Number Placeholder 5"/>
           <p:cNvSpPr>
             <a:spLocks noGrp="1"/>
           </p:cNvSpPr>
@@ -2056,7 +2066,7 @@
     </p:spTree>
     <p:extLst>
       <p:ext uri="{BB962C8B-B14F-4D97-AF65-F5344CB8AC3E}">
-        <p14:creationId xmlns:p14="http://schemas.microsoft.com/office/powerpoint/2010/main" val="531876368"/>
+        <p14:creationId xmlns:p14="http://schemas.microsoft.com/office/powerpoint/2010/main" val="2679691714"/>
       </p:ext>
     </p:extLst>
   </p:cSld>
@@ -2083,138 +2093,47 @@
           <a:chExt cx="0" cy="0"/>
         </a:xfrm>
       </p:grpSpPr>
-      <p:pic>
-        <p:nvPicPr>
-          <p:cNvPr id="2" name="Picture 1" descr="Slate-V2-HD-3colPhotoInset.png"/>
-          <p:cNvPicPr>
-            <a:picLocks noChangeAspect="1"/>
-          </p:cNvPicPr>
-          <p:nvPr/>
-        </p:nvPicPr>
-        <p:blipFill>
-          <a:blip r:embed="rId2">
-            <a:extLst>
-              <a:ext uri="{28A0092B-C50C-407E-A947-70E740481C1C}">
-                <a14:useLocalDpi xmlns:a14="http://schemas.microsoft.com/office/drawing/2010/main" val="0"/>
-              </a:ext>
-            </a:extLst>
-          </a:blip>
-          <a:stretch>
-            <a:fillRect/>
-          </a:stretch>
-        </p:blipFill>
+      <p:sp>
+        <p:nvSpPr>
+          <p:cNvPr id="2" name="Title 1"/>
+          <p:cNvSpPr>
+            <a:spLocks noGrp="1"/>
+          </p:cNvSpPr>
+          <p:nvPr>
+            <p:ph type="title"/>
+          </p:nvPr>
+        </p:nvSpPr>
+        <p:spPr/>
+        <p:txBody>
+          <a:bodyPr/>
+          <a:lstStyle>
+            <a:lvl1pPr>
+              <a:defRPr sz="4200"/>
+            </a:lvl1pPr>
+          </a:lstStyle>
+          <a:p>
+            <a:r>
+              <a:rPr lang="tr-TR" smtClean="0"/>
+              <a:t>Asıl başlık stili için tıklatın</a:t>
+            </a:r>
+            <a:endParaRPr lang="en-US" dirty="0"/>
+          </a:p>
+        </p:txBody>
+      </p:sp>
+      <p:sp>
+        <p:nvSpPr>
+          <p:cNvPr id="3" name="Text Placeholder 2"/>
+          <p:cNvSpPr>
+            <a:spLocks noGrp="1"/>
+          </p:cNvSpPr>
+          <p:nvPr>
+            <p:ph type="body" idx="1"/>
+          </p:nvPr>
+        </p:nvSpPr>
         <p:spPr>
           <a:xfrm>
-            <a:off x="897962" y="1818214"/>
-            <a:ext cx="3339972" cy="1847851"/>
-          </a:xfrm>
-          <a:prstGeom prst="rect">
-            <a:avLst/>
-          </a:prstGeom>
-        </p:spPr>
-      </p:pic>
-      <p:pic>
-        <p:nvPicPr>
-          <p:cNvPr id="36" name="Picture 35" descr="Slate-V2-HD-3colPhotoInset.png"/>
-          <p:cNvPicPr>
-            <a:picLocks noChangeAspect="1"/>
-          </p:cNvPicPr>
-          <p:nvPr/>
-        </p:nvPicPr>
-        <p:blipFill>
-          <a:blip r:embed="rId2">
-            <a:extLst>
-              <a:ext uri="{28A0092B-C50C-407E-A947-70E740481C1C}">
-                <a14:useLocalDpi xmlns:a14="http://schemas.microsoft.com/office/drawing/2010/main" val="0"/>
-              </a:ext>
-            </a:extLst>
-          </a:blip>
-          <a:stretch>
-            <a:fillRect/>
-          </a:stretch>
-        </p:blipFill>
-        <p:spPr>
-          <a:xfrm>
-            <a:off x="4403800" y="1818214"/>
-            <a:ext cx="3339972" cy="1847851"/>
-          </a:xfrm>
-          <a:prstGeom prst="rect">
-            <a:avLst/>
-          </a:prstGeom>
-        </p:spPr>
-      </p:pic>
-      <p:pic>
-        <p:nvPicPr>
-          <p:cNvPr id="37" name="Picture 36" descr="Slate-V2-HD-3colPhotoInset.png"/>
-          <p:cNvPicPr>
-            <a:picLocks noChangeAspect="1"/>
-          </p:cNvPicPr>
-          <p:nvPr/>
-        </p:nvPicPr>
-        <p:blipFill>
-          <a:blip r:embed="rId2">
-            <a:extLst>
-              <a:ext uri="{28A0092B-C50C-407E-A947-70E740481C1C}">
-                <a14:useLocalDpi xmlns:a14="http://schemas.microsoft.com/office/drawing/2010/main" val="0"/>
-              </a:ext>
-            </a:extLst>
-          </a:blip>
-          <a:stretch>
-            <a:fillRect/>
-          </a:stretch>
-        </p:blipFill>
-        <p:spPr>
-          <a:xfrm>
-            <a:off x="7936051" y="1818214"/>
-            <a:ext cx="3339972" cy="1847851"/>
-          </a:xfrm>
-          <a:prstGeom prst="rect">
-            <a:avLst/>
-          </a:prstGeom>
-        </p:spPr>
-      </p:pic>
-      <p:sp>
-        <p:nvSpPr>
-          <p:cNvPr id="30" name="Title 1"/>
-          <p:cNvSpPr>
-            <a:spLocks noGrp="1"/>
-          </p:cNvSpPr>
-          <p:nvPr>
-            <p:ph type="title"/>
-          </p:nvPr>
-        </p:nvSpPr>
-        <p:spPr>
-          <a:xfrm>
-            <a:off x="913794" y="609600"/>
-            <a:ext cx="10353763" cy="970450"/>
-          </a:xfrm>
-        </p:spPr>
-        <p:txBody>
-          <a:bodyPr/>
-          <a:lstStyle/>
-          <a:p>
-            <a:r>
-              <a:rPr lang="tr-TR" smtClean="0"/>
-              <a:t>Asıl başlık stili için tıklatın</a:t>
-            </a:r>
-            <a:endParaRPr lang="en-US" dirty="0"/>
-          </a:p>
-        </p:txBody>
-      </p:sp>
-      <p:sp>
-        <p:nvSpPr>
-          <p:cNvPr id="19" name="Text Placeholder 2"/>
-          <p:cNvSpPr>
-            <a:spLocks noGrp="1"/>
-          </p:cNvSpPr>
-          <p:nvPr>
-            <p:ph type="body" idx="1"/>
-          </p:nvPr>
-        </p:nvSpPr>
-        <p:spPr>
-          <a:xfrm>
-            <a:off x="913795" y="3904106"/>
-            <a:ext cx="3300984" cy="576262"/>
+            <a:off x="652463" y="4250949"/>
+            <a:ext cx="2940050" cy="576262"/>
           </a:xfrm>
         </p:spPr>
         <p:txBody>
@@ -2222,11 +2141,14 @@
             <a:noAutofit/>
           </a:bodyPr>
           <a:lstStyle>
-            <a:lvl1pPr marL="0" indent="0" algn="ctr">
-              <a:buNone/>
-              <a:defRPr sz="2000" b="0">
+            <a:lvl1pPr marL="0" indent="0">
+              <a:buNone/>
+              <a:defRPr sz="2400" b="0">
                 <a:solidFill>
-                  <a:schemeClr val="tx1"/>
+                  <a:schemeClr val="bg2">
+                    <a:lumMod val="40000"/>
+                    <a:lumOff val="60000"/>
+                  </a:schemeClr>
                 </a:solidFill>
               </a:defRPr>
             </a:lvl1pPr>
@@ -2274,7 +2196,7 @@
       </p:sp>
       <p:sp>
         <p:nvSpPr>
-          <p:cNvPr id="20" name="Picture Placeholder 2"/>
+          <p:cNvPr id="29" name="Picture Placeholder 2"/>
           <p:cNvSpPr>
             <a:spLocks noGrp="1" noChangeAspect="1"/>
           </p:cNvSpPr>
@@ -2284,8 +2206,8 @@
         </p:nvSpPr>
         <p:spPr>
           <a:xfrm>
-            <a:off x="1018102" y="1938918"/>
-            <a:ext cx="3092368" cy="1602954"/>
+            <a:off x="652463" y="2209800"/>
+            <a:ext cx="2940050" cy="1524000"/>
           </a:xfrm>
           <a:prstGeom prst="roundRect">
             <a:avLst>
@@ -2293,9 +2215,9 @@
             </a:avLst>
           </a:prstGeom>
           <a:effectLst>
-            <a:outerShdw blurRad="38100" dist="25400" dir="4440000">
+            <a:outerShdw blurRad="50800" dist="50800" dir="5400000" algn="tl" rotWithShape="0">
               <a:srgbClr val="000000">
-                <a:alpha val="36000"/>
+                <a:alpha val="43000"/>
               </a:srgbClr>
             </a:outerShdw>
           </a:effectLst>
@@ -2353,7 +2275,7 @@
       </p:sp>
       <p:sp>
         <p:nvSpPr>
-          <p:cNvPr id="21" name="Text Placeholder 3"/>
+          <p:cNvPr id="22" name="Text Placeholder 3"/>
           <p:cNvSpPr>
             <a:spLocks noGrp="1"/>
           </p:cNvSpPr>
@@ -2363,8 +2285,8 @@
         </p:nvSpPr>
         <p:spPr>
           <a:xfrm>
-            <a:off x="913795" y="4480368"/>
-            <a:ext cx="3300984" cy="1310833"/>
+            <a:off x="652463" y="4827211"/>
+            <a:ext cx="2940050" cy="659189"/>
           </a:xfrm>
         </p:spPr>
         <p:txBody>
@@ -2372,7 +2294,7 @@
             <a:normAutofit/>
           </a:bodyPr>
           <a:lstStyle>
-            <a:lvl1pPr marL="0" indent="0" algn="ctr">
+            <a:lvl1pPr marL="0" indent="0">
               <a:buNone/>
               <a:defRPr sz="1400"/>
             </a:lvl1pPr>
@@ -2420,7 +2342,7 @@
       </p:sp>
       <p:sp>
         <p:nvSpPr>
-          <p:cNvPr id="22" name="Text Placeholder 4"/>
+          <p:cNvPr id="5" name="Text Placeholder 4"/>
           <p:cNvSpPr>
             <a:spLocks noGrp="1"/>
           </p:cNvSpPr>
@@ -2430,8 +2352,8 @@
         </p:nvSpPr>
         <p:spPr>
           <a:xfrm>
-            <a:off x="4442788" y="3904106"/>
-            <a:ext cx="3300984" cy="576262"/>
+            <a:off x="3889375" y="4250949"/>
+            <a:ext cx="2930525" cy="576262"/>
           </a:xfrm>
         </p:spPr>
         <p:txBody>
@@ -2439,11 +2361,14 @@
             <a:noAutofit/>
           </a:bodyPr>
           <a:lstStyle>
-            <a:lvl1pPr marL="0" indent="0" algn="ctr">
-              <a:buNone/>
-              <a:defRPr sz="2000" b="0">
+            <a:lvl1pPr marL="0" indent="0">
+              <a:buNone/>
+              <a:defRPr sz="2400" b="0">
                 <a:solidFill>
-                  <a:schemeClr val="tx1"/>
+                  <a:schemeClr val="bg2">
+                    <a:lumMod val="40000"/>
+                    <a:lumOff val="60000"/>
+                  </a:schemeClr>
                 </a:solidFill>
               </a:defRPr>
             </a:lvl1pPr>
@@ -2491,7 +2416,7 @@
       </p:sp>
       <p:sp>
         <p:nvSpPr>
-          <p:cNvPr id="23" name="Picture Placeholder 2"/>
+          <p:cNvPr id="30" name="Picture Placeholder 2"/>
           <p:cNvSpPr>
             <a:spLocks noGrp="1" noChangeAspect="1"/>
           </p:cNvSpPr>
@@ -2501,8 +2426,8 @@
         </p:nvSpPr>
         <p:spPr>
           <a:xfrm>
-            <a:off x="4545743" y="1939094"/>
-            <a:ext cx="3092368" cy="1608164"/>
+            <a:off x="3889374" y="2209800"/>
+            <a:ext cx="2930525" cy="1524000"/>
           </a:xfrm>
           <a:prstGeom prst="roundRect">
             <a:avLst>
@@ -2510,9 +2435,9 @@
             </a:avLst>
           </a:prstGeom>
           <a:effectLst>
-            <a:outerShdw blurRad="38100" dist="25400" dir="4440000">
+            <a:outerShdw blurRad="50800" dist="50800" dir="5400000" algn="tl" rotWithShape="0">
               <a:srgbClr val="000000">
-                <a:alpha val="36000"/>
+                <a:alpha val="43000"/>
               </a:srgbClr>
             </a:outerShdw>
           </a:effectLst>
@@ -2570,7 +2495,7 @@
       </p:sp>
       <p:sp>
         <p:nvSpPr>
-          <p:cNvPr id="24" name="Text Placeholder 3"/>
+          <p:cNvPr id="23" name="Text Placeholder 3"/>
           <p:cNvSpPr>
             <a:spLocks noGrp="1"/>
           </p:cNvSpPr>
@@ -2580,8 +2505,8 @@
         </p:nvSpPr>
         <p:spPr>
           <a:xfrm>
-            <a:off x="4441435" y="4480367"/>
-            <a:ext cx="3300984" cy="1310833"/>
+            <a:off x="3888022" y="4827210"/>
+            <a:ext cx="2934406" cy="659189"/>
           </a:xfrm>
         </p:spPr>
         <p:txBody>
@@ -2589,7 +2514,7 @@
             <a:normAutofit/>
           </a:bodyPr>
           <a:lstStyle>
-            <a:lvl1pPr marL="0" indent="0" algn="ctr">
+            <a:lvl1pPr marL="0" indent="0">
               <a:buNone/>
               <a:defRPr sz="1400"/>
             </a:lvl1pPr>
@@ -2637,7 +2562,7 @@
       </p:sp>
       <p:sp>
         <p:nvSpPr>
-          <p:cNvPr id="25" name="Text Placeholder 4"/>
+          <p:cNvPr id="14" name="Text Placeholder 4"/>
           <p:cNvSpPr>
             <a:spLocks noGrp="1"/>
           </p:cNvSpPr>
@@ -2647,8 +2572,8 @@
         </p:nvSpPr>
         <p:spPr>
           <a:xfrm>
-            <a:off x="7966697" y="3904106"/>
-            <a:ext cx="3300984" cy="576262"/>
+            <a:off x="7124700" y="4250949"/>
+            <a:ext cx="2932113" cy="576262"/>
           </a:xfrm>
         </p:spPr>
         <p:txBody>
@@ -2656,11 +2581,14 @@
             <a:noAutofit/>
           </a:bodyPr>
           <a:lstStyle>
-            <a:lvl1pPr marL="0" indent="0" algn="ctr">
-              <a:buNone/>
-              <a:defRPr sz="2000" b="0">
+            <a:lvl1pPr marL="0" indent="0">
+              <a:buNone/>
+              <a:defRPr sz="2400" b="0">
                 <a:solidFill>
-                  <a:schemeClr val="tx1"/>
+                  <a:schemeClr val="bg2">
+                    <a:lumMod val="40000"/>
+                    <a:lumOff val="60000"/>
+                  </a:schemeClr>
                 </a:solidFill>
               </a:defRPr>
             </a:lvl1pPr>
@@ -2708,7 +2636,7 @@
       </p:sp>
       <p:sp>
         <p:nvSpPr>
-          <p:cNvPr id="26" name="Picture Placeholder 2"/>
+          <p:cNvPr id="31" name="Picture Placeholder 2"/>
           <p:cNvSpPr>
             <a:spLocks noGrp="1" noChangeAspect="1"/>
           </p:cNvSpPr>
@@ -2718,8 +2646,8 @@
         </p:nvSpPr>
         <p:spPr>
           <a:xfrm>
-            <a:off x="8075698" y="1934432"/>
-            <a:ext cx="3092368" cy="1607294"/>
+            <a:off x="7124699" y="2209800"/>
+            <a:ext cx="2932113" cy="1524000"/>
           </a:xfrm>
           <a:prstGeom prst="roundRect">
             <a:avLst>
@@ -2727,9 +2655,9 @@
             </a:avLst>
           </a:prstGeom>
           <a:effectLst>
-            <a:outerShdw blurRad="38100" dist="25400" dir="4440000">
+            <a:outerShdw blurRad="50800" dist="50800" dir="5400000" algn="tl" rotWithShape="0">
               <a:srgbClr val="000000">
-                <a:alpha val="36000"/>
+                <a:alpha val="43000"/>
               </a:srgbClr>
             </a:outerShdw>
           </a:effectLst>
@@ -2787,7 +2715,7 @@
       </p:sp>
       <p:sp>
         <p:nvSpPr>
-          <p:cNvPr id="27" name="Text Placeholder 3"/>
+          <p:cNvPr id="24" name="Text Placeholder 3"/>
           <p:cNvSpPr>
             <a:spLocks noGrp="1"/>
           </p:cNvSpPr>
@@ -2797,8 +2725,8 @@
         </p:nvSpPr>
         <p:spPr>
           <a:xfrm>
-            <a:off x="7966572" y="4480365"/>
-            <a:ext cx="3300984" cy="1310835"/>
+            <a:off x="7124575" y="4827208"/>
+            <a:ext cx="2935997" cy="659189"/>
           </a:xfrm>
         </p:spPr>
         <p:txBody>
@@ -2806,7 +2734,7 @@
             <a:normAutofit/>
           </a:bodyPr>
           <a:lstStyle>
-            <a:lvl1pPr marL="0" indent="0" algn="ctr">
+            <a:lvl1pPr marL="0" indent="0">
               <a:buNone/>
               <a:defRPr sz="1400"/>
             </a:lvl1pPr>
@@ -2852,9 +2780,87 @@
           </a:p>
         </p:txBody>
       </p:sp>
-      <p:sp>
-        <p:nvSpPr>
-          <p:cNvPr id="3" name="Date Placeholder 2"/>
+      <p:cxnSp>
+        <p:nvCxnSpPr>
+          <p:cNvPr id="19" name="Straight Connector 18"/>
+          <p:cNvCxnSpPr/>
+          <p:nvPr/>
+        </p:nvCxnSpPr>
+        <p:spPr>
+          <a:xfrm>
+            <a:off x="3726142" y="2133600"/>
+            <a:ext cx="0" cy="3962400"/>
+          </a:xfrm>
+          <a:prstGeom prst="line">
+            <a:avLst/>
+          </a:prstGeom>
+          <a:ln w="12700" cmpd="sng">
+            <a:solidFill>
+              <a:schemeClr val="bg2">
+                <a:lumMod val="40000"/>
+                <a:lumOff val="60000"/>
+                <a:alpha val="40000"/>
+              </a:schemeClr>
+            </a:solidFill>
+          </a:ln>
+        </p:spPr>
+        <p:style>
+          <a:lnRef idx="2">
+            <a:schemeClr val="accent1"/>
+          </a:lnRef>
+          <a:fillRef idx="0">
+            <a:schemeClr val="accent1"/>
+          </a:fillRef>
+          <a:effectRef idx="1">
+            <a:schemeClr val="accent1"/>
+          </a:effectRef>
+          <a:fontRef idx="minor">
+            <a:schemeClr val="tx1"/>
+          </a:fontRef>
+        </p:style>
+      </p:cxnSp>
+      <p:cxnSp>
+        <p:nvCxnSpPr>
+          <p:cNvPr id="20" name="Straight Connector 19"/>
+          <p:cNvCxnSpPr/>
+          <p:nvPr/>
+        </p:nvCxnSpPr>
+        <p:spPr>
+          <a:xfrm>
+            <a:off x="6962227" y="2133600"/>
+            <a:ext cx="0" cy="3966882"/>
+          </a:xfrm>
+          <a:prstGeom prst="line">
+            <a:avLst/>
+          </a:prstGeom>
+          <a:ln w="12700" cmpd="sng">
+            <a:solidFill>
+              <a:schemeClr val="bg2">
+                <a:lumMod val="40000"/>
+                <a:lumOff val="60000"/>
+                <a:alpha val="40000"/>
+              </a:schemeClr>
+            </a:solidFill>
+          </a:ln>
+        </p:spPr>
+        <p:style>
+          <a:lnRef idx="2">
+            <a:schemeClr val="accent1"/>
+          </a:lnRef>
+          <a:fillRef idx="0">
+            <a:schemeClr val="accent1"/>
+          </a:fillRef>
+          <a:effectRef idx="1">
+            <a:schemeClr val="accent1"/>
+          </a:effectRef>
+          <a:fontRef idx="minor">
+            <a:schemeClr val="tx1"/>
+          </a:fontRef>
+        </p:style>
+      </p:cxnSp>
+      <p:sp>
+        <p:nvSpPr>
+          <p:cNvPr id="7" name="Date Placeholder 3"/>
           <p:cNvSpPr>
             <a:spLocks noGrp="1"/>
           </p:cNvSpPr>
@@ -2877,7 +2883,7 @@
       </p:sp>
       <p:sp>
         <p:nvSpPr>
-          <p:cNvPr id="4" name="Footer Placeholder 3"/>
+          <p:cNvPr id="4" name="Footer Placeholder 4"/>
           <p:cNvSpPr>
             <a:spLocks noGrp="1"/>
           </p:cNvSpPr>
@@ -2896,7 +2902,7 @@
       </p:sp>
       <p:sp>
         <p:nvSpPr>
-          <p:cNvPr id="5" name="Slide Number Placeholder 4"/>
+          <p:cNvPr id="6" name="Slide Number Placeholder 5"/>
           <p:cNvSpPr>
             <a:spLocks noGrp="1"/>
           </p:cNvSpPr>
@@ -2920,7 +2926,7 @@
     </p:spTree>
     <p:extLst>
       <p:ext uri="{BB962C8B-B14F-4D97-AF65-F5344CB8AC3E}">
-        <p14:creationId xmlns:p14="http://schemas.microsoft.com/office/powerpoint/2010/main" val="2343247004"/>
+        <p14:creationId xmlns:p14="http://schemas.microsoft.com/office/powerpoint/2010/main" val="4102544795"/>
       </p:ext>
     </p:extLst>
   </p:cSld>
@@ -2982,7 +2988,7 @@
         </p:nvSpPr>
         <p:spPr/>
         <p:txBody>
-          <a:bodyPr vert="eaVert" anchor="t"/>
+          <a:bodyPr vert="eaVert" anchor="t" anchorCtr="0"/>
           <a:lstStyle/>
           <a:p>
             <a:pPr lvl="0"/>
@@ -3090,7 +3096,7 @@
     </p:spTree>
     <p:extLst>
       <p:ext uri="{BB962C8B-B14F-4D97-AF65-F5344CB8AC3E}">
-        <p14:creationId xmlns:p14="http://schemas.microsoft.com/office/powerpoint/2010/main" val="4180647084"/>
+        <p14:creationId xmlns:p14="http://schemas.microsoft.com/office/powerpoint/2010/main" val="2625361303"/>
       </p:ext>
     </p:extLst>
   </p:cSld>
@@ -3129,17 +3135,13 @@
         </p:nvSpPr>
         <p:spPr>
           <a:xfrm>
-            <a:off x="8983068" y="609599"/>
-            <a:ext cx="2284487" cy="5181601"/>
+            <a:off x="8304212" y="430213"/>
+            <a:ext cx="1752601" cy="5826125"/>
           </a:xfrm>
         </p:spPr>
         <p:txBody>
-          <a:bodyPr vert="eaVert"/>
-          <a:lstStyle>
-            <a:lvl1pPr algn="l">
-              <a:defRPr/>
-            </a:lvl1pPr>
-          </a:lstStyle>
+          <a:bodyPr vert="eaVert" anchor="b" anchorCtr="0"/>
+          <a:lstStyle/>
           <a:p>
             <a:r>
               <a:rPr lang="tr-TR" smtClean="0"/>
@@ -3161,12 +3163,12 @@
         </p:nvSpPr>
         <p:spPr>
           <a:xfrm>
-            <a:off x="913796" y="609599"/>
-            <a:ext cx="7916872" cy="5181601"/>
+            <a:off x="652463" y="887414"/>
+            <a:ext cx="7423149" cy="5368924"/>
           </a:xfrm>
         </p:spPr>
         <p:txBody>
-          <a:bodyPr vert="eaVert" anchor="t"/>
+          <a:bodyPr vert="eaVert"/>
           <a:lstStyle/>
           <a:p>
             <a:pPr lvl="0"/>
@@ -3274,7 +3276,7 @@
     </p:spTree>
     <p:extLst>
       <p:ext uri="{BB962C8B-B14F-4D97-AF65-F5344CB8AC3E}">
-        <p14:creationId xmlns:p14="http://schemas.microsoft.com/office/powerpoint/2010/main" val="3149442438"/>
+        <p14:creationId xmlns:p14="http://schemas.microsoft.com/office/powerpoint/2010/main" val="369537301"/>
       </p:ext>
     </p:extLst>
   </p:cSld>
@@ -3378,7 +3380,7 @@
       </p:sp>
       <p:sp>
         <p:nvSpPr>
-          <p:cNvPr id="4" name="Date Placeholder 3"/>
+          <p:cNvPr id="7" name="Date Placeholder 3"/>
           <p:cNvSpPr>
             <a:spLocks noGrp="1"/>
           </p:cNvSpPr>
@@ -3444,7 +3446,7 @@
     </p:spTree>
     <p:extLst>
       <p:ext uri="{BB962C8B-B14F-4D97-AF65-F5344CB8AC3E}">
-        <p14:creationId xmlns:p14="http://schemas.microsoft.com/office/powerpoint/2010/main" val="2106037075"/>
+        <p14:creationId xmlns:p14="http://schemas.microsoft.com/office/powerpoint/2010/main" val="3832352955"/>
       </p:ext>
     </p:extLst>
   </p:cSld>
@@ -3483,14 +3485,14 @@
         </p:nvSpPr>
         <p:spPr>
           <a:xfrm>
-            <a:off x="1295401" y="1761067"/>
-            <a:ext cx="9590550" cy="1828813"/>
+            <a:off x="1154956" y="2861733"/>
+            <a:ext cx="8825657" cy="1915647"/>
           </a:xfrm>
         </p:spPr>
         <p:txBody>
           <a:bodyPr anchor="b"/>
           <a:lstStyle>
-            <a:lvl1pPr algn="ctr">
+            <a:lvl1pPr algn="l">
               <a:defRPr sz="4000" b="0" cap="none"/>
             </a:lvl1pPr>
           </a:lstStyle>
@@ -3515,18 +3517,21 @@
         </p:nvSpPr>
         <p:spPr>
           <a:xfrm>
-            <a:off x="1295401" y="3589879"/>
-            <a:ext cx="9590550" cy="1507054"/>
+            <a:off x="1154955" y="4777381"/>
+            <a:ext cx="8825658" cy="860400"/>
           </a:xfrm>
         </p:spPr>
         <p:txBody>
           <a:bodyPr anchor="t"/>
           <a:lstStyle>
-            <a:lvl1pPr marL="0" indent="0" algn="ctr">
-              <a:buNone/>
-              <a:defRPr sz="2000">
+            <a:lvl1pPr marL="0" indent="0" algn="l">
+              <a:buNone/>
+              <a:defRPr sz="2000" cap="all">
                 <a:solidFill>
-                  <a:schemeClr val="tx1"/>
+                  <a:schemeClr val="bg2">
+                    <a:lumMod val="40000"/>
+                    <a:lumOff val="60000"/>
+                  </a:schemeClr>
                 </a:solidFill>
               </a:defRPr>
             </a:lvl1pPr>
@@ -3688,7 +3693,7 @@
     </p:spTree>
     <p:extLst>
       <p:ext uri="{BB962C8B-B14F-4D97-AF65-F5344CB8AC3E}">
-        <p14:creationId xmlns:p14="http://schemas.microsoft.com/office/powerpoint/2010/main" val="216263006"/>
+        <p14:creationId xmlns:p14="http://schemas.microsoft.com/office/powerpoint/2010/main" val="2683982188"/>
       </p:ext>
     </p:extLst>
   </p:cSld>
@@ -3750,15 +3755,43 @@
         </p:nvSpPr>
         <p:spPr>
           <a:xfrm>
-            <a:off x="913795" y="1732449"/>
-            <a:ext cx="5060497" cy="4058750"/>
+            <a:off x="1103312" y="2060575"/>
+            <a:ext cx="4396339" cy="4195763"/>
           </a:xfrm>
         </p:spPr>
         <p:txBody>
-          <a:bodyPr anchor="t">
+          <a:bodyPr>
             <a:normAutofit/>
           </a:bodyPr>
-          <a:lstStyle/>
+          <a:lstStyle>
+            <a:lvl1pPr>
+              <a:defRPr sz="1800"/>
+            </a:lvl1pPr>
+            <a:lvl2pPr>
+              <a:defRPr sz="1600"/>
+            </a:lvl2pPr>
+            <a:lvl3pPr>
+              <a:defRPr sz="1400"/>
+            </a:lvl3pPr>
+            <a:lvl4pPr>
+              <a:defRPr sz="1200"/>
+            </a:lvl4pPr>
+            <a:lvl5pPr>
+              <a:defRPr sz="1200"/>
+            </a:lvl5pPr>
+            <a:lvl6pPr>
+              <a:defRPr sz="1200"/>
+            </a:lvl6pPr>
+            <a:lvl7pPr>
+              <a:defRPr sz="1200"/>
+            </a:lvl7pPr>
+            <a:lvl8pPr>
+              <a:defRPr sz="1200"/>
+            </a:lvl8pPr>
+            <a:lvl9pPr>
+              <a:defRPr sz="1200"/>
+            </a:lvl9pPr>
+          </a:lstStyle>
           <a:p>
             <a:pPr lvl="0"/>
             <a:r>
@@ -3809,15 +3842,43 @@
         </p:nvSpPr>
         <p:spPr>
           <a:xfrm>
-            <a:off x="6202892" y="1732449"/>
-            <a:ext cx="5064665" cy="4058751"/>
+            <a:off x="5654493" y="2056092"/>
+            <a:ext cx="4396341" cy="4200245"/>
           </a:xfrm>
         </p:spPr>
         <p:txBody>
-          <a:bodyPr anchor="t">
+          <a:bodyPr>
             <a:normAutofit/>
           </a:bodyPr>
-          <a:lstStyle/>
+          <a:lstStyle>
+            <a:lvl1pPr>
+              <a:defRPr sz="1800"/>
+            </a:lvl1pPr>
+            <a:lvl2pPr>
+              <a:defRPr sz="1600"/>
+            </a:lvl2pPr>
+            <a:lvl3pPr>
+              <a:defRPr sz="1400"/>
+            </a:lvl3pPr>
+            <a:lvl4pPr>
+              <a:defRPr sz="1200"/>
+            </a:lvl4pPr>
+            <a:lvl5pPr>
+              <a:defRPr sz="1200"/>
+            </a:lvl5pPr>
+            <a:lvl6pPr>
+              <a:defRPr sz="1200"/>
+            </a:lvl6pPr>
+            <a:lvl7pPr>
+              <a:defRPr sz="1200"/>
+            </a:lvl7pPr>
+            <a:lvl8pPr>
+              <a:defRPr sz="1200"/>
+            </a:lvl8pPr>
+            <a:lvl9pPr>
+              <a:defRPr sz="1200"/>
+            </a:lvl9pPr>
+          </a:lstStyle>
           <a:p>
             <a:pPr lvl="0"/>
             <a:r>
@@ -3924,7 +3985,7 @@
     </p:spTree>
     <p:extLst>
       <p:ext uri="{BB962C8B-B14F-4D97-AF65-F5344CB8AC3E}">
-        <p14:creationId xmlns:p14="http://schemas.microsoft.com/office/powerpoint/2010/main" val="2443043058"/>
+        <p14:creationId xmlns:p14="http://schemas.microsoft.com/office/powerpoint/2010/main" val="4173031346"/>
       </p:ext>
     </p:extLst>
   </p:cSld>
@@ -3951,66 +4012,6 @@
           <a:chExt cx="0" cy="0"/>
         </a:xfrm>
       </p:grpSpPr>
-      <p:pic>
-        <p:nvPicPr>
-          <p:cNvPr id="20" name="Picture 19" descr="Slate-V2-HD-compPhotoInset.png"/>
-          <p:cNvPicPr>
-            <a:picLocks noChangeAspect="1"/>
-          </p:cNvPicPr>
-          <p:nvPr/>
-        </p:nvPicPr>
-        <p:blipFill>
-          <a:blip r:embed="rId2">
-            <a:extLst>
-              <a:ext uri="{28A0092B-C50C-407E-A947-70E740481C1C}">
-                <a14:useLocalDpi xmlns:a14="http://schemas.microsoft.com/office/drawing/2010/main" val="0"/>
-              </a:ext>
-            </a:extLst>
-          </a:blip>
-          <a:stretch>
-            <a:fillRect/>
-          </a:stretch>
-        </p:blipFill>
-        <p:spPr>
-          <a:xfrm>
-            <a:off x="913795" y="1734506"/>
-            <a:ext cx="5089072" cy="4148769"/>
-          </a:xfrm>
-          <a:prstGeom prst="rect">
-            <a:avLst/>
-          </a:prstGeom>
-        </p:spPr>
-      </p:pic>
-      <p:pic>
-        <p:nvPicPr>
-          <p:cNvPr id="21" name="Picture 20" descr="Slate-V2-HD-compPhotoInset.png"/>
-          <p:cNvPicPr>
-            <a:picLocks noChangeAspect="1"/>
-          </p:cNvPicPr>
-          <p:nvPr/>
-        </p:nvPicPr>
-        <p:blipFill>
-          <a:blip r:embed="rId2">
-            <a:extLst>
-              <a:ext uri="{28A0092B-C50C-407E-A947-70E740481C1C}">
-                <a14:useLocalDpi xmlns:a14="http://schemas.microsoft.com/office/drawing/2010/main" val="0"/>
-              </a:ext>
-            </a:extLst>
-          </a:blip>
-          <a:stretch>
-            <a:fillRect/>
-          </a:stretch>
-        </p:blipFill>
-        <p:spPr>
-          <a:xfrm>
-            <a:off x="6178485" y="1734506"/>
-            <a:ext cx="5089072" cy="4148769"/>
-          </a:xfrm>
-          <a:prstGeom prst="rect">
-            <a:avLst/>
-          </a:prstGeom>
-        </p:spPr>
-      </p:pic>
       <p:sp>
         <p:nvSpPr>
           <p:cNvPr id="2" name="Title 1"/>
@@ -4050,8 +4051,8 @@
         </p:nvSpPr>
         <p:spPr>
           <a:xfrm>
-            <a:off x="1005872" y="1835254"/>
-            <a:ext cx="4876344" cy="544884"/>
+            <a:off x="1103313" y="1905000"/>
+            <a:ext cx="4396338" cy="576262"/>
           </a:xfrm>
         </p:spPr>
         <p:txBody>
@@ -4059,9 +4060,16 @@
             <a:noAutofit/>
           </a:bodyPr>
           <a:lstStyle>
-            <a:lvl1pPr marL="0" indent="0" algn="ctr">
-              <a:buNone/>
-              <a:defRPr sz="2400" b="0"/>
+            <a:lvl1pPr marL="0" indent="0">
+              <a:buNone/>
+              <a:defRPr sz="2400" b="0">
+                <a:solidFill>
+                  <a:schemeClr val="bg2">
+                    <a:lumMod val="40000"/>
+                    <a:lumOff val="60000"/>
+                  </a:schemeClr>
+                </a:solidFill>
+              </a:defRPr>
             </a:lvl1pPr>
             <a:lvl2pPr marL="457200" indent="0">
               <a:buNone/>
@@ -4117,12 +4125,12 @@
         </p:nvSpPr>
         <p:spPr>
           <a:xfrm>
-            <a:off x="1005872" y="2380137"/>
-            <a:ext cx="4876344" cy="3411063"/>
+            <a:off x="1103312" y="2514600"/>
+            <a:ext cx="4396339" cy="3741738"/>
           </a:xfrm>
         </p:spPr>
         <p:txBody>
-          <a:bodyPr anchor="t">
+          <a:bodyPr>
             <a:normAutofit/>
           </a:bodyPr>
           <a:lstStyle>
@@ -4141,6 +4149,18 @@
             <a:lvl5pPr>
               <a:defRPr sz="1200"/>
             </a:lvl5pPr>
+            <a:lvl6pPr>
+              <a:defRPr sz="1200"/>
+            </a:lvl6pPr>
+            <a:lvl7pPr>
+              <a:defRPr sz="1200"/>
+            </a:lvl7pPr>
+            <a:lvl8pPr>
+              <a:defRPr sz="1200"/>
+            </a:lvl8pPr>
+            <a:lvl9pPr>
+              <a:defRPr sz="1200"/>
+            </a:lvl9pPr>
           </a:lstStyle>
           <a:p>
             <a:pPr lvl="0"/>
@@ -4192,8 +4212,8 @@
         </p:nvSpPr>
         <p:spPr>
           <a:xfrm>
-            <a:off x="6294967" y="1835254"/>
-            <a:ext cx="4895330" cy="544883"/>
+            <a:off x="5654495" y="1905000"/>
+            <a:ext cx="4396339" cy="576262"/>
           </a:xfrm>
         </p:spPr>
         <p:txBody>
@@ -4201,9 +4221,16 @@
             <a:noAutofit/>
           </a:bodyPr>
           <a:lstStyle>
-            <a:lvl1pPr marL="0" indent="0" algn="ctr">
-              <a:buNone/>
-              <a:defRPr sz="2400" b="0"/>
+            <a:lvl1pPr marL="0" indent="0">
+              <a:buNone/>
+              <a:defRPr sz="2400" b="0">
+                <a:solidFill>
+                  <a:schemeClr val="bg2">
+                    <a:lumMod val="40000"/>
+                    <a:lumOff val="60000"/>
+                  </a:schemeClr>
+                </a:solidFill>
+              </a:defRPr>
             </a:lvl1pPr>
             <a:lvl2pPr marL="457200" indent="0">
               <a:buNone/>
@@ -4259,12 +4286,12 @@
         </p:nvSpPr>
         <p:spPr>
           <a:xfrm>
-            <a:off x="6294967" y="2380137"/>
-            <a:ext cx="4895330" cy="3411063"/>
+            <a:off x="5654495" y="2514600"/>
+            <a:ext cx="4396339" cy="3741738"/>
           </a:xfrm>
         </p:spPr>
         <p:txBody>
-          <a:bodyPr anchor="t">
+          <a:bodyPr>
             <a:normAutofit/>
           </a:bodyPr>
           <a:lstStyle>
@@ -4283,6 +4310,18 @@
             <a:lvl5pPr>
               <a:defRPr sz="1200"/>
             </a:lvl5pPr>
+            <a:lvl6pPr>
+              <a:defRPr sz="1200"/>
+            </a:lvl6pPr>
+            <a:lvl7pPr>
+              <a:defRPr sz="1200"/>
+            </a:lvl7pPr>
+            <a:lvl8pPr>
+              <a:defRPr sz="1200"/>
+            </a:lvl8pPr>
+            <a:lvl9pPr>
+              <a:defRPr sz="1200"/>
+            </a:lvl9pPr>
           </a:lstStyle>
           <a:p>
             <a:pPr lvl="0"/>
@@ -4390,7 +4429,7 @@
     </p:spTree>
     <p:extLst>
       <p:ext uri="{BB962C8B-B14F-4D97-AF65-F5344CB8AC3E}">
-        <p14:creationId xmlns:p14="http://schemas.microsoft.com/office/powerpoint/2010/main" val="334648319"/>
+        <p14:creationId xmlns:p14="http://schemas.microsoft.com/office/powerpoint/2010/main" val="510474081"/>
       </p:ext>
     </p:extLst>
   </p:cSld>
@@ -4442,7 +4481,7 @@
       </p:sp>
       <p:sp>
         <p:nvSpPr>
-          <p:cNvPr id="3" name="Date Placeholder 2"/>
+          <p:cNvPr id="7" name="Date Placeholder 2"/>
           <p:cNvSpPr>
             <a:spLocks noGrp="1"/>
           </p:cNvSpPr>
@@ -4465,7 +4504,7 @@
       </p:sp>
       <p:sp>
         <p:nvSpPr>
-          <p:cNvPr id="4" name="Footer Placeholder 3"/>
+          <p:cNvPr id="5" name="Footer Placeholder 3"/>
           <p:cNvSpPr>
             <a:spLocks noGrp="1"/>
           </p:cNvSpPr>
@@ -4484,7 +4523,7 @@
       </p:sp>
       <p:sp>
         <p:nvSpPr>
-          <p:cNvPr id="5" name="Slide Number Placeholder 4"/>
+          <p:cNvPr id="6" name="Slide Number Placeholder 4"/>
           <p:cNvSpPr>
             <a:spLocks noGrp="1"/>
           </p:cNvSpPr>
@@ -4508,7 +4547,7 @@
     </p:spTree>
     <p:extLst>
       <p:ext uri="{BB962C8B-B14F-4D97-AF65-F5344CB8AC3E}">
-        <p14:creationId xmlns:p14="http://schemas.microsoft.com/office/powerpoint/2010/main" val="1780661967"/>
+        <p14:creationId xmlns:p14="http://schemas.microsoft.com/office/powerpoint/2010/main" val="506791273"/>
       </p:ext>
     </p:extLst>
   </p:cSld>
@@ -4537,7 +4576,7 @@
       </p:grpSpPr>
       <p:sp>
         <p:nvSpPr>
-          <p:cNvPr id="2" name="Date Placeholder 1"/>
+          <p:cNvPr id="7" name="Date Placeholder 1"/>
           <p:cNvSpPr>
             <a:spLocks noGrp="1"/>
           </p:cNvSpPr>
@@ -4560,7 +4599,7 @@
       </p:sp>
       <p:sp>
         <p:nvSpPr>
-          <p:cNvPr id="3" name="Footer Placeholder 2"/>
+          <p:cNvPr id="5" name="Footer Placeholder 2"/>
           <p:cNvSpPr>
             <a:spLocks noGrp="1"/>
           </p:cNvSpPr>
@@ -4579,7 +4618,7 @@
       </p:sp>
       <p:sp>
         <p:nvSpPr>
-          <p:cNvPr id="4" name="Slide Number Placeholder 3"/>
+          <p:cNvPr id="6" name="Slide Number Placeholder 3"/>
           <p:cNvSpPr>
             <a:spLocks noGrp="1"/>
           </p:cNvSpPr>
@@ -4603,7 +4642,7 @@
     </p:spTree>
     <p:extLst>
       <p:ext uri="{BB962C8B-B14F-4D97-AF65-F5344CB8AC3E}">
-        <p14:creationId xmlns:p14="http://schemas.microsoft.com/office/powerpoint/2010/main" val="479244828"/>
+        <p14:creationId xmlns:p14="http://schemas.microsoft.com/office/powerpoint/2010/main" val="3854559151"/>
       </p:ext>
     </p:extLst>
   </p:cSld>
@@ -4642,23 +4681,108 @@
         </p:nvSpPr>
         <p:spPr>
           <a:xfrm>
-            <a:off x="913795" y="609600"/>
-            <a:ext cx="3706889" cy="1821918"/>
+            <a:off x="1154953" y="1447800"/>
+            <a:ext cx="3401064" cy="1447800"/>
           </a:xfrm>
         </p:spPr>
         <p:txBody>
-          <a:bodyPr anchor="b">
+          <a:bodyPr anchor="b"/>
+          <a:lstStyle>
+            <a:lvl1pPr algn="l">
+              <a:defRPr sz="2400" b="0"/>
+            </a:lvl1pPr>
+          </a:lstStyle>
+          <a:p>
+            <a:r>
+              <a:rPr lang="tr-TR" smtClean="0"/>
+              <a:t>Asıl başlık stili için tıklatın</a:t>
+            </a:r>
+            <a:endParaRPr lang="en-US" dirty="0"/>
+          </a:p>
+        </p:txBody>
+      </p:sp>
+      <p:sp>
+        <p:nvSpPr>
+          <p:cNvPr id="3" name="Content Placeholder 2"/>
+          <p:cNvSpPr>
+            <a:spLocks noGrp="1"/>
+          </p:cNvSpPr>
+          <p:nvPr>
+            <p:ph idx="1"/>
+          </p:nvPr>
+        </p:nvSpPr>
+        <p:spPr>
+          <a:xfrm>
+            <a:off x="4784616" y="1447800"/>
+            <a:ext cx="5195997" cy="4572000"/>
+          </a:xfrm>
+        </p:spPr>
+        <p:txBody>
+          <a:bodyPr anchor="ctr">
             <a:normAutofit/>
           </a:bodyPr>
           <a:lstStyle>
-            <a:lvl1pPr algn="ctr">
-              <a:defRPr sz="2400" b="0"/>
+            <a:lvl1pPr>
+              <a:defRPr sz="2000"/>
             </a:lvl1pPr>
+            <a:lvl2pPr>
+              <a:defRPr sz="1800"/>
+            </a:lvl2pPr>
+            <a:lvl3pPr>
+              <a:defRPr sz="1600"/>
+            </a:lvl3pPr>
+            <a:lvl4pPr>
+              <a:defRPr sz="1400"/>
+            </a:lvl4pPr>
+            <a:lvl5pPr>
+              <a:defRPr sz="1400"/>
+            </a:lvl5pPr>
+            <a:lvl6pPr>
+              <a:defRPr sz="1400"/>
+            </a:lvl6pPr>
+            <a:lvl7pPr>
+              <a:defRPr sz="1400"/>
+            </a:lvl7pPr>
+            <a:lvl8pPr>
+              <a:defRPr sz="1400"/>
+            </a:lvl8pPr>
+            <a:lvl9pPr>
+              <a:defRPr sz="1400"/>
+            </a:lvl9pPr>
           </a:lstStyle>
           <a:p>
-            <a:r>
-              <a:rPr lang="tr-TR" smtClean="0"/>
-              <a:t>Asıl başlık stili için tıklatın</a:t>
+            <a:pPr lvl="0"/>
+            <a:r>
+              <a:rPr lang="tr-TR" smtClean="0"/>
+              <a:t>Asıl metin stillerini düzenlemek için tıklatın</a:t>
+            </a:r>
+          </a:p>
+          <a:p>
+            <a:pPr lvl="1"/>
+            <a:r>
+              <a:rPr lang="tr-TR" smtClean="0"/>
+              <a:t>İkinci düzey</a:t>
+            </a:r>
+          </a:p>
+          <a:p>
+            <a:pPr lvl="2"/>
+            <a:r>
+              <a:rPr lang="tr-TR" smtClean="0"/>
+              <a:t>Üçüncü düzey</a:t>
+            </a:r>
+          </a:p>
+          <a:p>
+            <a:pPr lvl="3"/>
+            <a:r>
+              <a:rPr lang="tr-TR" smtClean="0"/>
+              <a:t>Dördüncü düzey</a:t>
+            </a:r>
+          </a:p>
+          <a:p>
+            <a:pPr lvl="4"/>
+            <a:r>
+              <a:rPr lang="tr-TR" smtClean="0"/>
+              <a:t>Beşinci düzey</a:t>
             </a:r>
             <a:endParaRPr lang="en-US" dirty="0"/>
           </a:p>
@@ -4666,87 +4790,26 @@
       </p:sp>
       <p:sp>
         <p:nvSpPr>
-          <p:cNvPr id="3" name="Content Placeholder 2"/>
-          <p:cNvSpPr>
-            <a:spLocks noGrp="1"/>
-          </p:cNvSpPr>
-          <p:nvPr>
-            <p:ph idx="1"/>
+          <p:cNvPr id="4" name="Text Placeholder 3"/>
+          <p:cNvSpPr>
+            <a:spLocks noGrp="1"/>
+          </p:cNvSpPr>
+          <p:nvPr>
+            <p:ph type="body" sz="half" idx="2"/>
           </p:nvPr>
         </p:nvSpPr>
         <p:spPr>
           <a:xfrm>
-            <a:off x="4855633" y="609600"/>
-            <a:ext cx="6411924" cy="5181600"/>
+            <a:off x="1154953" y="3129280"/>
+            <a:ext cx="3401063" cy="2895599"/>
           </a:xfrm>
         </p:spPr>
         <p:txBody>
-          <a:bodyPr>
-            <a:normAutofit/>
-          </a:bodyPr>
-          <a:lstStyle/>
-          <a:p>
-            <a:pPr lvl="0"/>
-            <a:r>
-              <a:rPr lang="tr-TR" smtClean="0"/>
-              <a:t>Asıl metin stillerini düzenlemek için tıklatın</a:t>
-            </a:r>
-          </a:p>
-          <a:p>
-            <a:pPr lvl="1"/>
-            <a:r>
-              <a:rPr lang="tr-TR" smtClean="0"/>
-              <a:t>İkinci düzey</a:t>
-            </a:r>
-          </a:p>
-          <a:p>
-            <a:pPr lvl="2"/>
-            <a:r>
-              <a:rPr lang="tr-TR" smtClean="0"/>
-              <a:t>Üçüncü düzey</a:t>
-            </a:r>
-          </a:p>
-          <a:p>
-            <a:pPr lvl="3"/>
-            <a:r>
-              <a:rPr lang="tr-TR" smtClean="0"/>
-              <a:t>Dördüncü düzey</a:t>
-            </a:r>
-          </a:p>
-          <a:p>
-            <a:pPr lvl="4"/>
-            <a:r>
-              <a:rPr lang="tr-TR" smtClean="0"/>
-              <a:t>Beşinci düzey</a:t>
-            </a:r>
-            <a:endParaRPr lang="en-US" dirty="0"/>
-          </a:p>
-        </p:txBody>
-      </p:sp>
-      <p:sp>
-        <p:nvSpPr>
-          <p:cNvPr id="4" name="Text Placeholder 3"/>
-          <p:cNvSpPr>
-            <a:spLocks noGrp="1"/>
-          </p:cNvSpPr>
-          <p:nvPr>
-            <p:ph type="body" sz="half" idx="2"/>
-          </p:nvPr>
-        </p:nvSpPr>
-        <p:spPr>
-          <a:xfrm>
-            <a:off x="913795" y="2431518"/>
-            <a:ext cx="3706889" cy="3359681"/>
-          </a:xfrm>
-        </p:spPr>
-        <p:txBody>
-          <a:bodyPr anchor="t">
-            <a:normAutofit/>
-          </a:bodyPr>
+          <a:bodyPr/>
           <a:lstStyle>
-            <a:lvl1pPr marL="0" indent="0" algn="ctr">
-              <a:buNone/>
-              <a:defRPr sz="1600"/>
+            <a:lvl1pPr marL="0" indent="0">
+              <a:buNone/>
+              <a:defRPr sz="1400"/>
             </a:lvl1pPr>
             <a:lvl2pPr marL="457200" indent="0">
               <a:buNone/>
@@ -4792,7 +4855,7 @@
       </p:sp>
       <p:sp>
         <p:nvSpPr>
-          <p:cNvPr id="5" name="Date Placeholder 4"/>
+          <p:cNvPr id="7" name="Date Placeholder 4"/>
           <p:cNvSpPr>
             <a:spLocks noGrp="1"/>
           </p:cNvSpPr>
@@ -4815,7 +4878,7 @@
       </p:sp>
       <p:sp>
         <p:nvSpPr>
-          <p:cNvPr id="6" name="Footer Placeholder 5"/>
+          <p:cNvPr id="5" name="Footer Placeholder 5"/>
           <p:cNvSpPr>
             <a:spLocks noGrp="1"/>
           </p:cNvSpPr>
@@ -4834,7 +4897,7 @@
       </p:sp>
       <p:sp>
         <p:nvSpPr>
-          <p:cNvPr id="7" name="Slide Number Placeholder 6"/>
+          <p:cNvPr id="6" name="Slide Number Placeholder 6"/>
           <p:cNvSpPr>
             <a:spLocks noGrp="1"/>
           </p:cNvSpPr>
@@ -4858,7 +4921,7 @@
     </p:spTree>
     <p:extLst>
       <p:ext uri="{BB962C8B-B14F-4D97-AF65-F5344CB8AC3E}">
-        <p14:creationId xmlns:p14="http://schemas.microsoft.com/office/powerpoint/2010/main" val="1842444639"/>
+        <p14:creationId xmlns:p14="http://schemas.microsoft.com/office/powerpoint/2010/main" val="2748626636"/>
       </p:ext>
     </p:extLst>
   </p:cSld>
@@ -4885,89 +4948,64 @@
           <a:chExt cx="0" cy="0"/>
         </a:xfrm>
       </p:grpSpPr>
-      <p:pic>
-        <p:nvPicPr>
-          <p:cNvPr id="22" name="Picture 21" descr="Slate-V2-HD-vertPhotoInset.png"/>
-          <p:cNvPicPr>
-            <a:picLocks noChangeAspect="1"/>
-          </p:cNvPicPr>
-          <p:nvPr/>
-        </p:nvPicPr>
-        <p:blipFill>
-          <a:blip r:embed="rId2">
-            <a:extLst>
-              <a:ext uri="{28A0092B-C50C-407E-A947-70E740481C1C}">
-                <a14:useLocalDpi xmlns:a14="http://schemas.microsoft.com/office/drawing/2010/main" val="0"/>
-              </a:ext>
-            </a:extLst>
-          </a:blip>
-          <a:stretch>
-            <a:fillRect/>
-          </a:stretch>
-        </p:blipFill>
+      <p:sp>
+        <p:nvSpPr>
+          <p:cNvPr id="2" name="Title 1"/>
+          <p:cNvSpPr>
+            <a:spLocks noGrp="1"/>
+          </p:cNvSpPr>
+          <p:nvPr>
+            <p:ph type="title"/>
+          </p:nvPr>
+        </p:nvSpPr>
         <p:spPr>
           <a:xfrm>
-            <a:off x="7293665" y="609600"/>
-            <a:ext cx="3584166" cy="5204832"/>
+            <a:off x="1153907" y="1854192"/>
+            <a:ext cx="5092906" cy="1574808"/>
           </a:xfrm>
-          <a:prstGeom prst="rect">
-            <a:avLst/>
-          </a:prstGeom>
         </p:spPr>
-      </p:pic>
-      <p:sp>
-        <p:nvSpPr>
-          <p:cNvPr id="2" name="Title 1"/>
-          <p:cNvSpPr>
-            <a:spLocks noGrp="1"/>
-          </p:cNvSpPr>
-          <p:nvPr>
-            <p:ph type="title"/>
+        <p:txBody>
+          <a:bodyPr anchor="b">
+            <a:normAutofit/>
+          </a:bodyPr>
+          <a:lstStyle>
+            <a:lvl1pPr algn="l">
+              <a:defRPr sz="3600" b="0"/>
+            </a:lvl1pPr>
+          </a:lstStyle>
+          <a:p>
+            <a:r>
+              <a:rPr lang="tr-TR" smtClean="0"/>
+              <a:t>Asıl başlık stili için tıklatın</a:t>
+            </a:r>
+            <a:endParaRPr lang="en-US" dirty="0"/>
+          </a:p>
+        </p:txBody>
+      </p:sp>
+      <p:sp>
+        <p:nvSpPr>
+          <p:cNvPr id="3" name="Picture Placeholder 2"/>
+          <p:cNvSpPr>
+            <a:spLocks noGrp="1" noChangeAspect="1"/>
+          </p:cNvSpPr>
+          <p:nvPr>
+            <p:ph type="pic" idx="1"/>
           </p:nvPr>
         </p:nvSpPr>
         <p:spPr>
           <a:xfrm>
-            <a:off x="913795" y="609923"/>
-            <a:ext cx="5934949" cy="1829338"/>
+            <a:off x="6949546" y="1143000"/>
+            <a:ext cx="3200400" cy="4572000"/>
           </a:xfrm>
-        </p:spPr>
-        <p:txBody>
-          <a:bodyPr anchor="b">
-            <a:noAutofit/>
-          </a:bodyPr>
-          <a:lstStyle>
-            <a:lvl1pPr algn="ctr">
-              <a:defRPr sz="3200" b="0"/>
-            </a:lvl1pPr>
-          </a:lstStyle>
-          <a:p>
-            <a:r>
-              <a:rPr lang="tr-TR" smtClean="0"/>
-              <a:t>Asıl başlık stili için tıklatın</a:t>
-            </a:r>
-            <a:endParaRPr lang="en-US" dirty="0"/>
-          </a:p>
-        </p:txBody>
-      </p:sp>
-      <p:sp>
-        <p:nvSpPr>
-          <p:cNvPr id="3" name="Picture Placeholder 2"/>
-          <p:cNvSpPr>
-            <a:spLocks noGrp="1" noChangeAspect="1"/>
-          </p:cNvSpPr>
-          <p:nvPr>
-            <p:ph type="pic" idx="1"/>
-          </p:nvPr>
-        </p:nvSpPr>
-        <p:spPr>
-          <a:xfrm>
-            <a:off x="7442551" y="763702"/>
-            <a:ext cx="3275751" cy="4912822"/>
-          </a:xfrm>
+          <a:prstGeom prst="roundRect">
+            <a:avLst>
+              <a:gd name="adj" fmla="val 1858"/>
+            </a:avLst>
+          </a:prstGeom>
           <a:effectLst>
-            <a:outerShdw blurRad="38100" dist="25400" dir="4440000">
+            <a:outerShdw blurRad="50800" dist="50800" dir="5400000" algn="tl" rotWithShape="0">
               <a:srgbClr val="000000">
-                <a:alpha val="36000"/>
+                <a:alpha val="43000"/>
               </a:srgbClr>
             </a:outerShdw>
           </a:effectLst>
@@ -5035,18 +5073,18 @@
         </p:nvSpPr>
         <p:spPr>
           <a:xfrm>
-            <a:off x="913795" y="2439261"/>
-            <a:ext cx="5934949" cy="3376134"/>
+            <a:off x="1154954" y="3657600"/>
+            <a:ext cx="5084979" cy="1371600"/>
           </a:xfrm>
         </p:spPr>
         <p:txBody>
-          <a:bodyPr anchor="t">
+          <a:bodyPr>
             <a:normAutofit/>
           </a:bodyPr>
           <a:lstStyle>
-            <a:lvl1pPr marL="0" indent="0" algn="ctr">
-              <a:buNone/>
-              <a:defRPr sz="1600"/>
+            <a:lvl1pPr marL="0" indent="0">
+              <a:buNone/>
+              <a:defRPr sz="1400"/>
             </a:lvl1pPr>
             <a:lvl2pPr marL="457200" indent="0">
               <a:buNone/>
@@ -5158,7 +5196,7 @@
     </p:spTree>
     <p:extLst>
       <p:ext uri="{BB962C8B-B14F-4D97-AF65-F5344CB8AC3E}">
-        <p14:creationId xmlns:p14="http://schemas.microsoft.com/office/powerpoint/2010/main" val="3148317738"/>
+        <p14:creationId xmlns:p14="http://schemas.microsoft.com/office/powerpoint/2010/main" val="74801693"/>
       </p:ext>
     </p:extLst>
   </p:cSld>
@@ -5190,247 +5228,429 @@
           <a:chExt cx="0" cy="0"/>
         </a:xfrm>
       </p:grpSpPr>
-      <p:sp>
-        <p:nvSpPr>
-          <p:cNvPr id="2" name="Title Placeholder 1"/>
-          <p:cNvSpPr>
-            <a:spLocks noGrp="1"/>
-          </p:cNvSpPr>
-          <p:nvPr>
-            <p:ph type="title"/>
-          </p:nvPr>
-        </p:nvSpPr>
+      <p:pic>
+        <p:nvPicPr>
+          <p:cNvPr id="8" name="Picture 7"/>
+          <p:cNvPicPr>
+            <a:picLocks noChangeAspect="1"/>
+          </p:cNvPicPr>
+          <p:nvPr/>
+        </p:nvPicPr>
+        <p:blipFill rotWithShape="1">
+          <a:blip r:embed="rId19">
+            <a:extLst>
+              <a:ext uri="{28A0092B-C50C-407E-A947-70E740481C1C}">
+                <a14:useLocalDpi xmlns:a14="http://schemas.microsoft.com/office/drawing/2010/main" val="0"/>
+              </a:ext>
+            </a:extLst>
+          </a:blip>
+          <a:srcRect l="3613"/>
+          <a:stretch/>
+        </p:blipFill>
         <p:spPr>
           <a:xfrm>
-            <a:off x="913795" y="609600"/>
-            <a:ext cx="10353762" cy="970450"/>
-          </a:xfrm>
-          <a:prstGeom prst="rect">
-            <a:avLst/>
-          </a:prstGeom>
-          <a:effectLst>
-            <a:outerShdw blurRad="25400" dir="17880000">
-              <a:srgbClr val="000000">
-                <a:alpha val="46000"/>
-              </a:srgbClr>
-            </a:outerShdw>
-          </a:effectLst>
-        </p:spPr>
-        <p:txBody>
-          <a:bodyPr vert="horz" lIns="91440" tIns="45720" rIns="91440" bIns="45720" rtlCol="0" anchor="ctr">
-            <a:normAutofit/>
-          </a:bodyPr>
-          <a:lstStyle/>
-          <a:p>
-            <a:r>
-              <a:rPr lang="tr-TR" smtClean="0"/>
-              <a:t>Asıl başlık stili için tıklatın</a:t>
-            </a:r>
-            <a:endParaRPr lang="en-US" dirty="0"/>
-          </a:p>
-        </p:txBody>
-      </p:sp>
-      <p:sp>
-        <p:nvSpPr>
-          <p:cNvPr id="3" name="Text Placeholder 2"/>
-          <p:cNvSpPr>
-            <a:spLocks noGrp="1"/>
-          </p:cNvSpPr>
-          <p:nvPr>
-            <p:ph type="body" idx="1"/>
-          </p:nvPr>
-        </p:nvSpPr>
-        <p:spPr>
-          <a:xfrm>
-            <a:off x="913795" y="1732449"/>
-            <a:ext cx="10353762" cy="4058751"/>
-          </a:xfrm>
-          <a:prstGeom prst="rect">
-            <a:avLst/>
-          </a:prstGeom>
-          <a:effectLst>
-            <a:outerShdw blurRad="25400" dir="17880000">
-              <a:srgbClr val="000000">
-                <a:alpha val="46000"/>
-              </a:srgbClr>
-            </a:outerShdw>
-          </a:effectLst>
-        </p:spPr>
-        <p:txBody>
-          <a:bodyPr vert="horz" lIns="91440" tIns="45720" rIns="91440" bIns="45720" rtlCol="0" anchor="t">
-            <a:normAutofit/>
-          </a:bodyPr>
-          <a:lstStyle/>
-          <a:p>
-            <a:pPr lvl="0"/>
-            <a:r>
-              <a:rPr lang="tr-TR" smtClean="0"/>
-              <a:t>Asıl metin stillerini düzenlemek için tıklatın</a:t>
-            </a:r>
-          </a:p>
-          <a:p>
-            <a:pPr lvl="1"/>
-            <a:r>
-              <a:rPr lang="tr-TR" smtClean="0"/>
-              <a:t>İkinci düzey</a:t>
-            </a:r>
-          </a:p>
-          <a:p>
-            <a:pPr lvl="2"/>
-            <a:r>
-              <a:rPr lang="tr-TR" smtClean="0"/>
-              <a:t>Üçüncü düzey</a:t>
-            </a:r>
-          </a:p>
-          <a:p>
-            <a:pPr lvl="3"/>
-            <a:r>
-              <a:rPr lang="tr-TR" smtClean="0"/>
-              <a:t>Dördüncü düzey</a:t>
-            </a:r>
-          </a:p>
-          <a:p>
-            <a:pPr lvl="4"/>
-            <a:r>
-              <a:rPr lang="tr-TR" smtClean="0"/>
-              <a:t>Beşinci düzey</a:t>
-            </a:r>
-            <a:endParaRPr lang="en-US" dirty="0"/>
-          </a:p>
-        </p:txBody>
-      </p:sp>
-      <p:sp>
-        <p:nvSpPr>
-          <p:cNvPr id="4" name="Date Placeholder 3"/>
-          <p:cNvSpPr>
-            <a:spLocks noGrp="1"/>
-          </p:cNvSpPr>
-          <p:nvPr>
-            <p:ph type="dt" sz="half" idx="2"/>
-          </p:nvPr>
-        </p:nvSpPr>
-        <p:spPr>
-          <a:xfrm>
-            <a:off x="7678736" y="5883275"/>
-            <a:ext cx="2743200" cy="365125"/>
+            <a:off x="0" y="2669685"/>
+            <a:ext cx="4037012" cy="4188315"/>
           </a:xfrm>
           <a:prstGeom prst="rect">
             <a:avLst/>
           </a:prstGeom>
         </p:spPr>
-        <p:txBody>
-          <a:bodyPr vert="horz" lIns="91440" tIns="45720" rIns="91440" bIns="45720" rtlCol="0" anchor="ctr"/>
-          <a:lstStyle>
-            <a:lvl1pPr algn="r">
-              <a:defRPr sz="1000">
-                <a:solidFill>
-                  <a:schemeClr val="tx1">
-                    <a:lumMod val="95000"/>
-                  </a:schemeClr>
-                </a:solidFill>
-                <a:effectLst>
-                  <a:outerShdw blurRad="50800" dist="38100" dir="2700000" algn="tl" rotWithShape="0">
-                    <a:schemeClr val="bg1">
-                      <a:alpha val="43000"/>
-                    </a:schemeClr>
-                  </a:outerShdw>
-                </a:effectLst>
-              </a:defRPr>
-            </a:lvl1pPr>
-          </a:lstStyle>
-          <a:p>
-            <a:fld id="{1CC9F68D-F37D-4B3E-A6D2-8B5BDD64786C}" type="datetimeFigureOut">
-              <a:rPr lang="tr-TR" smtClean="0"/>
-              <a:t>6.05.2020</a:t>
-            </a:fld>
-            <a:endParaRPr lang="tr-TR"/>
-          </a:p>
-        </p:txBody>
-      </p:sp>
-      <p:sp>
-        <p:nvSpPr>
-          <p:cNvPr id="5" name="Footer Placeholder 4"/>
-          <p:cNvSpPr>
-            <a:spLocks noGrp="1"/>
-          </p:cNvSpPr>
-          <p:nvPr>
-            <p:ph type="ftr" sz="quarter" idx="3"/>
-          </p:nvPr>
-        </p:nvSpPr>
+      </p:pic>
+      <p:pic>
+        <p:nvPicPr>
+          <p:cNvPr id="7" name="Picture 6"/>
+          <p:cNvPicPr>
+            <a:picLocks noChangeAspect="1"/>
+          </p:cNvPicPr>
+          <p:nvPr/>
+        </p:nvPicPr>
+        <p:blipFill rotWithShape="1">
+          <a:blip r:embed="rId20">
+            <a:extLst>
+              <a:ext uri="{28A0092B-C50C-407E-A947-70E740481C1C}">
+                <a14:useLocalDpi xmlns:a14="http://schemas.microsoft.com/office/drawing/2010/main" val="0"/>
+              </a:ext>
+            </a:extLst>
+          </a:blip>
+          <a:srcRect l="35640"/>
+          <a:stretch/>
+        </p:blipFill>
         <p:spPr>
           <a:xfrm>
-            <a:off x="913795" y="5883275"/>
-            <a:ext cx="6672865" cy="365125"/>
+            <a:off x="0" y="2892347"/>
+            <a:ext cx="1522412" cy="2365453"/>
           </a:xfrm>
           <a:prstGeom prst="rect">
             <a:avLst/>
           </a:prstGeom>
         </p:spPr>
-        <p:txBody>
-          <a:bodyPr vert="horz" lIns="91440" tIns="45720" rIns="91440" bIns="45720" rtlCol="0" anchor="ctr"/>
-          <a:lstStyle>
-            <a:lvl1pPr algn="l">
-              <a:defRPr sz="1000">
-                <a:solidFill>
-                  <a:schemeClr val="tx1">
-                    <a:lumMod val="95000"/>
-                  </a:schemeClr>
-                </a:solidFill>
-                <a:effectLst>
-                  <a:outerShdw blurRad="50800" dist="38100" dir="2700000" algn="tl" rotWithShape="0">
-                    <a:schemeClr val="bg1">
-                      <a:alpha val="43000"/>
-                    </a:schemeClr>
-                  </a:outerShdw>
-                </a:effectLst>
-              </a:defRPr>
-            </a:lvl1pPr>
-          </a:lstStyle>
-          <a:p>
-            <a:endParaRPr lang="tr-TR"/>
-          </a:p>
-        </p:txBody>
-      </p:sp>
-      <p:sp>
-        <p:nvSpPr>
-          <p:cNvPr id="6" name="Slide Number Placeholder 5"/>
-          <p:cNvSpPr>
-            <a:spLocks noGrp="1"/>
-          </p:cNvSpPr>
-          <p:nvPr>
-            <p:ph type="sldNum" sz="quarter" idx="4"/>
-          </p:nvPr>
+      </p:pic>
+      <p:sp>
+        <p:nvSpPr>
+          <p:cNvPr id="16" name="Oval 15"/>
+          <p:cNvSpPr/>
+          <p:nvPr/>
         </p:nvSpPr>
         <p:spPr>
           <a:xfrm>
-            <a:off x="10514011" y="5883275"/>
-            <a:ext cx="753545" cy="365125"/>
+            <a:off x="8609012" y="1676400"/>
+            <a:ext cx="2819400" cy="2819400"/>
+          </a:xfrm>
+          <a:prstGeom prst="ellipse">
+            <a:avLst/>
+          </a:prstGeom>
+          <a:gradFill flip="none" rotWithShape="1">
+            <a:gsLst>
+              <a:gs pos="0">
+                <a:schemeClr val="bg2">
+                  <a:lumMod val="60000"/>
+                  <a:lumOff val="40000"/>
+                  <a:alpha val="7000"/>
+                </a:schemeClr>
+              </a:gs>
+              <a:gs pos="69000">
+                <a:schemeClr val="bg2">
+                  <a:lumMod val="60000"/>
+                  <a:lumOff val="40000"/>
+                  <a:alpha val="0"/>
+                </a:schemeClr>
+              </a:gs>
+              <a:gs pos="36000">
+                <a:schemeClr val="bg2">
+                  <a:lumMod val="60000"/>
+                  <a:lumOff val="40000"/>
+                  <a:alpha val="6000"/>
+                </a:schemeClr>
+              </a:gs>
+            </a:gsLst>
+            <a:path path="circle">
+              <a:fillToRect l="50000" t="50000" r="50000" b="50000"/>
+            </a:path>
+            <a:tileRect/>
+          </a:gradFill>
+          <a:ln>
+            <a:noFill/>
+          </a:ln>
+          <a:effectLst/>
+        </p:spPr>
+        <p:style>
+          <a:lnRef idx="1">
+            <a:schemeClr val="accent1"/>
+          </a:lnRef>
+          <a:fillRef idx="3">
+            <a:schemeClr val="accent1"/>
+          </a:fillRef>
+          <a:effectRef idx="2">
+            <a:schemeClr val="accent1"/>
+          </a:effectRef>
+          <a:fontRef idx="minor">
+            <a:schemeClr val="lt1"/>
+          </a:fontRef>
+        </p:style>
+      </p:sp>
+      <p:pic>
+        <p:nvPicPr>
+          <p:cNvPr id="9" name="Picture 8"/>
+          <p:cNvPicPr>
+            <a:picLocks noChangeAspect="1"/>
+          </p:cNvPicPr>
+          <p:nvPr/>
+        </p:nvPicPr>
+        <p:blipFill rotWithShape="1">
+          <a:blip r:embed="rId21">
+            <a:extLst>
+              <a:ext uri="{28A0092B-C50C-407E-A947-70E740481C1C}">
+                <a14:useLocalDpi xmlns:a14="http://schemas.microsoft.com/office/drawing/2010/main" val="0"/>
+              </a:ext>
+            </a:extLst>
+          </a:blip>
+          <a:srcRect t="28813"/>
+          <a:stretch/>
+        </p:blipFill>
+        <p:spPr>
+          <a:xfrm>
+            <a:off x="7999412" y="0"/>
+            <a:ext cx="1603387" cy="1141407"/>
           </a:xfrm>
           <a:prstGeom prst="rect">
             <a:avLst/>
           </a:prstGeom>
         </p:spPr>
-        <p:txBody>
-          <a:bodyPr vert="horz" lIns="91440" tIns="45720" rIns="91440" bIns="45720" rtlCol="0" anchor="ctr"/>
+      </p:pic>
+      <p:pic>
+        <p:nvPicPr>
+          <p:cNvPr id="10" name="Picture 9"/>
+          <p:cNvPicPr>
+            <a:picLocks noChangeAspect="1"/>
+          </p:cNvPicPr>
+          <p:nvPr/>
+        </p:nvPicPr>
+        <p:blipFill rotWithShape="1">
+          <a:blip r:embed="rId22">
+            <a:extLst>
+              <a:ext uri="{28A0092B-C50C-407E-A947-70E740481C1C}">
+                <a14:useLocalDpi xmlns:a14="http://schemas.microsoft.com/office/drawing/2010/main" val="0"/>
+              </a:ext>
+            </a:extLst>
+          </a:blip>
+          <a:srcRect b="23320"/>
+          <a:stretch/>
+        </p:blipFill>
+        <p:spPr>
+          <a:xfrm>
+            <a:off x="8605878" y="6096000"/>
+            <a:ext cx="993734" cy="762000"/>
+          </a:xfrm>
+          <a:prstGeom prst="rect">
+            <a:avLst/>
+          </a:prstGeom>
+        </p:spPr>
+      </p:pic>
+      <p:sp>
+        <p:nvSpPr>
+          <p:cNvPr id="14" name="Rectangle 13"/>
+          <p:cNvSpPr/>
+          <p:nvPr/>
+        </p:nvSpPr>
+        <p:spPr>
+          <a:xfrm>
+            <a:off x="10437812" y="0"/>
+            <a:ext cx="685800" cy="1143000"/>
+          </a:xfrm>
+          <a:prstGeom prst="rect">
+            <a:avLst/>
+          </a:prstGeom>
+          <a:solidFill>
+            <a:schemeClr val="accent1"/>
+          </a:solidFill>
+          <a:ln>
+            <a:noFill/>
+          </a:ln>
+        </p:spPr>
+        <p:style>
+          <a:lnRef idx="1">
+            <a:schemeClr val="accent1"/>
+          </a:lnRef>
+          <a:fillRef idx="3">
+            <a:schemeClr val="accent1"/>
+          </a:fillRef>
+          <a:effectRef idx="2">
+            <a:schemeClr val="accent1"/>
+          </a:effectRef>
+          <a:fontRef idx="minor">
+            <a:schemeClr val="lt1"/>
+          </a:fontRef>
+        </p:style>
+      </p:sp>
+      <p:sp>
+        <p:nvSpPr>
+          <p:cNvPr id="2" name="Title Placeholder 1"/>
+          <p:cNvSpPr>
+            <a:spLocks noGrp="1"/>
+          </p:cNvSpPr>
+          <p:nvPr>
+            <p:ph type="title"/>
+          </p:nvPr>
+        </p:nvSpPr>
+        <p:spPr>
+          <a:xfrm>
+            <a:off x="646111" y="452718"/>
+            <a:ext cx="9404723" cy="1400530"/>
+          </a:xfrm>
+          <a:prstGeom prst="rect">
+            <a:avLst/>
+          </a:prstGeom>
+        </p:spPr>
+        <p:txBody>
+          <a:bodyPr vert="horz" lIns="91440" tIns="45720" rIns="91440" bIns="45720" rtlCol="0" anchor="t">
+            <a:noAutofit/>
+          </a:bodyPr>
+          <a:lstStyle/>
+          <a:p>
+            <a:r>
+              <a:rPr lang="tr-TR" smtClean="0"/>
+              <a:t>Asıl başlık stili için tıklatın</a:t>
+            </a:r>
+            <a:endParaRPr lang="en-US" dirty="0"/>
+          </a:p>
+        </p:txBody>
+      </p:sp>
+      <p:sp>
+        <p:nvSpPr>
+          <p:cNvPr id="3" name="Text Placeholder 2"/>
+          <p:cNvSpPr>
+            <a:spLocks noGrp="1"/>
+          </p:cNvSpPr>
+          <p:nvPr>
+            <p:ph type="body" idx="1"/>
+          </p:nvPr>
+        </p:nvSpPr>
+        <p:spPr>
+          <a:xfrm>
+            <a:off x="1103312" y="2052918"/>
+            <a:ext cx="8946541" cy="4195481"/>
+          </a:xfrm>
+          <a:prstGeom prst="rect">
+            <a:avLst/>
+          </a:prstGeom>
+        </p:spPr>
+        <p:txBody>
+          <a:bodyPr vert="horz" lIns="91440" tIns="45720" rIns="91440" bIns="45720" rtlCol="0">
+            <a:normAutofit/>
+          </a:bodyPr>
+          <a:lstStyle/>
+          <a:p>
+            <a:pPr lvl="0"/>
+            <a:r>
+              <a:rPr lang="tr-TR" smtClean="0"/>
+              <a:t>Asıl metin stillerini düzenlemek için tıklatın</a:t>
+            </a:r>
+          </a:p>
+          <a:p>
+            <a:pPr lvl="1"/>
+            <a:r>
+              <a:rPr lang="tr-TR" smtClean="0"/>
+              <a:t>İkinci düzey</a:t>
+            </a:r>
+          </a:p>
+          <a:p>
+            <a:pPr lvl="2"/>
+            <a:r>
+              <a:rPr lang="tr-TR" smtClean="0"/>
+              <a:t>Üçüncü düzey</a:t>
+            </a:r>
+          </a:p>
+          <a:p>
+            <a:pPr lvl="3"/>
+            <a:r>
+              <a:rPr lang="tr-TR" smtClean="0"/>
+              <a:t>Dördüncü düzey</a:t>
+            </a:r>
+          </a:p>
+          <a:p>
+            <a:pPr lvl="4"/>
+            <a:r>
+              <a:rPr lang="tr-TR" smtClean="0"/>
+              <a:t>Beşinci düzey</a:t>
+            </a:r>
+            <a:endParaRPr lang="en-US" dirty="0"/>
+          </a:p>
+        </p:txBody>
+      </p:sp>
+      <p:sp>
+        <p:nvSpPr>
+          <p:cNvPr id="4" name="Date Placeholder 3"/>
+          <p:cNvSpPr>
+            <a:spLocks noGrp="1"/>
+          </p:cNvSpPr>
+          <p:nvPr>
+            <p:ph type="dt" sz="half" idx="2"/>
+          </p:nvPr>
+        </p:nvSpPr>
+        <p:spPr>
+          <a:xfrm rot="5400000">
+            <a:off x="10155639" y="1790701"/>
+            <a:ext cx="990599" cy="304799"/>
+          </a:xfrm>
+          <a:prstGeom prst="rect">
+            <a:avLst/>
+          </a:prstGeom>
+        </p:spPr>
+        <p:txBody>
+          <a:bodyPr vert="horz" lIns="91440" tIns="45720" rIns="91440" bIns="45720" rtlCol="0" anchor="t"/>
           <a:lstStyle>
-            <a:lvl1pPr algn="r">
-              <a:defRPr sz="1000">
+            <a:lvl1pPr algn="l">
+              <a:defRPr sz="1100" b="0" i="0">
                 <a:solidFill>
                   <a:schemeClr val="tx1">
-                    <a:lumMod val="95000"/>
+                    <a:tint val="75000"/>
+                    <a:alpha val="60000"/>
                   </a:schemeClr>
                 </a:solidFill>
-                <a:effectLst>
-                  <a:outerShdw blurRad="50800" dist="38100" dir="2700000" algn="tl" rotWithShape="0">
-                    <a:schemeClr val="bg1">
-                      <a:alpha val="43000"/>
-                    </a:schemeClr>
-                  </a:outerShdw>
-                </a:effectLst>
               </a:defRPr>
             </a:lvl1pPr>
           </a:lstStyle>
           <a:p>
+            <a:fld id="{1CC9F68D-F37D-4B3E-A6D2-8B5BDD64786C}" type="datetimeFigureOut">
+              <a:rPr lang="tr-TR" smtClean="0"/>
+              <a:t>6.05.2020</a:t>
+            </a:fld>
+            <a:endParaRPr lang="tr-TR"/>
+          </a:p>
+        </p:txBody>
+      </p:sp>
+      <p:sp>
+        <p:nvSpPr>
+          <p:cNvPr id="5" name="Footer Placeholder 4"/>
+          <p:cNvSpPr>
+            <a:spLocks noGrp="1"/>
+          </p:cNvSpPr>
+          <p:nvPr>
+            <p:ph type="ftr" sz="quarter" idx="3"/>
+          </p:nvPr>
+        </p:nvSpPr>
+        <p:spPr>
+          <a:xfrm rot="5400000">
+            <a:off x="8951573" y="3225297"/>
+            <a:ext cx="3859795" cy="304801"/>
+          </a:xfrm>
+          <a:prstGeom prst="rect">
+            <a:avLst/>
+          </a:prstGeom>
+        </p:spPr>
+        <p:txBody>
+          <a:bodyPr vert="horz" lIns="91440" tIns="45720" rIns="91440" bIns="45720" rtlCol="0" anchor="b"/>
+          <a:lstStyle>
+            <a:lvl1pPr algn="l">
+              <a:defRPr sz="1100" b="0" i="0">
+                <a:solidFill>
+                  <a:schemeClr val="tx1">
+                    <a:tint val="75000"/>
+                    <a:alpha val="60000"/>
+                  </a:schemeClr>
+                </a:solidFill>
+              </a:defRPr>
+            </a:lvl1pPr>
+          </a:lstStyle>
+          <a:p>
+            <a:endParaRPr lang="tr-TR"/>
+          </a:p>
+        </p:txBody>
+      </p:sp>
+      <p:sp>
+        <p:nvSpPr>
+          <p:cNvPr id="6" name="Slide Number Placeholder 5"/>
+          <p:cNvSpPr>
+            <a:spLocks noGrp="1"/>
+          </p:cNvSpPr>
+          <p:nvPr>
+            <p:ph type="sldNum" sz="quarter" idx="4"/>
+          </p:nvPr>
+        </p:nvSpPr>
+        <p:spPr bwMode="gray">
+          <a:xfrm>
+            <a:off x="10352540" y="295729"/>
+            <a:ext cx="838199" cy="767687"/>
+          </a:xfrm>
+          <a:prstGeom prst="rect">
+            <a:avLst/>
+          </a:prstGeom>
+        </p:spPr>
+        <p:txBody>
+          <a:bodyPr vert="horz" lIns="91440" tIns="45720" rIns="91440" bIns="45720" rtlCol="0" anchor="b"/>
+          <a:lstStyle>
+            <a:lvl1pPr algn="ctr">
+              <a:defRPr sz="2800" b="0" i="0">
+                <a:solidFill>
+                  <a:schemeClr val="tx1">
+                    <a:tint val="75000"/>
+                  </a:schemeClr>
+                </a:solidFill>
+              </a:defRPr>
+            </a:lvl1pPr>
+          </a:lstStyle>
+          <a:p>
             <a:fld id="{1428C653-488F-4BA9-841F-6B49A8AFAA27}" type="slidenum">
               <a:rPr lang="tr-TR" smtClean="0"/>
               <a:t>‹#›</a:t>
@@ -5442,60 +5662,44 @@
     </p:spTree>
     <p:extLst>
       <p:ext uri="{BB962C8B-B14F-4D97-AF65-F5344CB8AC3E}">
-        <p14:creationId xmlns:p14="http://schemas.microsoft.com/office/powerpoint/2010/main" val="916764383"/>
+        <p14:creationId xmlns:p14="http://schemas.microsoft.com/office/powerpoint/2010/main" val="62356136"/>
       </p:ext>
     </p:extLst>
   </p:cSld>
   <p:clrMap bg1="dk1" tx1="lt1" bg2="dk2" tx2="lt2" accent1="accent1" accent2="accent2" accent3="accent3" accent4="accent4" accent5="accent5" accent6="accent6" hlink="hlink" folHlink="folHlink"/>
   <p:sldLayoutIdLst>
-    <p:sldLayoutId id="2147483679" r:id="rId1"/>
-    <p:sldLayoutId id="2147483680" r:id="rId2"/>
-    <p:sldLayoutId id="2147483681" r:id="rId3"/>
-    <p:sldLayoutId id="2147483682" r:id="rId4"/>
-    <p:sldLayoutId id="2147483683" r:id="rId5"/>
-    <p:sldLayoutId id="2147483684" r:id="rId6"/>
-    <p:sldLayoutId id="2147483685" r:id="rId7"/>
-    <p:sldLayoutId id="2147483686" r:id="rId8"/>
-    <p:sldLayoutId id="2147483687" r:id="rId9"/>
-    <p:sldLayoutId id="2147483688" r:id="rId10"/>
-    <p:sldLayoutId id="2147483689" r:id="rId11"/>
-    <p:sldLayoutId id="2147483690" r:id="rId12"/>
-    <p:sldLayoutId id="2147483691" r:id="rId13"/>
-    <p:sldLayoutId id="2147483692" r:id="rId14"/>
-    <p:sldLayoutId id="2147483693" r:id="rId15"/>
-    <p:sldLayoutId id="2147483694" r:id="rId16"/>
-    <p:sldLayoutId id="2147483695" r:id="rId17"/>
+    <p:sldLayoutId id="2147483715" r:id="rId1"/>
+    <p:sldLayoutId id="2147483716" r:id="rId2"/>
+    <p:sldLayoutId id="2147483717" r:id="rId3"/>
+    <p:sldLayoutId id="2147483718" r:id="rId4"/>
+    <p:sldLayoutId id="2147483719" r:id="rId5"/>
+    <p:sldLayoutId id="2147483720" r:id="rId6"/>
+    <p:sldLayoutId id="2147483721" r:id="rId7"/>
+    <p:sldLayoutId id="2147483722" r:id="rId8"/>
+    <p:sldLayoutId id="2147483723" r:id="rId9"/>
+    <p:sldLayoutId id="2147483724" r:id="rId10"/>
+    <p:sldLayoutId id="2147483725" r:id="rId11"/>
+    <p:sldLayoutId id="2147483726" r:id="rId12"/>
+    <p:sldLayoutId id="2147483727" r:id="rId13"/>
+    <p:sldLayoutId id="2147483728" r:id="rId14"/>
+    <p:sldLayoutId id="2147483729" r:id="rId15"/>
+    <p:sldLayoutId id="2147483730" r:id="rId16"/>
+    <p:sldLayoutId id="2147483731" r:id="rId17"/>
   </p:sldLayoutIdLst>
   <p:txStyles>
     <p:titleStyle>
-      <a:lvl1pPr algn="ctr" defTabSz="457200" rtl="0" eaLnBrk="1" latinLnBrk="0" hangingPunct="1">
+      <a:lvl1pPr algn="l" defTabSz="457200" rtl="0" eaLnBrk="1" latinLnBrk="0" hangingPunct="1">
         <a:spcBef>
           <a:spcPct val="0"/>
         </a:spcBef>
         <a:buNone/>
-        <a:defRPr sz="4000" kern="1200">
-          <a:ln>
-            <a:solidFill>
-              <a:schemeClr val="bg1">
-                <a:lumMod val="75000"/>
-                <a:lumOff val="25000"/>
-                <a:alpha val="10000"/>
-              </a:schemeClr>
-            </a:solidFill>
-          </a:ln>
+        <a:defRPr sz="4200" b="0" i="0" kern="1200">
           <a:solidFill>
             <a:schemeClr val="tx2"/>
           </a:solidFill>
-          <a:effectLst>
-            <a:outerShdw blurRad="9525" dist="25400" dir="14640000" algn="tl" rotWithShape="0">
-              <a:schemeClr val="bg1">
-                <a:alpha val="30000"/>
-              </a:schemeClr>
-            </a:outerShdw>
-          </a:effectLst>
           <a:latin typeface="+mj-lt"/>
           <a:ea typeface="+mj-ea"/>
-          <a:cs typeface="Trebuchet MS"/>
+          <a:cs typeface="+mj-cs"/>
         </a:defRPr>
       </a:lvl1pPr>
       <a:lvl2pPr eaLnBrk="1" hangingPunct="1">
@@ -5556,346 +5760,229 @@
       </a:lvl9pPr>
     </p:titleStyle>
     <p:bodyStyle>
-      <a:lvl1pPr marL="342900" indent="-306000" algn="l" defTabSz="457200" rtl="0" eaLnBrk="1" latinLnBrk="0" hangingPunct="1">
+      <a:lvl1pPr marL="342900" indent="-342900" algn="l" defTabSz="457200" rtl="0" eaLnBrk="1" latinLnBrk="0" hangingPunct="1">
         <a:spcBef>
-          <a:spcPct val="20000"/>
+          <a:spcPts val="1000"/>
         </a:spcBef>
         <a:spcAft>
-          <a:spcPts val="600"/>
+          <a:spcPts val="0"/>
         </a:spcAft>
         <a:buClr>
-          <a:schemeClr val="tx2"/>
+          <a:schemeClr val="bg2">
+            <a:lumMod val="40000"/>
+            <a:lumOff val="60000"/>
+          </a:schemeClr>
         </a:buClr>
-        <a:buSzPct val="70000"/>
-        <a:buFont typeface="Wingdings 2" charset="2"/>
-        <a:buChar char=""/>
-        <a:defRPr sz="2000" kern="1200">
-          <a:ln>
-            <a:solidFill>
-              <a:schemeClr val="bg1">
-                <a:lumMod val="75000"/>
-                <a:lumOff val="25000"/>
-                <a:alpha val="10000"/>
-              </a:schemeClr>
-            </a:solidFill>
-          </a:ln>
+        <a:buSzPct val="80000"/>
+        <a:buFont typeface="Wingdings 3" charset="2"/>
+        <a:buChar char=""/>
+        <a:defRPr sz="2000" b="0" i="0" kern="1200">
           <a:solidFill>
-            <a:schemeClr val="tx2"/>
+            <a:schemeClr val="tx1"/>
           </a:solidFill>
-          <a:effectLst>
-            <a:outerShdw blurRad="9525" dist="25400" dir="14640000" algn="tl" rotWithShape="0">
-              <a:schemeClr val="bg1">
-                <a:alpha val="30000"/>
-              </a:schemeClr>
-            </a:outerShdw>
-          </a:effectLst>
-          <a:latin typeface="+mn-lt"/>
-          <a:ea typeface="+mn-ea"/>
-          <a:cs typeface="+mn-cs"/>
+          <a:latin typeface="+mj-lt"/>
+          <a:ea typeface="+mj-ea"/>
+          <a:cs typeface="+mj-cs"/>
         </a:defRPr>
       </a:lvl1pPr>
-      <a:lvl2pPr marL="720000" indent="-270000" algn="l" defTabSz="457200" rtl="0" eaLnBrk="1" latinLnBrk="0" hangingPunct="1">
+      <a:lvl2pPr marL="742950" indent="-285750" algn="l" defTabSz="457200" rtl="0" eaLnBrk="1" latinLnBrk="0" hangingPunct="1">
         <a:spcBef>
-          <a:spcPct val="20000"/>
+          <a:spcPts val="1000"/>
         </a:spcBef>
         <a:spcAft>
-          <a:spcPts val="600"/>
+          <a:spcPts val="0"/>
         </a:spcAft>
         <a:buClr>
-          <a:schemeClr val="tx2"/>
+          <a:schemeClr val="bg2">
+            <a:lumMod val="40000"/>
+            <a:lumOff val="60000"/>
+          </a:schemeClr>
         </a:buClr>
-        <a:buSzPct val="70000"/>
-        <a:buFont typeface="Wingdings 2" charset="2"/>
-        <a:buChar char=""/>
-        <a:defRPr sz="1800" kern="1200">
-          <a:ln>
-            <a:solidFill>
-              <a:schemeClr val="bg1">
-                <a:lumMod val="75000"/>
-                <a:lumOff val="25000"/>
-                <a:alpha val="10000"/>
-              </a:schemeClr>
-            </a:solidFill>
-          </a:ln>
+        <a:buSzPct val="80000"/>
+        <a:buFont typeface="Wingdings 3" charset="2"/>
+        <a:buChar char=""/>
+        <a:defRPr sz="1800" b="0" i="0" kern="1200">
           <a:solidFill>
-            <a:schemeClr val="tx2"/>
+            <a:schemeClr val="tx1"/>
           </a:solidFill>
-          <a:effectLst>
-            <a:outerShdw blurRad="9525" dist="25400" dir="14640000" algn="tl" rotWithShape="0">
-              <a:schemeClr val="bg1">
-                <a:alpha val="30000"/>
-              </a:schemeClr>
-            </a:outerShdw>
-          </a:effectLst>
-          <a:latin typeface="+mn-lt"/>
-          <a:ea typeface="+mn-ea"/>
-          <a:cs typeface="+mn-cs"/>
+          <a:latin typeface="+mj-lt"/>
+          <a:ea typeface="+mj-ea"/>
+          <a:cs typeface="+mj-cs"/>
         </a:defRPr>
       </a:lvl2pPr>
-      <a:lvl3pPr marL="1026000" indent="-216000" algn="l" defTabSz="457200" rtl="0" eaLnBrk="1" latinLnBrk="0" hangingPunct="1">
+      <a:lvl3pPr marL="1143000" indent="-228600" algn="l" defTabSz="457200" rtl="0" eaLnBrk="1" latinLnBrk="0" hangingPunct="1">
         <a:spcBef>
-          <a:spcPct val="20000"/>
+          <a:spcPts val="1000"/>
         </a:spcBef>
         <a:spcAft>
-          <a:spcPts val="600"/>
+          <a:spcPts val="0"/>
         </a:spcAft>
         <a:buClr>
-          <a:schemeClr val="tx2"/>
+          <a:schemeClr val="bg2">
+            <a:lumMod val="40000"/>
+            <a:lumOff val="60000"/>
+          </a:schemeClr>
         </a:buClr>
-        <a:buSzPct val="70000"/>
-        <a:buFont typeface="Wingdings 2" charset="2"/>
-        <a:buChar char=""/>
-        <a:defRPr sz="1600" kern="1200">
-          <a:ln>
-            <a:solidFill>
-              <a:schemeClr val="bg1">
-                <a:lumMod val="75000"/>
-                <a:lumOff val="25000"/>
-                <a:alpha val="10000"/>
-              </a:schemeClr>
-            </a:solidFill>
-          </a:ln>
+        <a:buSzPct val="80000"/>
+        <a:buFont typeface="Wingdings 3" charset="2"/>
+        <a:buChar char=""/>
+        <a:defRPr sz="1600" b="0" i="0" kern="1200">
           <a:solidFill>
-            <a:schemeClr val="tx2"/>
+            <a:schemeClr val="tx1"/>
           </a:solidFill>
-          <a:effectLst>
-            <a:outerShdw blurRad="9525" dist="25400" dir="14640000" algn="tl" rotWithShape="0">
-              <a:schemeClr val="bg1">
-                <a:alpha val="30000"/>
-              </a:schemeClr>
-            </a:outerShdw>
-          </a:effectLst>
-          <a:latin typeface="+mn-lt"/>
-          <a:ea typeface="+mn-ea"/>
-          <a:cs typeface="+mn-cs"/>
+          <a:latin typeface="+mj-lt"/>
+          <a:ea typeface="+mj-ea"/>
+          <a:cs typeface="+mj-cs"/>
         </a:defRPr>
       </a:lvl3pPr>
-      <a:lvl4pPr marL="1386000" indent="-216000" algn="l" defTabSz="457200" rtl="0" eaLnBrk="1" latinLnBrk="0" hangingPunct="1">
+      <a:lvl4pPr marL="1600200" indent="-228600" algn="l" defTabSz="457200" rtl="0" eaLnBrk="1" latinLnBrk="0" hangingPunct="1">
         <a:spcBef>
-          <a:spcPct val="20000"/>
+          <a:spcPts val="1000"/>
         </a:spcBef>
         <a:spcAft>
-          <a:spcPts val="600"/>
+          <a:spcPts val="0"/>
         </a:spcAft>
         <a:buClr>
-          <a:schemeClr val="tx2"/>
+          <a:schemeClr val="bg2">
+            <a:lumMod val="40000"/>
+            <a:lumOff val="60000"/>
+          </a:schemeClr>
         </a:buClr>
-        <a:buSzPct val="70000"/>
-        <a:buFont typeface="Wingdings 2" charset="2"/>
-        <a:buChar char=""/>
-        <a:defRPr sz="1400" kern="1200">
-          <a:ln>
-            <a:solidFill>
-              <a:schemeClr val="bg1">
-                <a:lumMod val="75000"/>
-                <a:lumOff val="25000"/>
-                <a:alpha val="10000"/>
-              </a:schemeClr>
-            </a:solidFill>
-          </a:ln>
+        <a:buSzPct val="80000"/>
+        <a:buFont typeface="Wingdings 3" charset="2"/>
+        <a:buChar char=""/>
+        <a:defRPr sz="1400" b="0" i="0" kern="1200">
           <a:solidFill>
-            <a:schemeClr val="tx2"/>
+            <a:schemeClr val="tx1"/>
           </a:solidFill>
-          <a:effectLst>
-            <a:outerShdw blurRad="9525" dist="25400" dir="14640000" algn="tl" rotWithShape="0">
-              <a:schemeClr val="bg1">
-                <a:alpha val="30000"/>
-              </a:schemeClr>
-            </a:outerShdw>
-          </a:effectLst>
-          <a:latin typeface="+mn-lt"/>
-          <a:ea typeface="+mn-ea"/>
-          <a:cs typeface="+mn-cs"/>
+          <a:latin typeface="+mj-lt"/>
+          <a:ea typeface="+mj-ea"/>
+          <a:cs typeface="+mj-cs"/>
         </a:defRPr>
       </a:lvl4pPr>
-      <a:lvl5pPr marL="1674000" indent="-216000" algn="l" defTabSz="457200" rtl="0" eaLnBrk="1" latinLnBrk="0" hangingPunct="1">
+      <a:lvl5pPr marL="2057400" indent="-228600" algn="l" defTabSz="457200" rtl="0" eaLnBrk="1" latinLnBrk="0" hangingPunct="1">
         <a:spcBef>
-          <a:spcPct val="20000"/>
+          <a:spcPts val="1000"/>
         </a:spcBef>
         <a:spcAft>
-          <a:spcPts val="600"/>
+          <a:spcPts val="0"/>
         </a:spcAft>
         <a:buClr>
-          <a:schemeClr val="tx2"/>
+          <a:schemeClr val="bg2">
+            <a:lumMod val="40000"/>
+            <a:lumOff val="60000"/>
+          </a:schemeClr>
         </a:buClr>
-        <a:buSzPct val="70000"/>
-        <a:buFont typeface="Wingdings 2" charset="2"/>
-        <a:buChar char=""/>
-        <a:defRPr sz="1400" kern="1200">
-          <a:ln>
-            <a:solidFill>
-              <a:schemeClr val="bg1">
-                <a:lumMod val="75000"/>
-                <a:lumOff val="25000"/>
-                <a:alpha val="10000"/>
-              </a:schemeClr>
-            </a:solidFill>
-          </a:ln>
+        <a:buSzPct val="80000"/>
+        <a:buFont typeface="Wingdings 3" charset="2"/>
+        <a:buChar char=""/>
+        <a:defRPr sz="1400" b="0" i="0" kern="1200">
           <a:solidFill>
-            <a:schemeClr val="tx2"/>
+            <a:schemeClr val="tx1"/>
           </a:solidFill>
-          <a:effectLst>
-            <a:outerShdw blurRad="9525" dist="25400" dir="14640000" algn="tl" rotWithShape="0">
-              <a:schemeClr val="bg1">
-                <a:alpha val="30000"/>
-              </a:schemeClr>
-            </a:outerShdw>
-          </a:effectLst>
-          <a:latin typeface="+mn-lt"/>
-          <a:ea typeface="+mn-ea"/>
-          <a:cs typeface="+mn-cs"/>
+          <a:latin typeface="+mj-lt"/>
+          <a:ea typeface="+mj-ea"/>
+          <a:cs typeface="+mj-cs"/>
         </a:defRPr>
       </a:lvl5pPr>
-      <a:lvl6pPr marL="2014600" indent="-228600" algn="l" defTabSz="457200" rtl="0" eaLnBrk="1" latinLnBrk="0" hangingPunct="1">
+      <a:lvl6pPr marL="2506000" indent="-228600" algn="l" defTabSz="457200" rtl="0" eaLnBrk="1" latinLnBrk="0" hangingPunct="1">
         <a:spcBef>
-          <a:spcPct val="20000"/>
+          <a:spcPts val="1000"/>
         </a:spcBef>
         <a:spcAft>
-          <a:spcPts val="600"/>
+          <a:spcPts val="0"/>
         </a:spcAft>
         <a:buClr>
-          <a:schemeClr val="tx2"/>
+          <a:schemeClr val="bg2">
+            <a:lumMod val="40000"/>
+            <a:lumOff val="60000"/>
+          </a:schemeClr>
         </a:buClr>
-        <a:buSzPct val="70000"/>
-        <a:buFont typeface="Wingdings 2" charset="2"/>
-        <a:buChar char=""/>
-        <a:defRPr sz="1400" kern="1200">
-          <a:ln>
-            <a:solidFill>
-              <a:schemeClr val="bg1">
-                <a:lumMod val="75000"/>
-                <a:lumOff val="25000"/>
-                <a:alpha val="10000"/>
-              </a:schemeClr>
-            </a:solidFill>
-          </a:ln>
+        <a:buSzPct val="80000"/>
+        <a:buFont typeface="Wingdings 3" charset="2"/>
+        <a:buChar char=""/>
+        <a:defRPr sz="1400" b="0" i="0" kern="1200">
           <a:solidFill>
-            <a:schemeClr val="tx2"/>
+            <a:schemeClr val="tx1"/>
           </a:solidFill>
-          <a:effectLst>
-            <a:outerShdw blurRad="9525" dist="25400" dir="14640000" algn="tl" rotWithShape="0">
-              <a:schemeClr val="bg1">
-                <a:alpha val="30000"/>
-              </a:schemeClr>
-            </a:outerShdw>
-          </a:effectLst>
-          <a:latin typeface="+mn-lt"/>
-          <a:ea typeface="+mn-ea"/>
-          <a:cs typeface="+mn-cs"/>
+          <a:latin typeface="+mj-lt"/>
+          <a:ea typeface="+mj-ea"/>
+          <a:cs typeface="+mj-cs"/>
         </a:defRPr>
       </a:lvl6pPr>
-      <a:lvl7pPr marL="2401800" indent="-228600" algn="l" defTabSz="457200" rtl="0" eaLnBrk="1" latinLnBrk="0" hangingPunct="1">
+      <a:lvl7pPr marL="2971800" indent="-228600" algn="l" defTabSz="457200" rtl="0" eaLnBrk="1" latinLnBrk="0" hangingPunct="1">
         <a:spcBef>
-          <a:spcPct val="20000"/>
+          <a:spcPts val="1000"/>
         </a:spcBef>
         <a:spcAft>
-          <a:spcPts val="600"/>
+          <a:spcPts val="0"/>
         </a:spcAft>
         <a:buClr>
-          <a:schemeClr val="tx2"/>
+          <a:schemeClr val="bg2">
+            <a:lumMod val="40000"/>
+            <a:lumOff val="60000"/>
+          </a:schemeClr>
         </a:buClr>
-        <a:buSzPct val="70000"/>
-        <a:buFont typeface="Wingdings 2" charset="2"/>
-        <a:buChar char=""/>
-        <a:defRPr sz="1400" kern="1200">
-          <a:ln>
-            <a:solidFill>
-              <a:schemeClr val="bg1">
-                <a:lumMod val="75000"/>
-                <a:lumOff val="25000"/>
-                <a:alpha val="10000"/>
-              </a:schemeClr>
-            </a:solidFill>
-          </a:ln>
+        <a:buSzPct val="80000"/>
+        <a:buFont typeface="Wingdings 3" charset="2"/>
+        <a:buChar char=""/>
+        <a:defRPr sz="1400" b="0" i="0" kern="1200">
           <a:solidFill>
-            <a:schemeClr val="tx2"/>
+            <a:schemeClr val="tx1"/>
           </a:solidFill>
-          <a:effectLst>
-            <a:outerShdw blurRad="9525" dist="25400" dir="14640000" algn="tl" rotWithShape="0">
-              <a:schemeClr val="bg1">
-                <a:alpha val="30000"/>
-              </a:schemeClr>
-            </a:outerShdw>
-          </a:effectLst>
-          <a:latin typeface="+mn-lt"/>
-          <a:ea typeface="+mn-ea"/>
-          <a:cs typeface="+mn-cs"/>
+          <a:latin typeface="+mj-lt"/>
+          <a:ea typeface="+mj-ea"/>
+          <a:cs typeface="+mj-cs"/>
         </a:defRPr>
       </a:lvl7pPr>
-      <a:lvl8pPr marL="2789000" indent="-228600" algn="l" defTabSz="457200" rtl="0" eaLnBrk="1" latinLnBrk="0" hangingPunct="1">
+      <a:lvl8pPr marL="3429000" indent="-228600" algn="l" defTabSz="457200" rtl="0" eaLnBrk="1" latinLnBrk="0" hangingPunct="1">
         <a:spcBef>
-          <a:spcPct val="20000"/>
+          <a:spcPts val="1000"/>
         </a:spcBef>
         <a:spcAft>
-          <a:spcPts val="600"/>
+          <a:spcPts val="0"/>
         </a:spcAft>
         <a:buClr>
-          <a:schemeClr val="tx2"/>
+          <a:schemeClr val="bg2">
+            <a:lumMod val="40000"/>
+            <a:lumOff val="60000"/>
+          </a:schemeClr>
         </a:buClr>
-        <a:buSzPct val="70000"/>
-        <a:buFont typeface="Wingdings 2" charset="2"/>
-        <a:buChar char=""/>
-        <a:defRPr sz="1400" kern="1200">
-          <a:ln>
-            <a:solidFill>
-              <a:schemeClr val="bg1">
-                <a:lumMod val="75000"/>
-                <a:lumOff val="25000"/>
-                <a:alpha val="10000"/>
-              </a:schemeClr>
-            </a:solidFill>
-          </a:ln>
+        <a:buSzPct val="80000"/>
+        <a:buFont typeface="Wingdings 3" charset="2"/>
+        <a:buChar char=""/>
+        <a:defRPr sz="1400" b="0" i="0" kern="1200">
           <a:solidFill>
-            <a:schemeClr val="tx2"/>
+            <a:schemeClr val="tx1"/>
           </a:solidFill>
-          <a:effectLst>
-            <a:outerShdw blurRad="9525" dist="25400" dir="14640000" algn="tl" rotWithShape="0">
-              <a:schemeClr val="bg1">
-                <a:alpha val="30000"/>
-              </a:schemeClr>
-            </a:outerShdw>
-          </a:effectLst>
-          <a:latin typeface="+mn-lt"/>
-          <a:ea typeface="+mn-ea"/>
-          <a:cs typeface="+mn-cs"/>
+          <a:latin typeface="+mj-lt"/>
+          <a:ea typeface="+mj-ea"/>
+          <a:cs typeface="+mj-cs"/>
         </a:defRPr>
       </a:lvl8pPr>
-      <a:lvl9pPr marL="3106200" indent="-228600" algn="l" defTabSz="457200" rtl="0" eaLnBrk="1" latinLnBrk="0" hangingPunct="1">
+      <a:lvl9pPr marL="3886200" indent="-228600" algn="l" defTabSz="457200" rtl="0" eaLnBrk="1" latinLnBrk="0" hangingPunct="1">
         <a:spcBef>
-          <a:spcPct val="20000"/>
+          <a:spcPts val="1000"/>
         </a:spcBef>
         <a:spcAft>
-          <a:spcPts val="600"/>
+          <a:spcPts val="0"/>
         </a:spcAft>
         <a:buClr>
-          <a:schemeClr val="tx2"/>
+          <a:schemeClr val="bg2">
+            <a:lumMod val="40000"/>
+            <a:lumOff val="60000"/>
+          </a:schemeClr>
         </a:buClr>
-        <a:buSzPct val="70000"/>
-        <a:buFont typeface="Wingdings 2" charset="2"/>
-        <a:buChar char=""/>
-        <a:defRPr sz="1400" kern="1200">
-          <a:ln>
-            <a:solidFill>
-              <a:schemeClr val="bg1">
-                <a:lumMod val="75000"/>
-                <a:lumOff val="25000"/>
-                <a:alpha val="10000"/>
-              </a:schemeClr>
-            </a:solidFill>
-          </a:ln>
+        <a:buSzPct val="80000"/>
+        <a:buFont typeface="Wingdings 3" charset="2"/>
+        <a:buChar char=""/>
+        <a:defRPr sz="1400" b="0" i="0" kern="1200">
           <a:solidFill>
-            <a:schemeClr val="tx2"/>
+            <a:schemeClr val="tx1"/>
           </a:solidFill>
-          <a:effectLst>
-            <a:outerShdw blurRad="9525" dist="25400" dir="14640000" algn="tl" rotWithShape="0">
-              <a:schemeClr val="bg1">
-                <a:alpha val="30000"/>
-              </a:schemeClr>
-            </a:outerShdw>
-          </a:effectLst>
-          <a:latin typeface="+mn-lt"/>
-          <a:ea typeface="+mn-ea"/>
-          <a:cs typeface="+mn-cs"/>
+          <a:latin typeface="+mj-lt"/>
+          <a:ea typeface="+mj-ea"/>
+          <a:cs typeface="+mj-cs"/>
         </a:defRPr>
       </a:lvl9pPr>
     </p:bodyStyle>
@@ -6087,6 +6174,380 @@
 </p:sld>
 </file>
 
+<file path=ppt/slides/slide10.xml><?xml version="1.0" encoding="utf-8"?>
+<p:sld xmlns:a="http://schemas.openxmlformats.org/drawingml/2006/main" xmlns:r="http://schemas.openxmlformats.org/officeDocument/2006/relationships" xmlns:p="http://schemas.openxmlformats.org/presentationml/2006/main">
+  <p:cSld>
+    <p:spTree>
+      <p:nvGrpSpPr>
+        <p:cNvPr id="1" name=""/>
+        <p:cNvGrpSpPr/>
+        <p:nvPr/>
+      </p:nvGrpSpPr>
+      <p:grpSpPr>
+        <a:xfrm>
+          <a:off x="0" y="0"/>
+          <a:ext cx="0" cy="0"/>
+          <a:chOff x="0" y="0"/>
+          <a:chExt cx="0" cy="0"/>
+        </a:xfrm>
+      </p:grpSpPr>
+      <p:sp>
+        <p:nvSpPr>
+          <p:cNvPr id="2" name="Unvan 1"/>
+          <p:cNvSpPr>
+            <a:spLocks noGrp="1"/>
+          </p:cNvSpPr>
+          <p:nvPr>
+            <p:ph type="title"/>
+          </p:nvPr>
+        </p:nvSpPr>
+        <p:spPr/>
+        <p:txBody>
+          <a:bodyPr>
+            <a:normAutofit/>
+          </a:bodyPr>
+          <a:lstStyle/>
+          <a:p>
+            <a:r>
+              <a:rPr lang="tr-TR" dirty="0"/>
+              <a:t>Google </a:t>
+            </a:r>
+            <a:r>
+              <a:rPr lang="tr-TR" dirty="0" err="1"/>
+              <a:t>Colaboratory</a:t>
+            </a:r>
+            <a:r>
+              <a:rPr lang="tr-TR" dirty="0"/>
+              <a:t> Nedir ve Nasıl Kullanılır?</a:t>
+            </a:r>
+          </a:p>
+        </p:txBody>
+      </p:sp>
+      <p:sp>
+        <p:nvSpPr>
+          <p:cNvPr id="3" name="İçerik Yer Tutucusu 2"/>
+          <p:cNvSpPr>
+            <a:spLocks noGrp="1"/>
+          </p:cNvSpPr>
+          <p:nvPr>
+            <p:ph idx="1"/>
+          </p:nvPr>
+        </p:nvSpPr>
+        <p:spPr/>
+        <p:txBody>
+          <a:bodyPr>
+            <a:normAutofit/>
+          </a:bodyPr>
+          <a:lstStyle/>
+          <a:p>
+            <a:pPr marL="494100" indent="-457200">
+              <a:buFont typeface="+mj-lt"/>
+              <a:buAutoNum type="arabicPeriod"/>
+            </a:pPr>
+            <a:r>
+              <a:rPr lang="tr-TR" dirty="0"/>
+              <a:t>Google </a:t>
+            </a:r>
+            <a:r>
+              <a:rPr lang="tr-TR" dirty="0" err="1"/>
+              <a:t>Colab</a:t>
+            </a:r>
+            <a:r>
+              <a:rPr lang="tr-TR" dirty="0"/>
+              <a:t> kullanmak için öncelikle Drive içerisinde </a:t>
+            </a:r>
+            <a:r>
+              <a:rPr lang="tr-TR" dirty="0" err="1"/>
+              <a:t>app</a:t>
+            </a:r>
+            <a:r>
+              <a:rPr lang="tr-TR" dirty="0"/>
+              <a:t> adında bir klasör oluştururuz.</a:t>
+            </a:r>
+          </a:p>
+          <a:p>
+            <a:pPr marL="494100" indent="-457200">
+              <a:buFont typeface="+mj-lt"/>
+              <a:buAutoNum type="arabicPeriod"/>
+            </a:pPr>
+            <a:r>
+              <a:rPr lang="tr-TR" dirty="0" smtClean="0"/>
+              <a:t>Klasör içine girerek, Sağ Klik &gt; Daha Fazla &gt; </a:t>
+            </a:r>
+            <a:r>
+              <a:rPr lang="tr-TR" dirty="0" err="1" smtClean="0"/>
+              <a:t>Colaboratory</a:t>
+            </a:r>
+            <a:r>
+              <a:rPr lang="tr-TR" dirty="0" smtClean="0"/>
+              <a:t> seçilir. Eğer seçenek yoksa daha fazla uygulama alanından indirilir.</a:t>
+            </a:r>
+          </a:p>
+          <a:p>
+            <a:pPr marL="494100" indent="-457200">
+              <a:buFont typeface="+mj-lt"/>
+              <a:buAutoNum type="arabicPeriod"/>
+            </a:pPr>
+            <a:r>
+              <a:rPr lang="tr-TR" dirty="0" smtClean="0"/>
+              <a:t>Projeye bir isim verilir. </a:t>
+            </a:r>
+          </a:p>
+          <a:p>
+            <a:pPr marL="494100" indent="-457200">
+              <a:buFont typeface="+mj-lt"/>
+              <a:buAutoNum type="arabicPeriod"/>
+            </a:pPr>
+            <a:r>
+              <a:rPr lang="tr-TR" dirty="0" smtClean="0"/>
+              <a:t>Ücretsiz GPU ayarlamak için ise </a:t>
+            </a:r>
+            <a:r>
+              <a:rPr lang="tr-TR" dirty="0" err="1" smtClean="0"/>
+              <a:t>Edit</a:t>
+            </a:r>
+            <a:r>
+              <a:rPr lang="tr-TR" dirty="0" smtClean="0"/>
+              <a:t> &gt; Notebook </a:t>
+            </a:r>
+            <a:r>
+              <a:rPr lang="tr-TR" dirty="0" err="1" smtClean="0"/>
+              <a:t>Settings</a:t>
+            </a:r>
+            <a:r>
+              <a:rPr lang="tr-TR" dirty="0" smtClean="0"/>
+              <a:t> ya da Runtime &gt; </a:t>
+            </a:r>
+            <a:r>
+              <a:rPr lang="tr-TR" dirty="0" err="1" smtClean="0"/>
+              <a:t>Change</a:t>
+            </a:r>
+            <a:r>
+              <a:rPr lang="tr-TR" dirty="0" smtClean="0"/>
+              <a:t> </a:t>
+            </a:r>
+            <a:r>
+              <a:rPr lang="tr-TR" dirty="0" err="1" smtClean="0"/>
+              <a:t>runtime</a:t>
+            </a:r>
+            <a:r>
+              <a:rPr lang="tr-TR" dirty="0" smtClean="0"/>
+              <a:t> </a:t>
+            </a:r>
+            <a:r>
+              <a:rPr lang="tr-TR" dirty="0" err="1" smtClean="0"/>
+              <a:t>Type</a:t>
+            </a:r>
+            <a:r>
+              <a:rPr lang="tr-TR" dirty="0" smtClean="0"/>
+              <a:t> yolları izlenir. </a:t>
+            </a:r>
+          </a:p>
+          <a:p>
+            <a:pPr marL="494100" indent="-457200">
+              <a:buFont typeface="+mj-lt"/>
+              <a:buAutoNum type="arabicPeriod"/>
+            </a:pPr>
+            <a:r>
+              <a:rPr lang="tr-TR" dirty="0" err="1" smtClean="0"/>
+              <a:t>Drive’i</a:t>
+            </a:r>
+            <a:r>
+              <a:rPr lang="tr-TR" dirty="0" smtClean="0"/>
+              <a:t> </a:t>
+            </a:r>
+            <a:r>
+              <a:rPr lang="tr-TR" dirty="0" err="1" smtClean="0"/>
+              <a:t>colab</a:t>
+            </a:r>
+            <a:r>
+              <a:rPr lang="tr-TR" dirty="0" smtClean="0"/>
+              <a:t> içerisinden kullanabilmek için sırasıyla aşağıdaki komutlar çalıştırılır</a:t>
+            </a:r>
+            <a:endParaRPr lang="tr-TR" dirty="0"/>
+          </a:p>
+        </p:txBody>
+      </p:sp>
+    </p:spTree>
+    <p:extLst>
+      <p:ext uri="{BB962C8B-B14F-4D97-AF65-F5344CB8AC3E}">
+        <p14:creationId xmlns:p14="http://schemas.microsoft.com/office/powerpoint/2010/main" val="1672566692"/>
+      </p:ext>
+    </p:extLst>
+  </p:cSld>
+  <p:clrMapOvr>
+    <a:masterClrMapping/>
+  </p:clrMapOvr>
+  <p:timing>
+    <p:tnLst>
+      <p:par>
+        <p:cTn id="1" dur="indefinite" restart="never" nodeType="tmRoot"/>
+      </p:par>
+    </p:tnLst>
+  </p:timing>
+</p:sld>
+</file>
+
+<file path=ppt/slides/slide11.xml><?xml version="1.0" encoding="utf-8"?>
+<p:sld xmlns:a="http://schemas.openxmlformats.org/drawingml/2006/main" xmlns:r="http://schemas.openxmlformats.org/officeDocument/2006/relationships" xmlns:p="http://schemas.openxmlformats.org/presentationml/2006/main">
+  <p:cSld>
+    <p:spTree>
+      <p:nvGrpSpPr>
+        <p:cNvPr id="1" name=""/>
+        <p:cNvGrpSpPr/>
+        <p:nvPr/>
+      </p:nvGrpSpPr>
+      <p:grpSpPr>
+        <a:xfrm>
+          <a:off x="0" y="0"/>
+          <a:ext cx="0" cy="0"/>
+          <a:chOff x="0" y="0"/>
+          <a:chExt cx="0" cy="0"/>
+        </a:xfrm>
+      </p:grpSpPr>
+      <p:pic>
+        <p:nvPicPr>
+          <p:cNvPr id="2" name="Resim 1"/>
+          <p:cNvPicPr>
+            <a:picLocks noChangeAspect="1"/>
+          </p:cNvPicPr>
+          <p:nvPr/>
+        </p:nvPicPr>
+        <p:blipFill>
+          <a:blip r:embed="rId2"/>
+          <a:stretch>
+            <a:fillRect/>
+          </a:stretch>
+        </p:blipFill>
+        <p:spPr>
+          <a:xfrm>
+            <a:off x="850751" y="224763"/>
+            <a:ext cx="10287633" cy="3522778"/>
+          </a:xfrm>
+          <a:prstGeom prst="rect">
+            <a:avLst/>
+          </a:prstGeom>
+        </p:spPr>
+      </p:pic>
+      <p:sp>
+        <p:nvSpPr>
+          <p:cNvPr id="3" name="Metin kutusu 2"/>
+          <p:cNvSpPr txBox="1"/>
+          <p:nvPr/>
+        </p:nvSpPr>
+        <p:spPr>
+          <a:xfrm>
+            <a:off x="662203" y="3987899"/>
+            <a:ext cx="10664727" cy="646331"/>
+          </a:xfrm>
+          <a:prstGeom prst="rect">
+            <a:avLst/>
+          </a:prstGeom>
+          <a:noFill/>
+        </p:spPr>
+        <p:txBody>
+          <a:bodyPr wrap="square" rtlCol="0">
+            <a:spAutoFit/>
+          </a:bodyPr>
+          <a:lstStyle/>
+          <a:p>
+            <a:r>
+              <a:rPr lang="tr-TR" dirty="0" smtClean="0"/>
+              <a:t>Çıkan linkte tıklanır. Gerekli izinler verilir ve verilen kod alana kopyalanır. Daha sonra aşağıdaki komut çalıştırılır ve </a:t>
+            </a:r>
+            <a:r>
+              <a:rPr lang="tr-TR" dirty="0" err="1" smtClean="0"/>
+              <a:t>drive’e</a:t>
+            </a:r>
+            <a:r>
+              <a:rPr lang="tr-TR" dirty="0" smtClean="0"/>
+              <a:t> erişilir.</a:t>
+            </a:r>
+            <a:endParaRPr lang="tr-TR" dirty="0"/>
+          </a:p>
+        </p:txBody>
+      </p:sp>
+      <p:pic>
+        <p:nvPicPr>
+          <p:cNvPr id="4" name="Resim 3"/>
+          <p:cNvPicPr>
+            <a:picLocks noChangeAspect="1"/>
+          </p:cNvPicPr>
+          <p:nvPr/>
+        </p:nvPicPr>
+        <p:blipFill>
+          <a:blip r:embed="rId3"/>
+          <a:stretch>
+            <a:fillRect/>
+          </a:stretch>
+        </p:blipFill>
+        <p:spPr>
+          <a:xfrm>
+            <a:off x="662203" y="4760354"/>
+            <a:ext cx="9636236" cy="1372432"/>
+          </a:xfrm>
+          <a:prstGeom prst="rect">
+            <a:avLst/>
+          </a:prstGeom>
+        </p:spPr>
+      </p:pic>
+    </p:spTree>
+    <p:extLst>
+      <p:ext uri="{BB962C8B-B14F-4D97-AF65-F5344CB8AC3E}">
+        <p14:creationId xmlns:p14="http://schemas.microsoft.com/office/powerpoint/2010/main" val="2757070509"/>
+      </p:ext>
+    </p:extLst>
+  </p:cSld>
+  <p:clrMapOvr>
+    <a:masterClrMapping/>
+  </p:clrMapOvr>
+  <p:timing>
+    <p:tnLst>
+      <p:par>
+        <p:cTn id="1" dur="indefinite" restart="never" nodeType="tmRoot"/>
+      </p:par>
+    </p:tnLst>
+  </p:timing>
+</p:sld>
+</file>
+
+<file path=ppt/slides/slide12.xml><?xml version="1.0" encoding="utf-8"?>
+<p:sld xmlns:a="http://schemas.openxmlformats.org/drawingml/2006/main" xmlns:r="http://schemas.openxmlformats.org/officeDocument/2006/relationships" xmlns:p="http://schemas.openxmlformats.org/presentationml/2006/main">
+  <p:cSld>
+    <p:spTree>
+      <p:nvGrpSpPr>
+        <p:cNvPr id="1" name=""/>
+        <p:cNvGrpSpPr/>
+        <p:nvPr/>
+      </p:nvGrpSpPr>
+      <p:grpSpPr>
+        <a:xfrm>
+          <a:off x="0" y="0"/>
+          <a:ext cx="0" cy="0"/>
+          <a:chOff x="0" y="0"/>
+          <a:chExt cx="0" cy="0"/>
+        </a:xfrm>
+      </p:grpSpPr>
+    </p:spTree>
+    <p:extLst>
+      <p:ext uri="{BB962C8B-B14F-4D97-AF65-F5344CB8AC3E}">
+        <p14:creationId xmlns:p14="http://schemas.microsoft.com/office/powerpoint/2010/main" val="3264071351"/>
+      </p:ext>
+    </p:extLst>
+  </p:cSld>
+  <p:clrMapOvr>
+    <a:masterClrMapping/>
+  </p:clrMapOvr>
+  <p:timing>
+    <p:tnLst>
+      <p:par>
+        <p:cTn id="1" dur="indefinite" restart="never" nodeType="tmRoot"/>
+      </p:par>
+    </p:tnLst>
+  </p:timing>
+</p:sld>
+</file>
+
 <file path=ppt/slides/slide2.xml><?xml version="1.0" encoding="utf-8"?>
 <p:sld xmlns:a="http://schemas.openxmlformats.org/drawingml/2006/main" xmlns:r="http://schemas.openxmlformats.org/officeDocument/2006/relationships" xmlns:p="http://schemas.openxmlformats.org/presentationml/2006/main">
   <p:cSld>
@@ -6123,7 +6584,7 @@
           <a:p>
             <a:r>
               <a:rPr lang="tr-TR" dirty="0" smtClean="0"/>
-              <a:t>Object </a:t>
+              <a:t>Nesne Tanıma (Object </a:t>
             </a:r>
             <a:r>
               <a:rPr lang="tr-TR" dirty="0" err="1" smtClean="0"/>
@@ -6131,7 +6592,11 @@
             </a:r>
             <a:r>
               <a:rPr lang="tr-TR" dirty="0" smtClean="0"/>
-              <a:t> Nedir?</a:t>
+              <a:t>) </a:t>
+            </a:r>
+            <a:r>
+              <a:rPr lang="tr-TR" dirty="0" smtClean="0"/>
+              <a:t>Nedir?</a:t>
             </a:r>
             <a:endParaRPr lang="tr-TR" dirty="0"/>
           </a:p>
@@ -6152,10 +6617,73 @@
           <a:bodyPr/>
           <a:lstStyle/>
           <a:p>
+            <a:r>
+              <a:rPr lang="tr-TR" dirty="0" smtClean="0"/>
+              <a:t>Nesne Tanıma/Algılama, görüntüdeki belirli sınıfların nesnesini belirleme ve bulma ile ilgili yaygın bir Bilgisayar Görüsü problemidir. Nesneyi yorumlamak, nesnenin etrafında bir sınırlama kutusu oluşturmak veya görüntüdeki nesneyi içeren (</a:t>
+            </a:r>
+            <a:r>
+              <a:rPr lang="tr-TR" dirty="0" err="1" smtClean="0"/>
+              <a:t>segmentasyonlar</a:t>
+            </a:r>
+            <a:r>
+              <a:rPr lang="tr-TR" dirty="0" smtClean="0"/>
+              <a:t>) her pikseli işaretlemek de dahil olmak üzere çeşitli şekillerde yapılabilir. </a:t>
+            </a:r>
+          </a:p>
+          <a:p>
+            <a:r>
+              <a:rPr lang="tr-TR" dirty="0" smtClean="0"/>
+              <a:t>Nesne tespit ve tanıma süreçlerini 5 başlık altında inceleyebiliriz</a:t>
+            </a:r>
+            <a:r>
+              <a:rPr lang="tr-TR" dirty="0" smtClean="0"/>
+              <a:t> </a:t>
+            </a:r>
             <a:endParaRPr lang="tr-TR" dirty="0"/>
           </a:p>
         </p:txBody>
       </p:sp>
+      <p:pic>
+        <p:nvPicPr>
+          <p:cNvPr id="1026" name="Picture 2" descr="Detected"/>
+          <p:cNvPicPr>
+            <a:picLocks noChangeAspect="1" noChangeArrowheads="1"/>
+          </p:cNvPicPr>
+          <p:nvPr/>
+        </p:nvPicPr>
+        <p:blipFill>
+          <a:blip r:embed="rId2">
+            <a:extLst>
+              <a:ext uri="{28A0092B-C50C-407E-A947-70E740481C1C}">
+                <a14:useLocalDpi xmlns:a14="http://schemas.microsoft.com/office/drawing/2010/main" val="0"/>
+              </a:ext>
+            </a:extLst>
+          </a:blip>
+          <a:srcRect/>
+          <a:stretch>
+            <a:fillRect/>
+          </a:stretch>
+        </p:blipFill>
+        <p:spPr bwMode="auto">
+          <a:xfrm>
+            <a:off x="1663908" y="3761824"/>
+            <a:ext cx="7914807" cy="2793462"/>
+          </a:xfrm>
+          <a:prstGeom prst="rect">
+            <a:avLst/>
+          </a:prstGeom>
+          <a:noFill/>
+          <a:extLst>
+            <a:ext uri="{909E8E84-426E-40DD-AFC4-6F175D3DCCD1}">
+              <a14:hiddenFill xmlns:a14="http://schemas.microsoft.com/office/drawing/2010/main">
+                <a:solidFill>
+                  <a:srgbClr val="FFFFFF"/>
+                </a:solidFill>
+              </a14:hiddenFill>
+            </a:ext>
+          </a:extLst>
+        </p:spPr>
+      </p:pic>
     </p:spTree>
     <p:extLst>
       <p:ext uri="{BB962C8B-B14F-4D97-AF65-F5344CB8AC3E}">
@@ -6176,10 +6704,1284 @@
 </p:sld>
 </file>
 
+<file path=ppt/slides/slide3.xml><?xml version="1.0" encoding="utf-8"?>
+<p:sld xmlns:a="http://schemas.openxmlformats.org/drawingml/2006/main" xmlns:r="http://schemas.openxmlformats.org/officeDocument/2006/relationships" xmlns:p="http://schemas.openxmlformats.org/presentationml/2006/main">
+  <p:cSld>
+    <p:spTree>
+      <p:nvGrpSpPr>
+        <p:cNvPr id="1" name=""/>
+        <p:cNvGrpSpPr/>
+        <p:nvPr/>
+      </p:nvGrpSpPr>
+      <p:grpSpPr>
+        <a:xfrm>
+          <a:off x="0" y="0"/>
+          <a:ext cx="0" cy="0"/>
+          <a:chOff x="0" y="0"/>
+          <a:chExt cx="0" cy="0"/>
+        </a:xfrm>
+      </p:grpSpPr>
+      <p:sp>
+        <p:nvSpPr>
+          <p:cNvPr id="2" name="Unvan 1"/>
+          <p:cNvSpPr>
+            <a:spLocks noGrp="1"/>
+          </p:cNvSpPr>
+          <p:nvPr>
+            <p:ph type="title"/>
+          </p:nvPr>
+        </p:nvSpPr>
+        <p:spPr/>
+        <p:txBody>
+          <a:bodyPr/>
+          <a:lstStyle/>
+          <a:p>
+            <a:r>
+              <a:rPr lang="tr-TR" dirty="0" smtClean="0"/>
+              <a:t>1. Veri Girişi</a:t>
+            </a:r>
+            <a:endParaRPr lang="tr-TR" dirty="0"/>
+          </a:p>
+        </p:txBody>
+      </p:sp>
+      <p:sp>
+        <p:nvSpPr>
+          <p:cNvPr id="3" name="İçerik Yer Tutucusu 2"/>
+          <p:cNvSpPr>
+            <a:spLocks noGrp="1"/>
+          </p:cNvSpPr>
+          <p:nvPr>
+            <p:ph idx="1"/>
+          </p:nvPr>
+        </p:nvSpPr>
+        <p:spPr/>
+        <p:txBody>
+          <a:bodyPr>
+            <a:normAutofit/>
+          </a:bodyPr>
+          <a:lstStyle/>
+          <a:p>
+            <a:r>
+              <a:rPr lang="tr-TR" dirty="0">
+                <a:effectLst/>
+              </a:rPr>
+              <a:t>Bu aşmada hazırlanan veri gürültülerinden ayrıştırılmak, istenilen formata getirilmek gibi amaçlara sisteme girdi olarak verilir. Nesne tespit veya sınıflandırma işlemi yapacağımız için verilerimiz de doğal olarak görüntü olacaktır. Bir insan, otomobil veya ev istediğimiz veriye örnekken, üzerinde insan bulunan bir orman fotoğrafı girdi olarak </a:t>
+            </a:r>
+            <a:r>
+              <a:rPr lang="tr-TR" dirty="0" smtClean="0">
+                <a:effectLst/>
+              </a:rPr>
+              <a:t>tanımlanabilir. </a:t>
+            </a:r>
+            <a:r>
+              <a:rPr lang="tr-TR" dirty="0">
+                <a:effectLst/>
+              </a:rPr>
+              <a:t> Fotoğraf makineleri ile çekilmiş fotoğraflar, dijital olarak oluşturulmuş resimler, video filmler ve taranmış metinler bu veri türlerine örnektir. Veri formatı kullanılan teknolojiye, dile, platforma vb. bir çok etkene bağlıdır fakat kullanacağımız algoritmalar için geçerli format matris haline getirilmiş görüntü pikselleridir.</a:t>
+            </a:r>
+            <a:endParaRPr lang="tr-TR" dirty="0"/>
+          </a:p>
+        </p:txBody>
+      </p:sp>
+    </p:spTree>
+    <p:extLst>
+      <p:ext uri="{BB962C8B-B14F-4D97-AF65-F5344CB8AC3E}">
+        <p14:creationId xmlns:p14="http://schemas.microsoft.com/office/powerpoint/2010/main" val="3390214159"/>
+      </p:ext>
+    </p:extLst>
+  </p:cSld>
+  <p:clrMapOvr>
+    <a:masterClrMapping/>
+  </p:clrMapOvr>
+  <p:timing>
+    <p:tnLst>
+      <p:par>
+        <p:cTn id="1" dur="indefinite" restart="never" nodeType="tmRoot"/>
+      </p:par>
+    </p:tnLst>
+  </p:timing>
+</p:sld>
+</file>
+
+<file path=ppt/slides/slide4.xml><?xml version="1.0" encoding="utf-8"?>
+<p:sld xmlns:a="http://schemas.openxmlformats.org/drawingml/2006/main" xmlns:r="http://schemas.openxmlformats.org/officeDocument/2006/relationships" xmlns:p="http://schemas.openxmlformats.org/presentationml/2006/main">
+  <p:cSld>
+    <p:spTree>
+      <p:nvGrpSpPr>
+        <p:cNvPr id="1" name=""/>
+        <p:cNvGrpSpPr/>
+        <p:nvPr/>
+      </p:nvGrpSpPr>
+      <p:grpSpPr>
+        <a:xfrm>
+          <a:off x="0" y="0"/>
+          <a:ext cx="0" cy="0"/>
+          <a:chOff x="0" y="0"/>
+          <a:chExt cx="0" cy="0"/>
+        </a:xfrm>
+      </p:grpSpPr>
+      <p:sp>
+        <p:nvSpPr>
+          <p:cNvPr id="2" name="Unvan 1"/>
+          <p:cNvSpPr>
+            <a:spLocks noGrp="1"/>
+          </p:cNvSpPr>
+          <p:nvPr>
+            <p:ph type="title"/>
+          </p:nvPr>
+        </p:nvSpPr>
+        <p:spPr/>
+        <p:txBody>
+          <a:bodyPr/>
+          <a:lstStyle/>
+          <a:p>
+            <a:r>
+              <a:rPr lang="tr-TR" dirty="0" smtClean="0"/>
+              <a:t>2 Ön İşleme</a:t>
+            </a:r>
+            <a:endParaRPr lang="tr-TR" dirty="0"/>
+          </a:p>
+        </p:txBody>
+      </p:sp>
+      <p:sp>
+        <p:nvSpPr>
+          <p:cNvPr id="3" name="İçerik Yer Tutucusu 2"/>
+          <p:cNvSpPr>
+            <a:spLocks noGrp="1"/>
+          </p:cNvSpPr>
+          <p:nvPr>
+            <p:ph idx="1"/>
+          </p:nvPr>
+        </p:nvSpPr>
+        <p:spPr/>
+        <p:txBody>
+          <a:bodyPr>
+            <a:normAutofit fontScale="92500" lnSpcReduction="20000"/>
+          </a:bodyPr>
+          <a:lstStyle/>
+          <a:p>
+            <a:r>
+              <a:rPr lang="tr-TR" dirty="0">
+                <a:effectLst/>
+              </a:rPr>
+              <a:t>Verilerin yapılacak olan işlemin amacına uygun hale gelmesi için hazırlamak veya engel teşkil etmesinin önüne geçmek için uygulanan bir takım sabit olmayan </a:t>
+            </a:r>
+            <a:r>
+              <a:rPr lang="tr-TR" dirty="0" smtClean="0">
+                <a:effectLst/>
+              </a:rPr>
+              <a:t>yöntemlerdir. Burada sabit olmayandan kasıt ön işlem süreçlerinin birden fazla duruma göre (Ör: veriye, ortama vb.) göre değişkenlik göstermesidir.</a:t>
+            </a:r>
+          </a:p>
+          <a:p>
+            <a:r>
+              <a:rPr lang="tr-TR" dirty="0">
+                <a:effectLst/>
+              </a:rPr>
+              <a:t>Veri ön işlemenin nedenlerini </a:t>
+            </a:r>
+            <a:r>
+              <a:rPr lang="tr-TR" dirty="0" err="1">
+                <a:effectLst/>
+              </a:rPr>
+              <a:t>siralamak</a:t>
+            </a:r>
+            <a:r>
+              <a:rPr lang="tr-TR" dirty="0">
+                <a:effectLst/>
+              </a:rPr>
+              <a:t> gerekirse; gürültülü parazitli veriler, tam olmayan eksik veriler ve tutarsız veriler olarak sayabiliriz. Peki </a:t>
+            </a:r>
+            <a:r>
+              <a:rPr lang="tr-TR" dirty="0" err="1">
+                <a:effectLst/>
+              </a:rPr>
+              <a:t>bunlari</a:t>
+            </a:r>
+            <a:r>
+              <a:rPr lang="tr-TR" dirty="0">
+                <a:effectLst/>
+              </a:rPr>
+              <a:t> nasıl yapabiliriz?</a:t>
+            </a:r>
+          </a:p>
+          <a:p>
+            <a:r>
+              <a:rPr lang="tr-TR" dirty="0">
+                <a:effectLst/>
+              </a:rPr>
+              <a:t>Veri ön işleme için bir çok </a:t>
+            </a:r>
+            <a:r>
+              <a:rPr lang="tr-TR" dirty="0" err="1">
+                <a:effectLst/>
+              </a:rPr>
+              <a:t>algortima</a:t>
+            </a:r>
+            <a:r>
+              <a:rPr lang="tr-TR" dirty="0">
+                <a:effectLst/>
+              </a:rPr>
+              <a:t> veya yöntem mevcuttur, bu yöntemler insan gözü ile denetleme olabileceği gibi karmaşık sinir ağları bile olabilir. Bu yöntemleri de </a:t>
+            </a:r>
+            <a:r>
+              <a:rPr lang="tr-TR" dirty="0" err="1">
+                <a:effectLst/>
+              </a:rPr>
+              <a:t>siralamak</a:t>
+            </a:r>
+            <a:r>
+              <a:rPr lang="tr-TR" dirty="0">
+                <a:effectLst/>
+              </a:rPr>
+              <a:t> istersek; Regresyon, </a:t>
+            </a:r>
+            <a:r>
+              <a:rPr lang="tr-TR" dirty="0" err="1">
+                <a:effectLst/>
+              </a:rPr>
+              <a:t>esikleme</a:t>
+            </a:r>
+            <a:r>
+              <a:rPr lang="tr-TR" dirty="0">
+                <a:effectLst/>
+              </a:rPr>
+              <a:t>, kümeleme, filtreleme, </a:t>
+            </a:r>
+            <a:r>
+              <a:rPr lang="tr-TR" dirty="0" err="1">
+                <a:effectLst/>
+              </a:rPr>
+              <a:t>binnig</a:t>
+            </a:r>
+            <a:r>
+              <a:rPr lang="tr-TR" dirty="0">
+                <a:effectLst/>
+              </a:rPr>
+              <a:t>, karar ağaçları vb. diyebiliriz. Unutulmaması gereken bir diğer nokta ise </a:t>
+            </a:r>
+            <a:r>
+              <a:rPr lang="tr-TR" dirty="0" err="1">
+                <a:effectLst/>
+              </a:rPr>
+              <a:t>bazılen</a:t>
+            </a:r>
+            <a:r>
+              <a:rPr lang="tr-TR" dirty="0">
+                <a:effectLst/>
+              </a:rPr>
+              <a:t> tek başına bir yöntemi uygulamak yeterli gelmeyebilir, bu durumlarda bir kaç farklı yöntemi peş peşe kullanabiliriz.</a:t>
+            </a:r>
+          </a:p>
+          <a:p>
+            <a:pPr marL="36900" indent="0">
+              <a:buNone/>
+            </a:pPr>
+            <a:endParaRPr lang="tr-TR" dirty="0"/>
+          </a:p>
+        </p:txBody>
+      </p:sp>
+    </p:spTree>
+    <p:extLst>
+      <p:ext uri="{BB962C8B-B14F-4D97-AF65-F5344CB8AC3E}">
+        <p14:creationId xmlns:p14="http://schemas.microsoft.com/office/powerpoint/2010/main" val="2308340011"/>
+      </p:ext>
+    </p:extLst>
+  </p:cSld>
+  <p:clrMapOvr>
+    <a:masterClrMapping/>
+  </p:clrMapOvr>
+  <p:timing>
+    <p:tnLst>
+      <p:par>
+        <p:cTn id="1" dur="indefinite" restart="never" nodeType="tmRoot"/>
+      </p:par>
+    </p:tnLst>
+  </p:timing>
+</p:sld>
+</file>
+
+<file path=ppt/slides/slide5.xml><?xml version="1.0" encoding="utf-8"?>
+<p:sld xmlns:a="http://schemas.openxmlformats.org/drawingml/2006/main" xmlns:r="http://schemas.openxmlformats.org/officeDocument/2006/relationships" xmlns:p="http://schemas.openxmlformats.org/presentationml/2006/main">
+  <p:cSld>
+    <p:spTree>
+      <p:nvGrpSpPr>
+        <p:cNvPr id="1" name=""/>
+        <p:cNvGrpSpPr/>
+        <p:nvPr/>
+      </p:nvGrpSpPr>
+      <p:grpSpPr>
+        <a:xfrm>
+          <a:off x="0" y="0"/>
+          <a:ext cx="0" cy="0"/>
+          <a:chOff x="0" y="0"/>
+          <a:chExt cx="0" cy="0"/>
+        </a:xfrm>
+      </p:grpSpPr>
+      <p:sp>
+        <p:nvSpPr>
+          <p:cNvPr id="2" name="Unvan 1"/>
+          <p:cNvSpPr>
+            <a:spLocks noGrp="1"/>
+          </p:cNvSpPr>
+          <p:nvPr>
+            <p:ph type="title"/>
+          </p:nvPr>
+        </p:nvSpPr>
+        <p:spPr/>
+        <p:txBody>
+          <a:bodyPr/>
+          <a:lstStyle/>
+          <a:p>
+            <a:r>
+              <a:rPr lang="tr-TR" dirty="0" smtClean="0"/>
+              <a:t>3- Öznitelik</a:t>
+            </a:r>
+            <a:endParaRPr lang="tr-TR" dirty="0"/>
+          </a:p>
+        </p:txBody>
+      </p:sp>
+      <p:sp>
+        <p:nvSpPr>
+          <p:cNvPr id="3" name="İçerik Yer Tutucusu 2"/>
+          <p:cNvSpPr>
+            <a:spLocks noGrp="1"/>
+          </p:cNvSpPr>
+          <p:nvPr>
+            <p:ph idx="1"/>
+          </p:nvPr>
+        </p:nvSpPr>
+        <p:spPr>
+          <a:xfrm>
+            <a:off x="913795" y="1732449"/>
+            <a:ext cx="10353762" cy="4758292"/>
+          </a:xfrm>
+        </p:spPr>
+        <p:txBody>
+          <a:bodyPr>
+            <a:normAutofit lnSpcReduction="10000"/>
+          </a:bodyPr>
+          <a:lstStyle/>
+          <a:p>
+            <a:r>
+              <a:rPr lang="tr-TR" dirty="0">
+                <a:effectLst/>
+              </a:rPr>
+              <a:t>Bu aşamada ön işleme tabi tutulmuş veri üzerinde daha önceden belirlenen nesnenin/isterin elde edilmesidir</a:t>
+            </a:r>
+            <a:r>
+              <a:rPr lang="tr-TR" dirty="0" smtClean="0">
+                <a:effectLst/>
+              </a:rPr>
+              <a:t>.</a:t>
+            </a:r>
+          </a:p>
+          <a:p>
+            <a:r>
+              <a:rPr lang="tr-TR" dirty="0">
+                <a:effectLst/>
+              </a:rPr>
+              <a:t>Bu bölümde öznitelik çıkarma (</a:t>
+            </a:r>
+            <a:r>
+              <a:rPr lang="tr-TR" dirty="0" err="1">
+                <a:effectLst/>
+              </a:rPr>
+              <a:t>feature</a:t>
+            </a:r>
+            <a:r>
+              <a:rPr lang="tr-TR" dirty="0">
+                <a:effectLst/>
+              </a:rPr>
+              <a:t> </a:t>
+            </a:r>
+            <a:r>
+              <a:rPr lang="tr-TR" dirty="0" err="1">
+                <a:effectLst/>
+              </a:rPr>
+              <a:t>extraction</a:t>
+            </a:r>
+            <a:r>
+              <a:rPr lang="tr-TR" dirty="0">
+                <a:effectLst/>
+              </a:rPr>
+              <a:t>) kavramına değinmek gerekiyor. </a:t>
+            </a:r>
+            <a:r>
+              <a:rPr lang="tr-TR" dirty="0" err="1">
+                <a:effectLst/>
+              </a:rPr>
+              <a:t>Feature</a:t>
+            </a:r>
+            <a:r>
+              <a:rPr lang="tr-TR" dirty="0">
+                <a:effectLst/>
+              </a:rPr>
+              <a:t> </a:t>
+            </a:r>
+            <a:r>
+              <a:rPr lang="tr-TR" dirty="0" err="1">
+                <a:effectLst/>
+              </a:rPr>
+              <a:t>extraction</a:t>
+            </a:r>
+            <a:r>
+              <a:rPr lang="tr-TR" dirty="0">
+                <a:effectLst/>
+              </a:rPr>
+              <a:t>; “Detay çıkarma: Bir cismin önceden tanımlanmış kriterleri ve özellikleri sayesinde görüntüler üzerinden otomatik olarak tespit edilmesi ve detaylarının elde edilmesi işlemi; eşanlam: detay saptama.” ve “Öznitelik çıkarma: Örüntü tanıma ve istatistiksel işaret işlemede, sınıflandırma amacıyla alınan ölçümlerin bazı dönüşümlerle daha özlü, daha az gürültülü, daha az sayıda ayırt edici değerlere dönüştürülmesi.” [3] Bu tanımı bazı kaynaklarda özellik çıkarımı olarak da görebilirsiniz</a:t>
+            </a:r>
+            <a:r>
+              <a:rPr lang="tr-TR" dirty="0" smtClean="0">
+                <a:effectLst/>
+              </a:rPr>
+              <a:t>.</a:t>
+            </a:r>
+          </a:p>
+          <a:p>
+            <a:r>
+              <a:rPr lang="tr-TR" dirty="0">
+                <a:effectLst/>
+              </a:rPr>
+              <a:t>Bu işlemler sonunda elde edeceğimiz şey , istediğimiz nesnenin görüntü üzerine var mı, varsa nerede olduğudur. Peki bu yöntemler nedir? Öznitelik çıkarımı için kullanabileceğiniz yüzlerce algoritma var kısaca bir kaçını saymak gerekirse SIFT (</a:t>
+            </a:r>
+            <a:r>
+              <a:rPr lang="tr-TR" dirty="0" err="1">
+                <a:effectLst/>
+              </a:rPr>
+              <a:t>Scale-Invariant</a:t>
+            </a:r>
+            <a:r>
+              <a:rPr lang="tr-TR" dirty="0">
+                <a:effectLst/>
+              </a:rPr>
+              <a:t> </a:t>
+            </a:r>
+            <a:r>
+              <a:rPr lang="tr-TR" dirty="0" err="1">
+                <a:effectLst/>
+              </a:rPr>
+              <a:t>Feature</a:t>
+            </a:r>
+            <a:r>
+              <a:rPr lang="tr-TR" dirty="0">
+                <a:effectLst/>
+              </a:rPr>
+              <a:t> </a:t>
+            </a:r>
+            <a:r>
+              <a:rPr lang="tr-TR" dirty="0" err="1">
+                <a:effectLst/>
+              </a:rPr>
+              <a:t>Transform</a:t>
+            </a:r>
+            <a:r>
+              <a:rPr lang="tr-TR" dirty="0">
+                <a:effectLst/>
+              </a:rPr>
+              <a:t>), SURF (</a:t>
+            </a:r>
+            <a:r>
+              <a:rPr lang="tr-TR" dirty="0" err="1">
+                <a:effectLst/>
+              </a:rPr>
+              <a:t>Speeded-Up</a:t>
+            </a:r>
+            <a:r>
+              <a:rPr lang="tr-TR" dirty="0">
+                <a:effectLst/>
+              </a:rPr>
+              <a:t> </a:t>
+            </a:r>
+            <a:r>
+              <a:rPr lang="tr-TR" dirty="0" err="1">
+                <a:effectLst/>
+              </a:rPr>
+              <a:t>Robust</a:t>
+            </a:r>
+            <a:r>
+              <a:rPr lang="tr-TR" dirty="0">
+                <a:effectLst/>
+              </a:rPr>
+              <a:t> </a:t>
+            </a:r>
+            <a:r>
+              <a:rPr lang="tr-TR" dirty="0" err="1">
+                <a:effectLst/>
+              </a:rPr>
+              <a:t>Features</a:t>
+            </a:r>
+            <a:r>
+              <a:rPr lang="tr-TR" dirty="0">
+                <a:effectLst/>
+              </a:rPr>
+              <a:t>), </a:t>
+            </a:r>
+            <a:r>
+              <a:rPr lang="tr-TR" dirty="0" err="1">
+                <a:effectLst/>
+              </a:rPr>
+              <a:t>Feature</a:t>
+            </a:r>
+            <a:r>
+              <a:rPr lang="tr-TR" dirty="0">
+                <a:effectLst/>
+              </a:rPr>
+              <a:t> </a:t>
+            </a:r>
+            <a:r>
+              <a:rPr lang="tr-TR" dirty="0" err="1">
+                <a:effectLst/>
+              </a:rPr>
+              <a:t>Matching</a:t>
+            </a:r>
+            <a:r>
+              <a:rPr lang="tr-TR" dirty="0">
+                <a:effectLst/>
+              </a:rPr>
+              <a:t>, </a:t>
+            </a:r>
+            <a:r>
+              <a:rPr lang="tr-TR" dirty="0" err="1">
+                <a:effectLst/>
+              </a:rPr>
+              <a:t>Haar</a:t>
+            </a:r>
+            <a:r>
+              <a:rPr lang="tr-TR" dirty="0">
+                <a:effectLst/>
+              </a:rPr>
+              <a:t> </a:t>
+            </a:r>
+            <a:r>
+              <a:rPr lang="tr-TR" dirty="0" err="1">
+                <a:effectLst/>
+              </a:rPr>
+              <a:t>Cascades</a:t>
+            </a:r>
+            <a:r>
+              <a:rPr lang="tr-TR" dirty="0">
+                <a:effectLst/>
+              </a:rPr>
+              <a:t>, HOG (</a:t>
+            </a:r>
+            <a:r>
+              <a:rPr lang="tr-TR" dirty="0" err="1">
+                <a:effectLst/>
+              </a:rPr>
+              <a:t>Histogram</a:t>
+            </a:r>
+            <a:r>
+              <a:rPr lang="tr-TR" dirty="0">
+                <a:effectLst/>
+              </a:rPr>
+              <a:t> of </a:t>
+            </a:r>
+            <a:r>
+              <a:rPr lang="tr-TR" dirty="0" err="1">
+                <a:effectLst/>
+              </a:rPr>
+              <a:t>Oriented</a:t>
+            </a:r>
+            <a:r>
+              <a:rPr lang="tr-TR" dirty="0">
+                <a:effectLst/>
+              </a:rPr>
+              <a:t> </a:t>
+            </a:r>
+            <a:r>
+              <a:rPr lang="tr-TR" dirty="0" err="1">
+                <a:effectLst/>
+              </a:rPr>
+              <a:t>Gradients</a:t>
+            </a:r>
+            <a:r>
+              <a:rPr lang="tr-TR" dirty="0">
+                <a:effectLst/>
+              </a:rPr>
+              <a:t>) vb. diyebiliriz.</a:t>
+            </a:r>
+            <a:endParaRPr lang="tr-TR" dirty="0"/>
+          </a:p>
+        </p:txBody>
+      </p:sp>
+    </p:spTree>
+    <p:extLst>
+      <p:ext uri="{BB962C8B-B14F-4D97-AF65-F5344CB8AC3E}">
+        <p14:creationId xmlns:p14="http://schemas.microsoft.com/office/powerpoint/2010/main" val="2081088424"/>
+      </p:ext>
+    </p:extLst>
+  </p:cSld>
+  <p:clrMapOvr>
+    <a:masterClrMapping/>
+  </p:clrMapOvr>
+  <p:timing>
+    <p:tnLst>
+      <p:par>
+        <p:cTn id="1" dur="indefinite" restart="never" nodeType="tmRoot"/>
+      </p:par>
+    </p:tnLst>
+  </p:timing>
+</p:sld>
+</file>
+
+<file path=ppt/slides/slide6.xml><?xml version="1.0" encoding="utf-8"?>
+<p:sld xmlns:a="http://schemas.openxmlformats.org/drawingml/2006/main" xmlns:r="http://schemas.openxmlformats.org/officeDocument/2006/relationships" xmlns:p="http://schemas.openxmlformats.org/presentationml/2006/main">
+  <p:cSld>
+    <p:spTree>
+      <p:nvGrpSpPr>
+        <p:cNvPr id="1" name=""/>
+        <p:cNvGrpSpPr/>
+        <p:nvPr/>
+      </p:nvGrpSpPr>
+      <p:grpSpPr>
+        <a:xfrm>
+          <a:off x="0" y="0"/>
+          <a:ext cx="0" cy="0"/>
+          <a:chOff x="0" y="0"/>
+          <a:chExt cx="0" cy="0"/>
+        </a:xfrm>
+      </p:grpSpPr>
+      <p:sp>
+        <p:nvSpPr>
+          <p:cNvPr id="2" name="Unvan 1"/>
+          <p:cNvSpPr>
+            <a:spLocks noGrp="1"/>
+          </p:cNvSpPr>
+          <p:nvPr>
+            <p:ph type="title"/>
+          </p:nvPr>
+        </p:nvSpPr>
+        <p:spPr/>
+        <p:txBody>
+          <a:bodyPr/>
+          <a:lstStyle/>
+          <a:p>
+            <a:r>
+              <a:rPr lang="tr-TR" dirty="0" smtClean="0"/>
+              <a:t>4 - Tanımlama</a:t>
+            </a:r>
+            <a:endParaRPr lang="tr-TR" dirty="0"/>
+          </a:p>
+        </p:txBody>
+      </p:sp>
+      <p:sp>
+        <p:nvSpPr>
+          <p:cNvPr id="3" name="İçerik Yer Tutucusu 2"/>
+          <p:cNvSpPr>
+            <a:spLocks noGrp="1"/>
+          </p:cNvSpPr>
+          <p:nvPr>
+            <p:ph idx="1"/>
+          </p:nvPr>
+        </p:nvSpPr>
+        <p:spPr/>
+        <p:txBody>
+          <a:bodyPr/>
+          <a:lstStyle/>
+          <a:p>
+            <a:r>
+              <a:rPr lang="tr-TR" dirty="0">
+                <a:effectLst/>
+              </a:rPr>
+              <a:t>Tanımlama, tespit ettiğimiz görüntüden çıkarım yapabilmek, tanımak yani bu görüntünün ne olduğunu anlama aşaması olarak </a:t>
+            </a:r>
+            <a:r>
+              <a:rPr lang="tr-TR" dirty="0" err="1">
+                <a:effectLst/>
+              </a:rPr>
+              <a:t>basitce</a:t>
+            </a:r>
+            <a:r>
+              <a:rPr lang="tr-TR" dirty="0">
+                <a:effectLst/>
+              </a:rPr>
+              <a:t> tanımlanabilir. Bu bölümde temek iki kavrama değinmek gerekiyor; Sınıflandırma ve Kümeleme. Sınıflandırma veriyi önceden belirlenmiş sınıflardan birine dahil etmektir. </a:t>
+            </a:r>
+            <a:r>
+              <a:rPr lang="tr-TR" dirty="0" err="1">
+                <a:effectLst/>
+              </a:rPr>
+              <a:t>Danışmanlı</a:t>
+            </a:r>
+            <a:r>
+              <a:rPr lang="tr-TR" dirty="0">
+                <a:effectLst/>
+              </a:rPr>
+              <a:t> (Gözetimli, </a:t>
+            </a:r>
+            <a:r>
+              <a:rPr lang="tr-TR" dirty="0" err="1">
+                <a:effectLst/>
+              </a:rPr>
+              <a:t>Supervised</a:t>
+            </a:r>
+            <a:r>
+              <a:rPr lang="tr-TR" dirty="0">
+                <a:effectLst/>
+              </a:rPr>
+              <a:t>) öğrenme, kestirim ve örüntü tanıma yöntemleri ile gerçekleştirilir. Kümelemede ise benzer verileri, benzer özellik gösterenler aynı grupta toplanırlar.</a:t>
+            </a:r>
+          </a:p>
+          <a:p>
+            <a:pPr marL="36900" indent="0">
+              <a:buNone/>
+            </a:pPr>
+            <a:endParaRPr lang="tr-TR" dirty="0"/>
+          </a:p>
+        </p:txBody>
+      </p:sp>
+    </p:spTree>
+    <p:extLst>
+      <p:ext uri="{BB962C8B-B14F-4D97-AF65-F5344CB8AC3E}">
+        <p14:creationId xmlns:p14="http://schemas.microsoft.com/office/powerpoint/2010/main" val="158086370"/>
+      </p:ext>
+    </p:extLst>
+  </p:cSld>
+  <p:clrMapOvr>
+    <a:masterClrMapping/>
+  </p:clrMapOvr>
+  <p:timing>
+    <p:tnLst>
+      <p:par>
+        <p:cTn id="1" dur="indefinite" restart="never" nodeType="tmRoot"/>
+      </p:par>
+    </p:tnLst>
+  </p:timing>
+</p:sld>
+</file>
+
+<file path=ppt/slides/slide7.xml><?xml version="1.0" encoding="utf-8"?>
+<p:sld xmlns:a="http://schemas.openxmlformats.org/drawingml/2006/main" xmlns:r="http://schemas.openxmlformats.org/officeDocument/2006/relationships" xmlns:p="http://schemas.openxmlformats.org/presentationml/2006/main">
+  <p:cSld>
+    <p:spTree>
+      <p:nvGrpSpPr>
+        <p:cNvPr id="1" name=""/>
+        <p:cNvGrpSpPr/>
+        <p:nvPr/>
+      </p:nvGrpSpPr>
+      <p:grpSpPr>
+        <a:xfrm>
+          <a:off x="0" y="0"/>
+          <a:ext cx="0" cy="0"/>
+          <a:chOff x="0" y="0"/>
+          <a:chExt cx="0" cy="0"/>
+        </a:xfrm>
+      </p:grpSpPr>
+      <p:sp>
+        <p:nvSpPr>
+          <p:cNvPr id="2" name="Unvan 1"/>
+          <p:cNvSpPr>
+            <a:spLocks noGrp="1"/>
+          </p:cNvSpPr>
+          <p:nvPr>
+            <p:ph type="title"/>
+          </p:nvPr>
+        </p:nvSpPr>
+        <p:spPr/>
+        <p:txBody>
+          <a:bodyPr/>
+          <a:lstStyle/>
+          <a:p>
+            <a:r>
+              <a:rPr lang="tr-TR" dirty="0" smtClean="0"/>
+              <a:t>CNN Nedir?</a:t>
+            </a:r>
+            <a:endParaRPr lang="tr-TR" dirty="0"/>
+          </a:p>
+        </p:txBody>
+      </p:sp>
+      <p:sp>
+        <p:nvSpPr>
+          <p:cNvPr id="3" name="İçerik Yer Tutucusu 2"/>
+          <p:cNvSpPr>
+            <a:spLocks noGrp="1"/>
+          </p:cNvSpPr>
+          <p:nvPr>
+            <p:ph idx="1"/>
+          </p:nvPr>
+        </p:nvSpPr>
+        <p:spPr/>
+        <p:txBody>
+          <a:bodyPr/>
+          <a:lstStyle/>
+          <a:p>
+            <a:r>
+              <a:rPr lang="tr-TR" dirty="0" err="1">
+                <a:effectLst/>
+              </a:rPr>
+              <a:t>Evrişimsel</a:t>
+            </a:r>
+            <a:r>
+              <a:rPr lang="tr-TR" dirty="0">
+                <a:effectLst/>
+              </a:rPr>
+              <a:t> sinir ağları, </a:t>
+            </a:r>
+            <a:r>
+              <a:rPr lang="tr-TR" dirty="0">
+                <a:effectLst/>
+                <a:hlinkClick r:id="rId2" tooltip="Derin öğrenme"/>
+              </a:rPr>
+              <a:t>derin öğrenmenin</a:t>
+            </a:r>
+            <a:r>
+              <a:rPr lang="tr-TR" dirty="0">
+                <a:effectLst/>
+              </a:rPr>
+              <a:t> bir alt dalıdır ve genellikle görsel bilginin analiz edilmesinde kullanılır. Yaygın kullanım alanları </a:t>
+            </a:r>
+            <a:r>
+              <a:rPr lang="tr-TR" dirty="0">
+                <a:effectLst/>
+                <a:hlinkClick r:id="rId3" tooltip="Resim ve video tanıma (sayfa mevcut değil)"/>
+              </a:rPr>
+              <a:t>resim ve video tanıma</a:t>
+            </a:r>
+            <a:r>
+              <a:rPr lang="tr-TR" dirty="0">
+                <a:effectLst/>
+              </a:rPr>
+              <a:t>, </a:t>
+            </a:r>
+            <a:r>
+              <a:rPr lang="tr-TR" dirty="0">
+                <a:effectLst/>
+                <a:hlinkClick r:id="rId4" tooltip="Öneri sistemleri (sayfa mevcut değil)"/>
+              </a:rPr>
+              <a:t>öneri sistemleri</a:t>
+            </a:r>
+            <a:r>
+              <a:rPr lang="tr-TR" baseline="30000" dirty="0">
+                <a:effectLst/>
+                <a:hlinkClick r:id="rId5"/>
+              </a:rPr>
+              <a:t>[1]</a:t>
+            </a:r>
+            <a:r>
+              <a:rPr lang="tr-TR" dirty="0">
+                <a:effectLst/>
+              </a:rPr>
+              <a:t> </a:t>
+            </a:r>
+            <a:r>
+              <a:rPr lang="tr-TR" dirty="0">
+                <a:effectLst/>
+                <a:hlinkClick r:id="rId6" tooltip="Resim sınıflandırma (sayfa mevcut değil)"/>
+              </a:rPr>
+              <a:t>resim sınıflandırma</a:t>
+            </a:r>
+            <a:r>
+              <a:rPr lang="tr-TR" dirty="0">
+                <a:effectLst/>
+              </a:rPr>
+              <a:t>, </a:t>
+            </a:r>
+            <a:r>
+              <a:rPr lang="tr-TR" dirty="0">
+                <a:effectLst/>
+                <a:hlinkClick r:id="rId7" tooltip="Tıbbi görüntü analizi (sayfa mevcut değil)"/>
+              </a:rPr>
+              <a:t>tıbbi görüntü analizi</a:t>
+            </a:r>
+            <a:r>
+              <a:rPr lang="tr-TR" dirty="0">
+                <a:effectLst/>
+              </a:rPr>
+              <a:t> ve </a:t>
+            </a:r>
+            <a:r>
+              <a:rPr lang="tr-TR" dirty="0">
+                <a:effectLst/>
+                <a:hlinkClick r:id="rId8" tooltip="Doğal dil işleme"/>
+              </a:rPr>
+              <a:t>doğal dil işleme</a:t>
+            </a:r>
+            <a:r>
+              <a:rPr lang="tr-TR" baseline="30000" dirty="0">
+                <a:effectLst/>
+                <a:hlinkClick r:id="rId9"/>
+              </a:rPr>
+              <a:t>[2]</a:t>
+            </a:r>
+            <a:r>
+              <a:rPr lang="tr-TR" dirty="0">
+                <a:effectLst/>
+              </a:rPr>
+              <a:t> olarak sıralanabilir.</a:t>
+            </a:r>
+          </a:p>
+          <a:p>
+            <a:r>
+              <a:rPr lang="tr-TR" dirty="0"/>
+              <a:t/>
+            </a:r>
+            <a:br>
+              <a:rPr lang="tr-TR" dirty="0"/>
+            </a:br>
+            <a:endParaRPr lang="tr-TR" dirty="0"/>
+          </a:p>
+        </p:txBody>
+      </p:sp>
+    </p:spTree>
+    <p:extLst>
+      <p:ext uri="{BB962C8B-B14F-4D97-AF65-F5344CB8AC3E}">
+        <p14:creationId xmlns:p14="http://schemas.microsoft.com/office/powerpoint/2010/main" val="321621461"/>
+      </p:ext>
+    </p:extLst>
+  </p:cSld>
+  <p:clrMapOvr>
+    <a:masterClrMapping/>
+  </p:clrMapOvr>
+  <p:timing>
+    <p:tnLst>
+      <p:par>
+        <p:cTn id="1" dur="indefinite" restart="never" nodeType="tmRoot"/>
+      </p:par>
+    </p:tnLst>
+  </p:timing>
+</p:sld>
+</file>
+
+<file path=ppt/slides/slide8.xml><?xml version="1.0" encoding="utf-8"?>
+<p:sld xmlns:a="http://schemas.openxmlformats.org/drawingml/2006/main" xmlns:r="http://schemas.openxmlformats.org/officeDocument/2006/relationships" xmlns:p="http://schemas.openxmlformats.org/presentationml/2006/main">
+  <p:cSld>
+    <p:spTree>
+      <p:nvGrpSpPr>
+        <p:cNvPr id="1" name=""/>
+        <p:cNvGrpSpPr/>
+        <p:nvPr/>
+      </p:nvGrpSpPr>
+      <p:grpSpPr>
+        <a:xfrm>
+          <a:off x="0" y="0"/>
+          <a:ext cx="0" cy="0"/>
+          <a:chOff x="0" y="0"/>
+          <a:chExt cx="0" cy="0"/>
+        </a:xfrm>
+      </p:grpSpPr>
+      <p:sp>
+        <p:nvSpPr>
+          <p:cNvPr id="2" name="Unvan 1"/>
+          <p:cNvSpPr>
+            <a:spLocks noGrp="1"/>
+          </p:cNvSpPr>
+          <p:nvPr>
+            <p:ph type="title"/>
+          </p:nvPr>
+        </p:nvSpPr>
+        <p:spPr/>
+        <p:txBody>
+          <a:bodyPr/>
+          <a:lstStyle/>
+          <a:p>
+            <a:r>
+              <a:rPr lang="tr-TR" dirty="0" smtClean="0"/>
+              <a:t>CNN Tasarımı</a:t>
+            </a:r>
+            <a:endParaRPr lang="tr-TR" dirty="0"/>
+          </a:p>
+        </p:txBody>
+      </p:sp>
+      <p:sp>
+        <p:nvSpPr>
+          <p:cNvPr id="3" name="İçerik Yer Tutucusu 2"/>
+          <p:cNvSpPr>
+            <a:spLocks noGrp="1"/>
+          </p:cNvSpPr>
+          <p:nvPr>
+            <p:ph idx="1"/>
+          </p:nvPr>
+        </p:nvSpPr>
+        <p:spPr/>
+        <p:txBody>
+          <a:bodyPr>
+            <a:normAutofit/>
+          </a:bodyPr>
+          <a:lstStyle/>
+          <a:p>
+            <a:r>
+              <a:rPr lang="tr-TR" dirty="0">
+                <a:effectLst/>
+              </a:rPr>
+              <a:t>Bir kıvrımlı sinir ağı, bir giriş ve bir çıkış katmanının yanı sıra birden fazla gizli katmandan oluşur . Bir CNN'nin gizli katmanları tipik olarak bir çarpma veya başka bir </a:t>
+            </a:r>
+            <a:r>
+              <a:rPr lang="tr-TR" dirty="0">
+                <a:effectLst/>
+                <a:hlinkClick r:id="rId2" tooltip="Nokta çarpım"/>
+              </a:rPr>
+              <a:t>nokta ürünü</a:t>
+            </a:r>
+            <a:r>
+              <a:rPr lang="tr-TR" dirty="0">
+                <a:effectLst/>
+              </a:rPr>
+              <a:t> ile </a:t>
+            </a:r>
+            <a:r>
+              <a:rPr lang="tr-TR" i="1" dirty="0">
+                <a:effectLst/>
+              </a:rPr>
+              <a:t>kıvrılan</a:t>
+            </a:r>
+            <a:r>
+              <a:rPr lang="tr-TR" dirty="0">
+                <a:effectLst/>
+              </a:rPr>
+              <a:t> bir dizi kıvrımlı katmandan oluşur. Aktivasyon fonksiyonu genellikle bir RELU katmanıdır ve bunu takiben havuzlama katmanları, tamamen bağlı katmanlar ve normalleştirme katmanları gibi gizli katmanlar olarak adlandırılan ek kıvrımlar gelir, çünkü girişleri ve çıkışları aktivasyon fonksiyonu ve son kıvrım tarafından maskelenir. Son </a:t>
+            </a:r>
+            <a:r>
+              <a:rPr lang="tr-TR" dirty="0" err="1">
+                <a:effectLst/>
+              </a:rPr>
+              <a:t>evrişim</a:t>
+            </a:r>
+            <a:r>
+              <a:rPr lang="tr-TR" dirty="0">
+                <a:effectLst/>
+              </a:rPr>
+              <a:t>, sonuçta, nihai ürünü daha doğru bir şekilde ağırlaştırmak için genellikle geri yayılımı içerir.</a:t>
+            </a:r>
+            <a:r>
+              <a:rPr lang="tr-TR" baseline="30000" dirty="0">
+                <a:effectLst/>
+                <a:hlinkClick r:id="rId3"/>
+              </a:rPr>
+              <a:t>[4]</a:t>
+            </a:r>
+            <a:endParaRPr lang="tr-TR" dirty="0">
+              <a:effectLst/>
+            </a:endParaRPr>
+          </a:p>
+          <a:p>
+            <a:r>
+              <a:rPr lang="tr-TR" dirty="0"/>
+              <a:t/>
+            </a:r>
+            <a:br>
+              <a:rPr lang="tr-TR" dirty="0"/>
+            </a:br>
+            <a:endParaRPr lang="tr-TR" dirty="0"/>
+          </a:p>
+        </p:txBody>
+      </p:sp>
+    </p:spTree>
+    <p:extLst>
+      <p:ext uri="{BB962C8B-B14F-4D97-AF65-F5344CB8AC3E}">
+        <p14:creationId xmlns:p14="http://schemas.microsoft.com/office/powerpoint/2010/main" val="3811875905"/>
+      </p:ext>
+    </p:extLst>
+  </p:cSld>
+  <p:clrMapOvr>
+    <a:masterClrMapping/>
+  </p:clrMapOvr>
+  <p:timing>
+    <p:tnLst>
+      <p:par>
+        <p:cTn id="1" dur="indefinite" restart="never" nodeType="tmRoot"/>
+      </p:par>
+    </p:tnLst>
+  </p:timing>
+</p:sld>
+</file>
+
+<file path=ppt/slides/slide9.xml><?xml version="1.0" encoding="utf-8"?>
+<p:sld xmlns:a="http://schemas.openxmlformats.org/drawingml/2006/main" xmlns:r="http://schemas.openxmlformats.org/officeDocument/2006/relationships" xmlns:p="http://schemas.openxmlformats.org/presentationml/2006/main">
+  <p:cSld>
+    <p:spTree>
+      <p:nvGrpSpPr>
+        <p:cNvPr id="1" name=""/>
+        <p:cNvGrpSpPr/>
+        <p:nvPr/>
+      </p:nvGrpSpPr>
+      <p:grpSpPr>
+        <a:xfrm>
+          <a:off x="0" y="0"/>
+          <a:ext cx="0" cy="0"/>
+          <a:chOff x="0" y="0"/>
+          <a:chExt cx="0" cy="0"/>
+        </a:xfrm>
+      </p:grpSpPr>
+      <p:sp>
+        <p:nvSpPr>
+          <p:cNvPr id="2" name="Unvan 1"/>
+          <p:cNvSpPr>
+            <a:spLocks noGrp="1"/>
+          </p:cNvSpPr>
+          <p:nvPr>
+            <p:ph type="title"/>
+          </p:nvPr>
+        </p:nvSpPr>
+        <p:spPr/>
+        <p:txBody>
+          <a:bodyPr>
+            <a:normAutofit/>
+          </a:bodyPr>
+          <a:lstStyle/>
+          <a:p>
+            <a:r>
+              <a:rPr lang="tr-TR" dirty="0" smtClean="0"/>
+              <a:t>Google </a:t>
+            </a:r>
+            <a:r>
+              <a:rPr lang="tr-TR" dirty="0" err="1" smtClean="0"/>
+              <a:t>Colaboratory</a:t>
+            </a:r>
+            <a:r>
+              <a:rPr lang="tr-TR" dirty="0" smtClean="0"/>
+              <a:t> Nedir ve Nasıl Kullanılır?</a:t>
+            </a:r>
+            <a:endParaRPr lang="tr-TR" dirty="0"/>
+          </a:p>
+        </p:txBody>
+      </p:sp>
+      <p:sp>
+        <p:nvSpPr>
+          <p:cNvPr id="3" name="İçerik Yer Tutucusu 2"/>
+          <p:cNvSpPr>
+            <a:spLocks noGrp="1"/>
+          </p:cNvSpPr>
+          <p:nvPr>
+            <p:ph idx="1"/>
+          </p:nvPr>
+        </p:nvSpPr>
+        <p:spPr/>
+        <p:txBody>
+          <a:bodyPr/>
+          <a:lstStyle/>
+          <a:p>
+            <a:r>
+              <a:rPr lang="tr-TR" dirty="0" smtClean="0"/>
+              <a:t>Google </a:t>
+            </a:r>
+            <a:r>
+              <a:rPr lang="tr-TR" dirty="0" err="1" smtClean="0"/>
+              <a:t>Colaboratory</a:t>
+            </a:r>
+            <a:r>
+              <a:rPr lang="tr-TR" dirty="0" smtClean="0"/>
+              <a:t>, ücretsiz </a:t>
+            </a:r>
+            <a:r>
+              <a:rPr lang="tr-TR" dirty="0" err="1" smtClean="0"/>
+              <a:t>Tesla</a:t>
+            </a:r>
+            <a:r>
+              <a:rPr lang="tr-TR" dirty="0" smtClean="0"/>
+              <a:t> K80 GPU üzerinde; </a:t>
+            </a:r>
+            <a:r>
+              <a:rPr lang="tr-TR" dirty="0" err="1" smtClean="0"/>
+              <a:t>Keras</a:t>
+            </a:r>
+            <a:r>
+              <a:rPr lang="tr-TR" dirty="0" smtClean="0"/>
+              <a:t>, </a:t>
+            </a:r>
+            <a:r>
+              <a:rPr lang="tr-TR" dirty="0" err="1" smtClean="0"/>
+              <a:t>TensorFlow</a:t>
+            </a:r>
+            <a:r>
+              <a:rPr lang="tr-TR" dirty="0"/>
+              <a:t>,</a:t>
+            </a:r>
+            <a:r>
+              <a:rPr lang="tr-TR" dirty="0" smtClean="0"/>
+              <a:t> </a:t>
+            </a:r>
+            <a:r>
+              <a:rPr lang="tr-TR" dirty="0" err="1" smtClean="0"/>
+              <a:t>PyTorch</a:t>
+            </a:r>
+            <a:r>
+              <a:rPr lang="tr-TR" dirty="0"/>
+              <a:t> </a:t>
+            </a:r>
+            <a:r>
+              <a:rPr lang="tr-TR" dirty="0" smtClean="0"/>
+              <a:t>, </a:t>
+            </a:r>
+            <a:r>
+              <a:rPr lang="tr-TR" dirty="0" err="1" smtClean="0"/>
+              <a:t>OpenCV</a:t>
+            </a:r>
+            <a:r>
+              <a:rPr lang="tr-TR" dirty="0" smtClean="0"/>
+              <a:t> vb. kütüphaneleri kullanarak derin öğrenme ve makine uygulamaları geliştirmeye yarayan bir ortamdır. Google </a:t>
+            </a:r>
+            <a:r>
+              <a:rPr lang="tr-TR" dirty="0" err="1" smtClean="0"/>
+              <a:t>Colab</a:t>
+            </a:r>
+            <a:r>
+              <a:rPr lang="tr-TR" dirty="0" smtClean="0"/>
+              <a:t> ile </a:t>
+            </a:r>
+            <a:r>
+              <a:rPr lang="tr-TR" dirty="0" err="1" smtClean="0"/>
+              <a:t>Python</a:t>
+            </a:r>
+            <a:r>
+              <a:rPr lang="tr-TR" dirty="0" smtClean="0"/>
+              <a:t> dilinde uygulamalar geliştirilebilir. </a:t>
+            </a:r>
+          </a:p>
+          <a:p>
+            <a:r>
+              <a:rPr lang="tr-TR" dirty="0" smtClean="0"/>
+              <a:t>Google </a:t>
+            </a:r>
+            <a:r>
+              <a:rPr lang="tr-TR" dirty="0" err="1" smtClean="0"/>
+              <a:t>Colab’in</a:t>
+            </a:r>
+            <a:r>
+              <a:rPr lang="tr-TR" dirty="0" smtClean="0"/>
+              <a:t> diğer bulut servislerinden farklı olarak en önemli özelliği </a:t>
+            </a:r>
+            <a:r>
+              <a:rPr lang="tr-TR" dirty="0" err="1" smtClean="0"/>
+              <a:t>GPU’yu</a:t>
+            </a:r>
+            <a:r>
+              <a:rPr lang="tr-TR" dirty="0" smtClean="0"/>
+              <a:t> tamamen ücretsiz sağlamasıdır.</a:t>
+            </a:r>
+          </a:p>
+          <a:p>
+            <a:pPr marL="36900" indent="0">
+              <a:buNone/>
+            </a:pPr>
+            <a:endParaRPr lang="tr-TR" dirty="0"/>
+          </a:p>
+        </p:txBody>
+      </p:sp>
+    </p:spTree>
+    <p:extLst>
+      <p:ext uri="{BB962C8B-B14F-4D97-AF65-F5344CB8AC3E}">
+        <p14:creationId xmlns:p14="http://schemas.microsoft.com/office/powerpoint/2010/main" val="2936575898"/>
+      </p:ext>
+    </p:extLst>
+  </p:cSld>
+  <p:clrMapOvr>
+    <a:masterClrMapping/>
+  </p:clrMapOvr>
+  <p:timing>
+    <p:tnLst>
+      <p:par>
+        <p:cTn id="1" dur="indefinite" restart="never" nodeType="tmRoot"/>
+      </p:par>
+    </p:tnLst>
+  </p:timing>
+</p:sld>
+</file>
+
 <file path=ppt/theme/theme1.xml><?xml version="1.0" encoding="utf-8"?>
-<a:theme xmlns:a="http://schemas.openxmlformats.org/drawingml/2006/main" name="Tablet">
+<a:theme xmlns:a="http://schemas.openxmlformats.org/drawingml/2006/main" name="İyon">
   <a:themeElements>
-    <a:clrScheme name="Tablet">
+    <a:clrScheme name="İyon">
       <a:dk1>
         <a:sysClr val="windowText" lastClr="000000"/>
       </a:dk1>
@@ -6187,52 +7989,52 @@
         <a:sysClr val="window" lastClr="FFFFFF"/>
       </a:lt1>
       <a:dk2>
-        <a:srgbClr val="212123"/>
+        <a:srgbClr val="1E5155"/>
       </a:dk2>
       <a:lt2>
-        <a:srgbClr val="DADADA"/>
+        <a:srgbClr val="EBEBEB"/>
       </a:lt2>
       <a:accent1>
-        <a:srgbClr val="BC451B"/>
+        <a:srgbClr val="B01513"/>
       </a:accent1>
       <a:accent2>
-        <a:srgbClr val="D3BA68"/>
+        <a:srgbClr val="EA6312"/>
       </a:accent2>
       <a:accent3>
-        <a:srgbClr val="BB8640"/>
+        <a:srgbClr val="E6B729"/>
       </a:accent3>
       <a:accent4>
-        <a:srgbClr val="AD9277"/>
+        <a:srgbClr val="6AAC90"/>
       </a:accent4>
       <a:accent5>
-        <a:srgbClr val="A55A43"/>
+        <a:srgbClr val="54849A"/>
       </a:accent5>
       <a:accent6>
-        <a:srgbClr val="AD9D7B"/>
+        <a:srgbClr val="9E5E9B"/>
       </a:accent6>
       <a:hlink>
-        <a:srgbClr val="E98052"/>
+        <a:srgbClr val="58C1BA"/>
       </a:hlink>
       <a:folHlink>
-        <a:srgbClr val="F4B69B"/>
+        <a:srgbClr val="9DFFCB"/>
       </a:folHlink>
     </a:clrScheme>
-    <a:fontScheme name="Tablet">
+    <a:fontScheme name="İyon">
       <a:majorFont>
-        <a:latin typeface="Calisto MT" panose="02040603050505030304"/>
+        <a:latin typeface="Century Gothic" panose="020B0502020202020204"/>
         <a:ea typeface=""/>
         <a:cs typeface=""/>
-        <a:font script="Jpan" typeface="ＭＳ Ｐゴシック"/>
-        <a:font script="Hang" typeface="돋움"/>
-        <a:font script="Hans" typeface="方正舒体"/>
-        <a:font script="Hant" typeface="微軟正黑體"/>
-        <a:font script="Arab" typeface="Arial"/>
-        <a:font script="Hebr" typeface="Arial"/>
-        <a:font script="Thai" typeface="Cordia New"/>
+        <a:font script="Jpan" typeface="メイリオ"/>
+        <a:font script="Hang" typeface="맑은 고딕"/>
+        <a:font script="Hans" typeface="宋体"/>
+        <a:font script="Hant" typeface="新細明體"/>
+        <a:font script="Arab" typeface="Times New Roman"/>
+        <a:font script="Hebr" typeface="Times New Roman"/>
+        <a:font script="Thai" typeface="Angsana New"/>
         <a:font script="Ethi" typeface="Nyala"/>
         <a:font script="Beng" typeface="Vrinda"/>
         <a:font script="Gujr" typeface="Shruti"/>
-        <a:font script="Khmr" typeface="DaunPenh"/>
+        <a:font script="Khmr" typeface="MoolBoran"/>
         <a:font script="Knda" typeface="Tunga"/>
         <a:font script="Guru" typeface="Raavi"/>
         <a:font script="Cans" typeface="Euphemia"/>
@@ -6249,18 +8051,18 @@
         <a:font script="Laoo" typeface="DokChampa"/>
         <a:font script="Sinh" typeface="Iskoola Pota"/>
         <a:font script="Mong" typeface="Mongolian Baiti"/>
-        <a:font script="Viet" typeface="Arial"/>
+        <a:font script="Viet" typeface="Times New Roman"/>
         <a:font script="Uigh" typeface="Microsoft Uighur"/>
         <a:font script="Geor" typeface="Sylfaen"/>
       </a:majorFont>
       <a:minorFont>
-        <a:latin typeface="Calisto MT" panose="02040603050505030304"/>
+        <a:latin typeface="Century Gothic" panose="020B0502020202020204"/>
         <a:ea typeface=""/>
         <a:cs typeface=""/>
-        <a:font script="Jpan" typeface="ＭＳ Ｐゴシック"/>
-        <a:font script="Hang" typeface="돋움"/>
-        <a:font script="Hans" typeface="方正舒体"/>
-        <a:font script="Hant" typeface="微軟正黑體"/>
+        <a:font script="Jpan" typeface="メイリオ"/>
+        <a:font script="Hang" typeface="맑은 고딕"/>
+        <a:font script="Hans" typeface="宋体"/>
+        <a:font script="Hant" typeface="新細明體"/>
         <a:font script="Arab" typeface="Arial"/>
         <a:font script="Hebr" typeface="Arial"/>
         <a:font script="Thai" typeface="Cordia New"/>
@@ -6289,7 +8091,7 @@
         <a:font script="Geor" typeface="Sylfaen"/>
       </a:minorFont>
     </a:fontScheme>
-    <a:fmtScheme name="Tablet">
+    <a:fmtScheme name="İyon">
       <a:fillStyleLst>
         <a:solidFill>
           <a:schemeClr val="phClr"/>
@@ -6298,13 +8100,15 @@
           <a:gsLst>
             <a:gs pos="0">
               <a:schemeClr val="phClr">
-                <a:tint val="60000"/>
-                <a:lumMod val="110000"/>
+                <a:tint val="64000"/>
+                <a:lumMod val="118000"/>
               </a:schemeClr>
             </a:gs>
             <a:gs pos="100000">
               <a:schemeClr val="phClr">
-                <a:tint val="88000"/>
+                <a:tint val="92000"/>
+                <a:alpha val="100000"/>
+                <a:lumMod val="110000"/>
               </a:schemeClr>
             </a:gs>
           </a:gsLst>
@@ -6314,14 +8118,14 @@
           <a:gsLst>
             <a:gs pos="0">
               <a:schemeClr val="phClr">
-                <a:tint val="96000"/>
-                <a:lumMod val="104000"/>
+                <a:tint val="98000"/>
+                <a:lumMod val="114000"/>
               </a:schemeClr>
             </a:gs>
             <a:gs pos="100000">
               <a:schemeClr val="phClr">
                 <a:shade val="90000"/>
-                <a:lumMod val="90000"/>
+                <a:lumMod val="84000"/>
               </a:schemeClr>
             </a:gs>
           </a:gsLst>
@@ -6331,19 +8135,17 @@
       <a:lnStyleLst>
         <a:ln w="9525" cap="rnd" cmpd="sng" algn="ctr">
           <a:solidFill>
-            <a:schemeClr val="phClr">
-              <a:shade val="90000"/>
-            </a:schemeClr>
+            <a:schemeClr val="phClr"/>
           </a:solidFill>
           <a:prstDash val="solid"/>
         </a:ln>
-        <a:ln w="15875" cap="rnd" cmpd="sng" algn="ctr">
+        <a:ln w="19050" cap="rnd" cmpd="sng" algn="ctr">
           <a:solidFill>
             <a:schemeClr val="phClr"/>
           </a:solidFill>
           <a:prstDash val="solid"/>
         </a:ln>
-        <a:ln w="25400" cap="rnd" cmpd="sng" algn="ctr">
+        <a:ln w="28575" cap="rnd" cmpd="sng" algn="ctr">
           <a:solidFill>
             <a:schemeClr val="phClr"/>
           </a:solidFill>
@@ -6356,18 +8158,18 @@
         </a:effectStyle>
         <a:effectStyle>
           <a:effectLst>
-            <a:outerShdw blurRad="63500" dist="25400" dir="5400000" rotWithShape="0">
+            <a:outerShdw blurRad="38100" dist="25400" dir="5400000" rotWithShape="0">
               <a:srgbClr val="000000">
-                <a:alpha val="60000"/>
+                <a:alpha val="45000"/>
               </a:srgbClr>
             </a:outerShdw>
           </a:effectLst>
         </a:effectStyle>
         <a:effectStyle>
           <a:effectLst>
-            <a:outerShdw blurRad="76200" dist="38100" dir="5400000" rotWithShape="0">
+            <a:outerShdw blurRad="63500" dist="38100" dir="5400000" rotWithShape="0">
               <a:srgbClr val="000000">
-                <a:alpha val="75000"/>
+                <a:alpha val="60000"/>
               </a:srgbClr>
             </a:outerShdw>
           </a:effectLst>
@@ -6375,12 +8177,10 @@
             <a:camera prst="orthographicFront">
               <a:rot lat="0" lon="0" rev="0"/>
             </a:camera>
-            <a:lightRig rig="threePt" dir="t">
-              <a:rot lat="0" lon="0" rev="1200000"/>
-            </a:lightRig>
+            <a:lightRig rig="threePt" dir="tl"/>
           </a:scene3d>
-          <a:sp3d>
-            <a:bevelT w="63500" h="25400" prst="hardEdge"/>
+          <a:sp3d prstMaterial="plastic">
+            <a:bevelT w="0" h="0"/>
           </a:sp3d>
         </a:effectStyle>
       </a:effectStyleLst>
@@ -6388,18 +8188,44 @@
         <a:solidFill>
           <a:schemeClr val="phClr"/>
         </a:solidFill>
-        <a:solidFill>
-          <a:schemeClr val="phClr"/>
-        </a:solidFill>
+        <a:gradFill rotWithShape="1">
+          <a:gsLst>
+            <a:gs pos="0">
+              <a:schemeClr val="phClr">
+                <a:tint val="97000"/>
+                <a:hueMod val="88000"/>
+                <a:satMod val="130000"/>
+                <a:lumMod val="124000"/>
+              </a:schemeClr>
+            </a:gs>
+            <a:gs pos="100000">
+              <a:schemeClr val="phClr">
+                <a:tint val="96000"/>
+                <a:shade val="88000"/>
+                <a:hueMod val="108000"/>
+                <a:satMod val="164000"/>
+                <a:lumMod val="76000"/>
+              </a:schemeClr>
+            </a:gs>
+          </a:gsLst>
+          <a:path path="circle">
+            <a:fillToRect l="45000" t="65000" r="125000" b="100000"/>
+          </a:path>
+        </a:gradFill>
         <a:blipFill rotWithShape="1">
           <a:blip xmlns:r="http://schemas.openxmlformats.org/officeDocument/2006/relationships" r:embed="rId1">
             <a:duotone>
               <a:schemeClr val="phClr">
-                <a:shade val="80000"/>
-                <a:lumMod val="80000"/>
+                <a:shade val="69000"/>
+                <a:hueMod val="108000"/>
+                <a:satMod val="164000"/>
+                <a:lumMod val="74000"/>
               </a:schemeClr>
               <a:schemeClr val="phClr">
-                <a:tint val="98000"/>
+                <a:tint val="96000"/>
+                <a:hueMod val="88000"/>
+                <a:satMod val="140000"/>
+                <a:lumMod val="132000"/>
               </a:schemeClr>
             </a:duotone>
           </a:blip>
@@ -6412,7 +8238,7 @@
   <a:extraClrSchemeLst/>
   <a:extLst>
     <a:ext uri="{05A4C25C-085E-4340-85A3-A5531E510DB2}">
-      <thm15:themeFamily xmlns:thm15="http://schemas.microsoft.com/office/thememl/2012/main" name="Slate" id="{C3F70B94-7CE9-428E-ADC1-3269CC2C3385}" vid="{3F2DE9A5-64E6-437C-A389-CC4477E817E8}"/>
+      <thm15:themeFamily xmlns:thm15="http://schemas.microsoft.com/office/thememl/2012/main" name="Ion" id="{B8441ADB-2E43-4AF7-B97A-BD870242C6A8}" vid="{292E63A9-BB86-4E3D-B92A-7223C6510D2E}"/>
     </a:ext>
   </a:extLst>
 </a:theme>
